--- a/site-assets/sources/day7/fig-ja-en.pptx
+++ b/site-assets/sources/day7/fig-ja-en.pptx
@@ -3136,6 +3136,2343 @@
       </p:grpSpPr>
       <p:sp>
         <p:nvSpPr>
+          <p:cNvPr id="2" name="テキスト ボックス 1">
+            <a:extLst>
+              <a:ext uri="{FF2B5EF4-FFF2-40B4-BE49-F238E27FC236}">
+                <a16:creationId xmlns:a16="http://schemas.microsoft.com/office/drawing/2014/main" id="{E1F492F3-EA16-9840-BF6B-F17F7BFF6F08}"/>
+              </a:ext>
+            </a:extLst>
+          </p:cNvPr>
+          <p:cNvSpPr txBox="1"/>
+          <p:nvPr/>
+        </p:nvSpPr>
+        <p:spPr>
+          <a:xfrm>
+            <a:off x="457200" y="365760"/>
+            <a:ext cx="2339102" cy="461665"/>
+          </a:xfrm>
+          <a:prstGeom prst="rect">
+            <a:avLst/>
+          </a:prstGeom>
+          <a:noFill/>
+          <a:ln>
+            <a:solidFill>
+              <a:schemeClr val="tx1"/>
+            </a:solidFill>
+          </a:ln>
+        </p:spPr>
+        <p:txBody>
+          <a:bodyPr wrap="square" rtlCol="0"/>
+          <a:lstStyle/>
+          <a:p>
+            <a:pPr>
+              <a:defRPr sz="2300"/>
+            </a:pPr>
+            <a:r>
+              <a:rPr kumimoji="1" lang="ja-JP" altLang="en-US" sz="2300"/>
+              <a:t>Superscalar</a:t>
+            </a:r>
+          </a:p>
+        </p:txBody>
+      </p:sp>
+      <p:sp>
+        <p:nvSpPr>
+          <p:cNvPr id="3" name="テキスト ボックス 2">
+            <a:extLst>
+              <a:ext uri="{FF2B5EF4-FFF2-40B4-BE49-F238E27FC236}">
+                <a16:creationId xmlns:a16="http://schemas.microsoft.com/office/drawing/2014/main" id="{7051BBA0-954A-BA4F-BE23-34DD042C3180}"/>
+              </a:ext>
+            </a:extLst>
+          </p:cNvPr>
+          <p:cNvSpPr txBox="1"/>
+          <p:nvPr/>
+        </p:nvSpPr>
+        <p:spPr>
+          <a:xfrm>
+            <a:off x="111760" y="1056640"/>
+            <a:ext cx="2852063" cy="338554"/>
+          </a:xfrm>
+          <a:prstGeom prst="rect">
+            <a:avLst/>
+          </a:prstGeom>
+          <a:noFill/>
+          <a:ln>
+            <a:noFill/>
+          </a:ln>
+        </p:spPr>
+        <p:txBody>
+          <a:bodyPr wrap="square" rtlCol="0"/>
+          <a:lstStyle/>
+          <a:p>
+            <a:pPr>
+              <a:defRPr sz="1500"/>
+            </a:pPr>
+            <a:r>
+              <a:rPr kumimoji="1" lang="ja-JP" altLang="en-US" sz="1500" b="1" dirty="0">
+                <a:solidFill>
+                  <a:srgbClr val="FF0000"/>
+                </a:solidFill>
+              </a:rPr>
+              <a:t>Make the hardware work hard</a:t>
+            </a:r>
+          </a:p>
+        </p:txBody>
+      </p:sp>
+      <p:sp>
+        <p:nvSpPr>
+          <p:cNvPr id="4" name="テキスト ボックス 3">
+            <a:extLst>
+              <a:ext uri="{FF2B5EF4-FFF2-40B4-BE49-F238E27FC236}">
+                <a16:creationId xmlns:a16="http://schemas.microsoft.com/office/drawing/2014/main" id="{C75A6943-B583-9C49-850F-A11CDB81BD43}"/>
+              </a:ext>
+            </a:extLst>
+          </p:cNvPr>
+          <p:cNvSpPr txBox="1"/>
+          <p:nvPr/>
+        </p:nvSpPr>
+        <p:spPr>
+          <a:xfrm>
+            <a:off x="4361284" y="325120"/>
+            <a:ext cx="840295" cy="461665"/>
+          </a:xfrm>
+          <a:prstGeom prst="rect">
+            <a:avLst/>
+          </a:prstGeom>
+          <a:noFill/>
+          <a:ln>
+            <a:solidFill>
+              <a:schemeClr val="tx1"/>
+            </a:solidFill>
+          </a:ln>
+        </p:spPr>
+        <p:txBody>
+          <a:bodyPr wrap="square" rtlCol="0"/>
+          <a:lstStyle/>
+          <a:p>
+            <a:pPr>
+              <a:defRPr sz="2250"/>
+            </a:pPr>
+            <a:r>
+              <a:rPr kumimoji="1" lang="en-US" altLang="ja-JP" sz="2250"/>
+              <a:t>VLIW</a:t>
+            </a:r>
+            <a:endParaRPr kumimoji="1" lang="ja-JP" altLang="en-US" sz="2400"/>
+          </a:p>
+        </p:txBody>
+      </p:sp>
+      <p:sp>
+        <p:nvSpPr>
+          <p:cNvPr id="5" name="テキスト ボックス 4">
+            <a:extLst>
+              <a:ext uri="{FF2B5EF4-FFF2-40B4-BE49-F238E27FC236}">
+                <a16:creationId xmlns:a16="http://schemas.microsoft.com/office/drawing/2014/main" id="{E155F947-E83E-8344-B2E8-5B00AEB31904}"/>
+              </a:ext>
+            </a:extLst>
+          </p:cNvPr>
+          <p:cNvSpPr txBox="1"/>
+          <p:nvPr/>
+        </p:nvSpPr>
+        <p:spPr>
+          <a:xfrm>
+            <a:off x="3484880" y="1016000"/>
+            <a:ext cx="2646878" cy="338554"/>
+          </a:xfrm>
+          <a:prstGeom prst="rect">
+            <a:avLst/>
+          </a:prstGeom>
+          <a:noFill/>
+          <a:ln>
+            <a:noFill/>
+          </a:ln>
+        </p:spPr>
+        <p:txBody>
+          <a:bodyPr wrap="square" rtlCol="0"/>
+          <a:lstStyle/>
+          <a:p>
+            <a:pPr>
+              <a:defRPr sz="1400"/>
+            </a:pPr>
+            <a:r>
+              <a:rPr kumimoji="1" lang="ja-JP" altLang="en-US" sz="1400" b="1" dirty="0">
+                <a:solidFill>
+                  <a:srgbClr val="FF0000"/>
+                </a:solidFill>
+              </a:rPr>
+              <a:t>Make the compiler work hard</a:t>
+            </a:r>
+          </a:p>
+        </p:txBody>
+      </p:sp>
+      <p:sp>
+        <p:nvSpPr>
+          <p:cNvPr id="6" name="テキスト ボックス 5">
+            <a:extLst>
+              <a:ext uri="{FF2B5EF4-FFF2-40B4-BE49-F238E27FC236}">
+                <a16:creationId xmlns:a16="http://schemas.microsoft.com/office/drawing/2014/main" id="{236C4897-F8AE-F341-95E3-F0142750F2F1}"/>
+              </a:ext>
+            </a:extLst>
+          </p:cNvPr>
+          <p:cNvSpPr txBox="1"/>
+          <p:nvPr/>
+        </p:nvSpPr>
+        <p:spPr>
+          <a:xfrm>
+            <a:off x="7620000" y="304800"/>
+            <a:ext cx="854721" cy="461665"/>
+          </a:xfrm>
+          <a:prstGeom prst="rect">
+            <a:avLst/>
+          </a:prstGeom>
+          <a:noFill/>
+          <a:ln>
+            <a:solidFill>
+              <a:schemeClr val="tx1"/>
+            </a:solidFill>
+          </a:ln>
+        </p:spPr>
+        <p:txBody>
+          <a:bodyPr wrap="square" rtlCol="0"/>
+          <a:lstStyle/>
+          <a:p>
+            <a:pPr>
+              <a:defRPr sz="2300"/>
+            </a:pPr>
+            <a:r>
+              <a:rPr kumimoji="1" lang="en-US" altLang="ja-JP" sz="2300"/>
+              <a:t>SIMD</a:t>
+            </a:r>
+            <a:endParaRPr kumimoji="1" lang="ja-JP" altLang="en-US" sz="2400"/>
+          </a:p>
+        </p:txBody>
+      </p:sp>
+      <p:sp>
+        <p:nvSpPr>
+          <p:cNvPr id="7" name="テキスト ボックス 6">
+            <a:extLst>
+              <a:ext uri="{FF2B5EF4-FFF2-40B4-BE49-F238E27FC236}">
+                <a16:creationId xmlns:a16="http://schemas.microsoft.com/office/drawing/2014/main" id="{53E2A7F9-3F02-3E42-AC3E-C3C27164A771}"/>
+              </a:ext>
+            </a:extLst>
+          </p:cNvPr>
+          <p:cNvSpPr txBox="1"/>
+          <p:nvPr/>
+        </p:nvSpPr>
+        <p:spPr>
+          <a:xfrm>
+            <a:off x="6797040" y="995680"/>
+            <a:ext cx="2646878" cy="338554"/>
+          </a:xfrm>
+          <a:prstGeom prst="rect">
+            <a:avLst/>
+          </a:prstGeom>
+          <a:noFill/>
+          <a:ln>
+            <a:noFill/>
+          </a:ln>
+        </p:spPr>
+        <p:txBody>
+          <a:bodyPr wrap="square" rtlCol="0"/>
+          <a:lstStyle/>
+          <a:p>
+            <a:pPr>
+              <a:defRPr sz="1300"/>
+            </a:pPr>
+            <a:r>
+              <a:rPr kumimoji="1" lang="ja-JP" altLang="en-US" sz="1300" b="1" dirty="0">
+                <a:solidFill>
+                  <a:srgbClr val="FF0000"/>
+                </a:solidFill>
+              </a:rPr>
+              <a:t>Make the programmer work hard</a:t>
+            </a:r>
+          </a:p>
+        </p:txBody>
+      </p:sp>
+      <p:sp>
+        <p:nvSpPr>
+          <p:cNvPr id="9" name="角丸四角形 8">
+            <a:extLst>
+              <a:ext uri="{FF2B5EF4-FFF2-40B4-BE49-F238E27FC236}">
+                <a16:creationId xmlns:a16="http://schemas.microsoft.com/office/drawing/2014/main" id="{16B706E8-71B3-F54F-B6D3-5195D7B3CF23}"/>
+              </a:ext>
+            </a:extLst>
+          </p:cNvPr>
+          <p:cNvSpPr/>
+          <p:nvPr/>
+        </p:nvSpPr>
+        <p:spPr>
+          <a:xfrm>
+            <a:off x="2123440" y="1983740"/>
+            <a:ext cx="1046480" cy="416107"/>
+          </a:xfrm>
+          <a:prstGeom prst="roundRect">
+            <a:avLst/>
+          </a:prstGeom>
+          <a:noFill/>
+          <a:ln>
+            <a:solidFill>
+              <a:schemeClr val="tx1"/>
+            </a:solidFill>
+          </a:ln>
+          <a:effectLst/>
+        </p:spPr>
+        <p:style>
+          <a:lnRef idx="1">
+            <a:schemeClr val="accent1"/>
+          </a:lnRef>
+          <a:fillRef idx="3">
+            <a:schemeClr val="accent1"/>
+          </a:fillRef>
+          <a:effectRef idx="2">
+            <a:schemeClr val="accent1"/>
+          </a:effectRef>
+          <a:fontRef idx="minor">
+            <a:schemeClr val="lt1"/>
+          </a:fontRef>
+        </p:style>
+        <p:txBody>
+          <a:bodyPr rtlCol="0" anchor="ctr" wrap="square"/>
+          <a:lstStyle/>
+          <a:p>
+            <a:pPr algn="ctr">
+              <a:defRPr sz="1150"/>
+            </a:pPr>
+            <a:r>
+              <a:rPr kumimoji="1" lang="ja-JP" altLang="en-US" sz="1150" dirty="0">
+                <a:solidFill>
+                  <a:schemeClr val="tx1"/>
+                </a:solidFill>
+              </a:rPr>
+              <a:t>Execution</a:t>
+            </a:r>
+            <a:endParaRPr kumimoji="1" lang="en-US" altLang="ja-JP" sz="1200" dirty="0">
+              <a:solidFill>
+                <a:schemeClr val="tx1"/>
+              </a:solidFill>
+            </a:endParaRPr>
+          </a:p>
+          <a:p>
+            <a:pPr algn="ctr">
+              <a:defRPr sz="1150"/>
+            </a:pPr>
+            <a:r>
+              <a:rPr kumimoji="1" lang="ja-JP" altLang="en-US" sz="1150" dirty="0">
+                <a:solidFill>
+                  <a:schemeClr val="tx1"/>
+                </a:solidFill>
+              </a:rPr>
+              <a:t>unit</a:t>
+            </a:r>
+            <a:endParaRPr kumimoji="1" lang="en-US" altLang="ja-JP" sz="1200" dirty="0">
+              <a:solidFill>
+                <a:schemeClr val="tx1"/>
+              </a:solidFill>
+            </a:endParaRPr>
+          </a:p>
+        </p:txBody>
+      </p:sp>
+      <p:sp>
+        <p:nvSpPr>
+          <p:cNvPr id="10" name="角丸四角形 9">
+            <a:extLst>
+              <a:ext uri="{FF2B5EF4-FFF2-40B4-BE49-F238E27FC236}">
+                <a16:creationId xmlns:a16="http://schemas.microsoft.com/office/drawing/2014/main" id="{F1AE55D0-F074-E646-9F94-830067ABBBB1}"/>
+              </a:ext>
+            </a:extLst>
+          </p:cNvPr>
+          <p:cNvSpPr/>
+          <p:nvPr/>
+        </p:nvSpPr>
+        <p:spPr>
+          <a:xfrm>
+            <a:off x="2133600" y="2625018"/>
+            <a:ext cx="1036320" cy="416107"/>
+          </a:xfrm>
+          <a:prstGeom prst="roundRect">
+            <a:avLst/>
+          </a:prstGeom>
+          <a:noFill/>
+          <a:ln>
+            <a:solidFill>
+              <a:schemeClr val="tx1"/>
+            </a:solidFill>
+          </a:ln>
+          <a:effectLst/>
+        </p:spPr>
+        <p:style>
+          <a:lnRef idx="1">
+            <a:schemeClr val="accent1"/>
+          </a:lnRef>
+          <a:fillRef idx="3">
+            <a:schemeClr val="accent1"/>
+          </a:fillRef>
+          <a:effectRef idx="2">
+            <a:schemeClr val="accent1"/>
+          </a:effectRef>
+          <a:fontRef idx="minor">
+            <a:schemeClr val="lt1"/>
+          </a:fontRef>
+        </p:style>
+        <p:txBody>
+          <a:bodyPr rtlCol="0" anchor="ctr" wrap="square"/>
+          <a:lstStyle/>
+          <a:p>
+            <a:pPr algn="ctr">
+              <a:defRPr sz="1150"/>
+            </a:pPr>
+            <a:r>
+              <a:rPr kumimoji="1" lang="ja-JP" altLang="en-US" sz="1150" dirty="0">
+                <a:solidFill>
+                  <a:schemeClr val="tx1"/>
+                </a:solidFill>
+              </a:rPr>
+              <a:t>Execution</a:t>
+            </a:r>
+            <a:endParaRPr kumimoji="1" lang="en-US" altLang="ja-JP" sz="1200" dirty="0">
+              <a:solidFill>
+                <a:schemeClr val="tx1"/>
+              </a:solidFill>
+            </a:endParaRPr>
+          </a:p>
+          <a:p>
+            <a:pPr algn="ctr">
+              <a:defRPr sz="1150"/>
+            </a:pPr>
+            <a:r>
+              <a:rPr kumimoji="1" lang="ja-JP" altLang="en-US" sz="1150" dirty="0">
+                <a:solidFill>
+                  <a:schemeClr val="tx1"/>
+                </a:solidFill>
+              </a:rPr>
+              <a:t>unit</a:t>
+            </a:r>
+            <a:endParaRPr kumimoji="1" lang="en-US" altLang="ja-JP" sz="1200" dirty="0">
+              <a:solidFill>
+                <a:schemeClr val="tx1"/>
+              </a:solidFill>
+            </a:endParaRPr>
+          </a:p>
+        </p:txBody>
+      </p:sp>
+      <p:cxnSp>
+        <p:nvCxnSpPr>
+          <p:cNvPr id="11" name="カギ線コネクタ 10">
+            <a:extLst>
+              <a:ext uri="{FF2B5EF4-FFF2-40B4-BE49-F238E27FC236}">
+                <a16:creationId xmlns:a16="http://schemas.microsoft.com/office/drawing/2014/main" id="{59846A2A-048D-204D-8AE4-FF3FB51F840C}"/>
+              </a:ext>
+            </a:extLst>
+          </p:cNvPr>
+          <p:cNvCxnSpPr>
+            <a:cxnSpLocks/>
+            <a:stCxn id="13" idx="3"/>
+            <a:endCxn id="9" idx="1"/>
+          </p:cNvCxnSpPr>
+          <p:nvPr/>
+        </p:nvCxnSpPr>
+        <p:spPr>
+          <a:xfrm flipV="1">
+            <a:off x="1209040" y="2191794"/>
+            <a:ext cx="914400" cy="327886"/>
+          </a:xfrm>
+          <a:prstGeom prst="bentConnector3">
+            <a:avLst>
+              <a:gd name="adj1" fmla="val 48889"/>
+            </a:avLst>
+          </a:prstGeom>
+          <a:ln w="19050">
+            <a:solidFill>
+              <a:srgbClr val="FF0000"/>
+            </a:solidFill>
+            <a:headEnd type="none" w="med" len="med"/>
+            <a:tailEnd type="arrow"/>
+          </a:ln>
+        </p:spPr>
+        <p:style>
+          <a:lnRef idx="1">
+            <a:schemeClr val="accent1"/>
+          </a:lnRef>
+          <a:fillRef idx="0">
+            <a:schemeClr val="accent1"/>
+          </a:fillRef>
+          <a:effectRef idx="0">
+            <a:schemeClr val="accent1"/>
+          </a:effectRef>
+          <a:fontRef idx="minor">
+            <a:schemeClr val="tx1"/>
+          </a:fontRef>
+        </p:style>
+      </p:cxnSp>
+      <p:cxnSp>
+        <p:nvCxnSpPr>
+          <p:cNvPr id="12" name="カギ線コネクタ 11">
+            <a:extLst>
+              <a:ext uri="{FF2B5EF4-FFF2-40B4-BE49-F238E27FC236}">
+                <a16:creationId xmlns:a16="http://schemas.microsoft.com/office/drawing/2014/main" id="{1CF5CF92-D7EB-2448-B433-3FF70A8992E2}"/>
+              </a:ext>
+            </a:extLst>
+          </p:cNvPr>
+          <p:cNvCxnSpPr>
+            <a:cxnSpLocks/>
+            <a:stCxn id="13" idx="3"/>
+            <a:endCxn id="10" idx="1"/>
+          </p:cNvCxnSpPr>
+          <p:nvPr/>
+        </p:nvCxnSpPr>
+        <p:spPr>
+          <a:xfrm>
+            <a:off x="1209040" y="2519680"/>
+            <a:ext cx="924560" cy="313392"/>
+          </a:xfrm>
+          <a:prstGeom prst="bentConnector3">
+            <a:avLst>
+              <a:gd name="adj1" fmla="val 48901"/>
+            </a:avLst>
+          </a:prstGeom>
+          <a:ln w="19050">
+            <a:solidFill>
+              <a:srgbClr val="FF0000"/>
+            </a:solidFill>
+            <a:headEnd type="none" w="med" len="med"/>
+            <a:tailEnd type="arrow"/>
+          </a:ln>
+        </p:spPr>
+        <p:style>
+          <a:lnRef idx="1">
+            <a:schemeClr val="accent1"/>
+          </a:lnRef>
+          <a:fillRef idx="0">
+            <a:schemeClr val="accent1"/>
+          </a:fillRef>
+          <a:effectRef idx="0">
+            <a:schemeClr val="accent1"/>
+          </a:effectRef>
+          <a:fontRef idx="minor">
+            <a:schemeClr val="tx1"/>
+          </a:fontRef>
+        </p:style>
+      </p:cxnSp>
+      <p:sp>
+        <p:nvSpPr>
+          <p:cNvPr id="13" name="角丸四角形 12">
+            <a:extLst>
+              <a:ext uri="{FF2B5EF4-FFF2-40B4-BE49-F238E27FC236}">
+                <a16:creationId xmlns:a16="http://schemas.microsoft.com/office/drawing/2014/main" id="{05614538-FE36-464E-A9D7-A32C16F5C67B}"/>
+              </a:ext>
+            </a:extLst>
+          </p:cNvPr>
+          <p:cNvSpPr/>
+          <p:nvPr/>
+        </p:nvSpPr>
+        <p:spPr>
+          <a:xfrm>
+            <a:off x="487680" y="1981200"/>
+            <a:ext cx="721360" cy="1076959"/>
+          </a:xfrm>
+          <a:prstGeom prst="roundRect">
+            <a:avLst/>
+          </a:prstGeom>
+          <a:solidFill>
+            <a:schemeClr val="bg1"/>
+          </a:solidFill>
+          <a:ln>
+            <a:solidFill>
+              <a:schemeClr val="tx1"/>
+            </a:solidFill>
+          </a:ln>
+          <a:effectLst/>
+        </p:spPr>
+        <p:style>
+          <a:lnRef idx="1">
+            <a:schemeClr val="accent1"/>
+          </a:lnRef>
+          <a:fillRef idx="3">
+            <a:schemeClr val="accent1"/>
+          </a:fillRef>
+          <a:effectRef idx="2">
+            <a:schemeClr val="accent1"/>
+          </a:effectRef>
+          <a:fontRef idx="minor">
+            <a:schemeClr val="lt1"/>
+          </a:fontRef>
+        </p:style>
+        <p:txBody>
+          <a:bodyPr rtlCol="0" anchor="ctr"/>
+          <a:lstStyle/>
+          <a:p>
+            <a:pPr algn="ctr">
+              <a:defRPr/>
+            </a:pPr>
+            <a:r>
+              <a:rPr kumimoji="1" lang="ja-JP" altLang="en-US" sz="1200" dirty="0">
+                <a:solidFill>
+                  <a:schemeClr val="tx1"/>
+                </a:solidFill>
+              </a:rPr>
+              <a:t>Instruction queue</a:t>
+            </a:r>
+          </a:p>
+        </p:txBody>
+      </p:sp>
+      <p:sp>
+        <p:nvSpPr>
+          <p:cNvPr id="14" name="テキスト ボックス 13">
+            <a:extLst>
+              <a:ext uri="{FF2B5EF4-FFF2-40B4-BE49-F238E27FC236}">
+                <a16:creationId xmlns:a16="http://schemas.microsoft.com/office/drawing/2014/main" id="{26BE572B-4298-184B-8524-7A29377ED6D3}"/>
+              </a:ext>
+            </a:extLst>
+          </p:cNvPr>
+          <p:cNvSpPr txBox="1"/>
+          <p:nvPr/>
+        </p:nvSpPr>
+        <p:spPr>
+          <a:xfrm>
+            <a:off x="741681" y="1665148"/>
+            <a:ext cx="808786" cy="276999"/>
+          </a:xfrm>
+          <a:prstGeom prst="rect">
+            <a:avLst/>
+          </a:prstGeom>
+          <a:noFill/>
+        </p:spPr>
+        <p:txBody>
+          <a:bodyPr wrap="square" rtlCol="0">
+            <a:spAutoFit/>
+          </a:bodyPr>
+          <a:lstStyle/>
+          <a:p>
+            <a:pPr>
+              <a:defRPr/>
+            </a:pPr>
+            <a:r>
+              <a:rPr kumimoji="1" lang="ja-JP" altLang="en-US" sz="1200" dirty="0"/>
+              <a:t>Dispatch</a:t>
+            </a:r>
+          </a:p>
+        </p:txBody>
+      </p:sp>
+      <p:sp>
+        <p:nvSpPr>
+          <p:cNvPr id="20" name="テキスト ボックス 19">
+            <a:extLst>
+              <a:ext uri="{FF2B5EF4-FFF2-40B4-BE49-F238E27FC236}">
+                <a16:creationId xmlns:a16="http://schemas.microsoft.com/office/drawing/2014/main" id="{4D504E4A-D45E-4346-8869-A6D4580087F3}"/>
+              </a:ext>
+            </a:extLst>
+          </p:cNvPr>
+          <p:cNvSpPr txBox="1"/>
+          <p:nvPr/>
+        </p:nvSpPr>
+        <p:spPr>
+          <a:xfrm>
+            <a:off x="798865" y="5695017"/>
+            <a:ext cx="2159566" cy="523220"/>
+          </a:xfrm>
+          <a:prstGeom prst="rect">
+            <a:avLst/>
+          </a:prstGeom>
+          <a:noFill/>
+        </p:spPr>
+        <p:txBody>
+          <a:bodyPr wrap="square" rtlCol="0"/>
+          <a:lstStyle/>
+          <a:p>
+            <a:pPr>
+              <a:defRPr sz="1000"/>
+            </a:pPr>
+            <a:r>
+              <a:rPr kumimoji="1" lang="ja-JP" altLang="en-US" sz="1000" b="1" dirty="0">
+                <a:solidFill>
+                  <a:srgbClr val="FF0000"/>
+                </a:solidFill>
+              </a:rPr>
+              <a:t>As execution units increase,</a:t>
+            </a:r>
+            <a:endParaRPr kumimoji="1" lang="en-US" altLang="ja-JP" sz="1400" b="1" dirty="0">
+              <a:solidFill>
+                <a:srgbClr val="FF0000"/>
+              </a:solidFill>
+            </a:endParaRPr>
+          </a:p>
+          <a:p>
+            <a:pPr>
+              <a:defRPr sz="1000"/>
+            </a:pPr>
+            <a:r>
+              <a:rPr kumimoji="1" lang="ja-JP" altLang="en-US" sz="1000" b="1" dirty="0">
+                <a:solidFill>
+                  <a:srgbClr val="FF0000"/>
+                </a:solidFill>
+              </a:rPr>
+              <a:t>instruction dispatch becomes the bottleneck</a:t>
+            </a:r>
+            <a:endParaRPr kumimoji="1" lang="en-US" altLang="ja-JP" sz="1400" b="1" dirty="0">
+              <a:solidFill>
+                <a:srgbClr val="FF0000"/>
+              </a:solidFill>
+            </a:endParaRPr>
+          </a:p>
+        </p:txBody>
+      </p:sp>
+      <p:sp>
+        <p:nvSpPr>
+          <p:cNvPr id="21" name="テキスト ボックス 20">
+            <a:extLst>
+              <a:ext uri="{FF2B5EF4-FFF2-40B4-BE49-F238E27FC236}">
+                <a16:creationId xmlns:a16="http://schemas.microsoft.com/office/drawing/2014/main" id="{F57E9AB9-8E76-6A47-AFC5-EFA81D236582}"/>
+              </a:ext>
+            </a:extLst>
+          </p:cNvPr>
+          <p:cNvSpPr txBox="1"/>
+          <p:nvPr/>
+        </p:nvSpPr>
+        <p:spPr>
+          <a:xfrm>
+            <a:off x="770128" y="4821257"/>
+            <a:ext cx="2379177" cy="307777"/>
+          </a:xfrm>
+          <a:prstGeom prst="rect">
+            <a:avLst/>
+          </a:prstGeom>
+          <a:noFill/>
+        </p:spPr>
+        <p:txBody>
+          <a:bodyPr wrap="square" rtlCol="0">
+            <a:normAutofit/>
+          </a:bodyPr>
+          <a:lstStyle/>
+          <a:p>
+            <a:pPr>
+              <a:defRPr/>
+            </a:pPr>
+            <a:r>
+              <a:rPr kumimoji="1" lang="en-US" altLang="ja-JP" sz="1400" dirty="0"/>
+              <a:t>Instruction backward compatibility is preserved</a:t>
+            </a:r>
+            <a:endParaRPr kumimoji="1" lang="en-US" altLang="ja-JP" sz="1400" dirty="0"/>
+          </a:p>
+        </p:txBody>
+      </p:sp>
+      <p:pic>
+        <p:nvPicPr>
+          <p:cNvPr id="24" name="図 23">
+            <a:extLst>
+              <a:ext uri="{FF2B5EF4-FFF2-40B4-BE49-F238E27FC236}">
+                <a16:creationId xmlns:a16="http://schemas.microsoft.com/office/drawing/2014/main" id="{447CC45F-CAA5-194F-8B12-2F6A7B26F6FC}"/>
+              </a:ext>
+            </a:extLst>
+          </p:cNvPr>
+          <p:cNvPicPr>
+            <a:picLocks noChangeAspect="1"/>
+          </p:cNvPicPr>
+          <p:nvPr/>
+        </p:nvPicPr>
+        <p:blipFill>
+          <a:blip r:embed="rId2"/>
+          <a:stretch>
+            <a:fillRect/>
+          </a:stretch>
+        </p:blipFill>
+        <p:spPr>
+          <a:xfrm>
+            <a:off x="3439160" y="4665344"/>
+            <a:ext cx="584200" cy="569595"/>
+          </a:xfrm>
+          <a:prstGeom prst="rect">
+            <a:avLst/>
+          </a:prstGeom>
+        </p:spPr>
+      </p:pic>
+      <p:pic>
+        <p:nvPicPr>
+          <p:cNvPr id="25" name="図 24">
+            <a:extLst>
+              <a:ext uri="{FF2B5EF4-FFF2-40B4-BE49-F238E27FC236}">
+                <a16:creationId xmlns:a16="http://schemas.microsoft.com/office/drawing/2014/main" id="{78665135-5BEE-F440-AFDB-395CC70BA0E9}"/>
+              </a:ext>
+            </a:extLst>
+          </p:cNvPr>
+          <p:cNvPicPr>
+            <a:picLocks noChangeAspect="1"/>
+          </p:cNvPicPr>
+          <p:nvPr/>
+        </p:nvPicPr>
+        <p:blipFill>
+          <a:blip r:embed="rId3"/>
+          <a:stretch>
+            <a:fillRect/>
+          </a:stretch>
+        </p:blipFill>
+        <p:spPr>
+          <a:xfrm>
+            <a:off x="3439160" y="5659119"/>
+            <a:ext cx="584200" cy="569595"/>
+          </a:xfrm>
+          <a:prstGeom prst="rect">
+            <a:avLst/>
+          </a:prstGeom>
+        </p:spPr>
+      </p:pic>
+      <p:sp>
+        <p:nvSpPr>
+          <p:cNvPr id="29" name="角丸四角形 28">
+            <a:extLst>
+              <a:ext uri="{FF2B5EF4-FFF2-40B4-BE49-F238E27FC236}">
+                <a16:creationId xmlns:a16="http://schemas.microsoft.com/office/drawing/2014/main" id="{6A11AA7C-B4A8-3C4C-B8AE-43F67A10FBDC}"/>
+              </a:ext>
+            </a:extLst>
+          </p:cNvPr>
+          <p:cNvSpPr/>
+          <p:nvPr/>
+        </p:nvSpPr>
+        <p:spPr>
+          <a:xfrm>
+            <a:off x="5121546" y="1855995"/>
+            <a:ext cx="969374" cy="484687"/>
+          </a:xfrm>
+          <a:prstGeom prst="roundRect">
+            <a:avLst/>
+          </a:prstGeom>
+          <a:noFill/>
+          <a:ln>
+            <a:solidFill>
+              <a:schemeClr val="tx1"/>
+            </a:solidFill>
+          </a:ln>
+          <a:effectLst/>
+        </p:spPr>
+        <p:style>
+          <a:lnRef idx="1">
+            <a:schemeClr val="accent1"/>
+          </a:lnRef>
+          <a:fillRef idx="3">
+            <a:schemeClr val="accent1"/>
+          </a:fillRef>
+          <a:effectRef idx="2">
+            <a:schemeClr val="accent1"/>
+          </a:effectRef>
+          <a:fontRef idx="minor">
+            <a:schemeClr val="lt1"/>
+          </a:fontRef>
+        </p:style>
+        <p:txBody>
+          <a:bodyPr rtlCol="0" anchor="ctr" wrap="square"/>
+          <a:lstStyle/>
+          <a:p>
+            <a:pPr algn="ctr">
+              <a:defRPr sz="1350"/>
+            </a:pPr>
+            <a:r>
+              <a:rPr kumimoji="1" lang="ja-JP" altLang="en-US" sz="1350" dirty="0">
+                <a:solidFill>
+                  <a:schemeClr val="tx1"/>
+                </a:solidFill>
+              </a:rPr>
+              <a:t>Execution</a:t>
+            </a:r>
+            <a:endParaRPr kumimoji="1" lang="en-US" altLang="ja-JP" sz="1400" dirty="0">
+              <a:solidFill>
+                <a:schemeClr val="tx1"/>
+              </a:solidFill>
+            </a:endParaRPr>
+          </a:p>
+          <a:p>
+            <a:pPr algn="ctr">
+              <a:defRPr sz="1350"/>
+            </a:pPr>
+            <a:r>
+              <a:rPr kumimoji="1" lang="ja-JP" altLang="en-US" sz="1350" dirty="0">
+                <a:solidFill>
+                  <a:schemeClr val="tx1"/>
+                </a:solidFill>
+              </a:rPr>
+              <a:t>unit</a:t>
+            </a:r>
+            <a:endParaRPr kumimoji="1" lang="en-US" altLang="ja-JP" sz="1400" dirty="0">
+              <a:solidFill>
+                <a:schemeClr val="tx1"/>
+              </a:solidFill>
+            </a:endParaRPr>
+          </a:p>
+        </p:txBody>
+      </p:sp>
+      <p:sp>
+        <p:nvSpPr>
+          <p:cNvPr id="30" name="角丸四角形 29">
+            <a:extLst>
+              <a:ext uri="{FF2B5EF4-FFF2-40B4-BE49-F238E27FC236}">
+                <a16:creationId xmlns:a16="http://schemas.microsoft.com/office/drawing/2014/main" id="{5FC68AB8-34CF-1D40-8414-F799436B41E4}"/>
+              </a:ext>
+            </a:extLst>
+          </p:cNvPr>
+          <p:cNvSpPr/>
+          <p:nvPr/>
+        </p:nvSpPr>
+        <p:spPr>
+          <a:xfrm>
+            <a:off x="5121546" y="2344873"/>
+            <a:ext cx="969374" cy="484687"/>
+          </a:xfrm>
+          <a:prstGeom prst="roundRect">
+            <a:avLst/>
+          </a:prstGeom>
+          <a:noFill/>
+          <a:ln>
+            <a:solidFill>
+              <a:schemeClr val="tx1"/>
+            </a:solidFill>
+          </a:ln>
+          <a:effectLst/>
+        </p:spPr>
+        <p:style>
+          <a:lnRef idx="1">
+            <a:schemeClr val="accent1"/>
+          </a:lnRef>
+          <a:fillRef idx="3">
+            <a:schemeClr val="accent1"/>
+          </a:fillRef>
+          <a:effectRef idx="2">
+            <a:schemeClr val="accent1"/>
+          </a:effectRef>
+          <a:fontRef idx="minor">
+            <a:schemeClr val="lt1"/>
+          </a:fontRef>
+        </p:style>
+        <p:txBody>
+          <a:bodyPr rtlCol="0" anchor="ctr" wrap="square"/>
+          <a:lstStyle/>
+          <a:p>
+            <a:pPr algn="ctr">
+              <a:defRPr sz="1350"/>
+            </a:pPr>
+            <a:r>
+              <a:rPr kumimoji="1" lang="ja-JP" altLang="en-US" sz="1350" dirty="0">
+                <a:solidFill>
+                  <a:schemeClr val="tx1"/>
+                </a:solidFill>
+              </a:rPr>
+              <a:t>Execution</a:t>
+            </a:r>
+            <a:endParaRPr kumimoji="1" lang="en-US" altLang="ja-JP" sz="1400" dirty="0">
+              <a:solidFill>
+                <a:schemeClr val="tx1"/>
+              </a:solidFill>
+            </a:endParaRPr>
+          </a:p>
+          <a:p>
+            <a:pPr algn="ctr">
+              <a:defRPr sz="1350"/>
+            </a:pPr>
+            <a:r>
+              <a:rPr kumimoji="1" lang="ja-JP" altLang="en-US" sz="1350" dirty="0">
+                <a:solidFill>
+                  <a:schemeClr val="tx1"/>
+                </a:solidFill>
+              </a:rPr>
+              <a:t>unit</a:t>
+            </a:r>
+            <a:endParaRPr kumimoji="1" lang="en-US" altLang="ja-JP" sz="1400" dirty="0">
+              <a:solidFill>
+                <a:schemeClr val="tx1"/>
+              </a:solidFill>
+            </a:endParaRPr>
+          </a:p>
+        </p:txBody>
+      </p:sp>
+      <p:sp>
+        <p:nvSpPr>
+          <p:cNvPr id="31" name="正方形/長方形 30">
+            <a:extLst>
+              <a:ext uri="{FF2B5EF4-FFF2-40B4-BE49-F238E27FC236}">
+                <a16:creationId xmlns:a16="http://schemas.microsoft.com/office/drawing/2014/main" id="{336FF39C-A5D9-884C-9297-9573EA638016}"/>
+              </a:ext>
+            </a:extLst>
+          </p:cNvPr>
+          <p:cNvSpPr/>
+          <p:nvPr/>
+        </p:nvSpPr>
+        <p:spPr>
+          <a:xfrm>
+            <a:off x="4033520" y="1915160"/>
+            <a:ext cx="533400" cy="457200"/>
+          </a:xfrm>
+          <a:prstGeom prst="rect">
+            <a:avLst/>
+          </a:prstGeom>
+          <a:solidFill>
+            <a:schemeClr val="bg1"/>
+          </a:solidFill>
+          <a:ln>
+            <a:solidFill>
+              <a:schemeClr val="tx1"/>
+            </a:solidFill>
+          </a:ln>
+          <a:effectLst/>
+        </p:spPr>
+        <p:style>
+          <a:lnRef idx="1">
+            <a:schemeClr val="accent1"/>
+          </a:lnRef>
+          <a:fillRef idx="3">
+            <a:schemeClr val="accent1"/>
+          </a:fillRef>
+          <a:effectRef idx="2">
+            <a:schemeClr val="accent1"/>
+          </a:effectRef>
+          <a:fontRef idx="minor">
+            <a:schemeClr val="lt1"/>
+          </a:fontRef>
+        </p:style>
+        <p:txBody>
+          <a:bodyPr rtlCol="0" anchor="ctr" wrap="square">
+            <a:normAutofit/>
+          </a:bodyPr>
+          <a:lstStyle/>
+          <a:p>
+            <a:pPr algn="ctr">
+              <a:defRPr/>
+            </a:pPr>
+            <a:r>
+              <a:rPr kumimoji="1" lang="ja-JP" altLang="en-US" sz="1000" dirty="0">
+                <a:solidFill>
+                  <a:schemeClr val="tx1"/>
+                </a:solidFill>
+              </a:rPr>
+              <a:t>Instruction A</a:t>
+            </a:r>
+            <a:endParaRPr kumimoji="1" lang="ja-JP" altLang="en-US" sz="1000" dirty="0">
+              <a:solidFill>
+                <a:schemeClr val="tx1"/>
+              </a:solidFill>
+            </a:endParaRPr>
+          </a:p>
+        </p:txBody>
+      </p:sp>
+      <p:sp>
+        <p:nvSpPr>
+          <p:cNvPr id="32" name="正方形/長方形 31">
+            <a:extLst>
+              <a:ext uri="{FF2B5EF4-FFF2-40B4-BE49-F238E27FC236}">
+                <a16:creationId xmlns:a16="http://schemas.microsoft.com/office/drawing/2014/main" id="{C9774A07-3EC8-2D42-98B1-9FE5746B09DD}"/>
+              </a:ext>
+            </a:extLst>
+          </p:cNvPr>
+          <p:cNvSpPr/>
+          <p:nvPr/>
+        </p:nvSpPr>
+        <p:spPr>
+          <a:xfrm>
+            <a:off x="4033520" y="2372360"/>
+            <a:ext cx="533400" cy="457200"/>
+          </a:xfrm>
+          <a:prstGeom prst="rect">
+            <a:avLst/>
+          </a:prstGeom>
+          <a:solidFill>
+            <a:schemeClr val="bg1"/>
+          </a:solidFill>
+          <a:ln>
+            <a:solidFill>
+              <a:schemeClr val="tx1"/>
+            </a:solidFill>
+          </a:ln>
+          <a:effectLst/>
+        </p:spPr>
+        <p:style>
+          <a:lnRef idx="1">
+            <a:schemeClr val="accent1"/>
+          </a:lnRef>
+          <a:fillRef idx="3">
+            <a:schemeClr val="accent1"/>
+          </a:fillRef>
+          <a:effectRef idx="2">
+            <a:schemeClr val="accent1"/>
+          </a:effectRef>
+          <a:fontRef idx="minor">
+            <a:schemeClr val="lt1"/>
+          </a:fontRef>
+        </p:style>
+        <p:txBody>
+          <a:bodyPr rtlCol="0" anchor="ctr" wrap="square">
+            <a:normAutofit/>
+          </a:bodyPr>
+          <a:lstStyle/>
+          <a:p>
+            <a:pPr algn="ctr">
+              <a:defRPr/>
+            </a:pPr>
+            <a:r>
+              <a:rPr kumimoji="1" lang="ja-JP" altLang="en-US" sz="1000" dirty="0">
+                <a:solidFill>
+                  <a:schemeClr val="tx1"/>
+                </a:solidFill>
+              </a:rPr>
+              <a:t>Instruction B</a:t>
+            </a:r>
+            <a:endParaRPr kumimoji="1" lang="ja-JP" altLang="en-US" sz="1000" dirty="0">
+              <a:solidFill>
+                <a:schemeClr val="tx1"/>
+              </a:solidFill>
+            </a:endParaRPr>
+          </a:p>
+        </p:txBody>
+      </p:sp>
+      <p:sp>
+        <p:nvSpPr>
+          <p:cNvPr id="33" name="角丸四角形 32">
+            <a:extLst>
+              <a:ext uri="{FF2B5EF4-FFF2-40B4-BE49-F238E27FC236}">
+                <a16:creationId xmlns:a16="http://schemas.microsoft.com/office/drawing/2014/main" id="{089701AB-4285-6349-BA79-97B92563B5AA}"/>
+              </a:ext>
+            </a:extLst>
+          </p:cNvPr>
+          <p:cNvSpPr/>
+          <p:nvPr/>
+        </p:nvSpPr>
+        <p:spPr>
+          <a:xfrm>
+            <a:off x="3952240" y="1757680"/>
+            <a:ext cx="690880" cy="1229360"/>
+          </a:xfrm>
+          <a:prstGeom prst="roundRect">
+            <a:avLst/>
+          </a:prstGeom>
+          <a:noFill/>
+          <a:ln w="38100">
+            <a:solidFill>
+              <a:schemeClr val="tx1"/>
+            </a:solidFill>
+            <a:prstDash val="sysDash"/>
+          </a:ln>
+        </p:spPr>
+        <p:style>
+          <a:lnRef idx="2">
+            <a:schemeClr val="accent1">
+              <a:shade val="50000"/>
+            </a:schemeClr>
+          </a:lnRef>
+          <a:fillRef idx="1">
+            <a:schemeClr val="accent1"/>
+          </a:fillRef>
+          <a:effectRef idx="0">
+            <a:schemeClr val="accent1"/>
+          </a:effectRef>
+          <a:fontRef idx="minor">
+            <a:schemeClr val="lt1"/>
+          </a:fontRef>
+        </p:style>
+        <p:txBody>
+          <a:bodyPr rtlCol="0" anchor="ctr"/>
+          <a:lstStyle/>
+          <a:p>
+            <a:pPr algn="ctr"/>
+            <a:endParaRPr kumimoji="1" lang="ja-JP" altLang="en-US"/>
+          </a:p>
+        </p:txBody>
+      </p:sp>
+      <p:sp>
+        <p:nvSpPr>
+          <p:cNvPr id="34" name="テキスト ボックス 33">
+            <a:extLst>
+              <a:ext uri="{FF2B5EF4-FFF2-40B4-BE49-F238E27FC236}">
+                <a16:creationId xmlns:a16="http://schemas.microsoft.com/office/drawing/2014/main" id="{2B0B985A-CA7E-EA4B-8FD4-9B450FAB5D2C}"/>
+              </a:ext>
+            </a:extLst>
+          </p:cNvPr>
+          <p:cNvSpPr txBox="1"/>
+          <p:nvPr/>
+        </p:nvSpPr>
+        <p:spPr>
+          <a:xfrm>
+            <a:off x="3688080" y="1452880"/>
+            <a:ext cx="1279517" cy="253916"/>
+          </a:xfrm>
+          <a:prstGeom prst="rect">
+            <a:avLst/>
+          </a:prstGeom>
+          <a:noFill/>
+        </p:spPr>
+        <p:txBody>
+          <a:bodyPr wrap="square" rtlCol="0"/>
+          <a:lstStyle/>
+          <a:p>
+            <a:pPr>
+              <a:defRPr sz="850"/>
+            </a:pPr>
+            <a:r>
+              <a:rPr kumimoji="1" lang="en-US" altLang="ja-JP" sz="850"/>
+              <a:t>One VLIW instruction</a:t>
+            </a:r>
+          </a:p>
+        </p:txBody>
+      </p:sp>
+      <p:cxnSp>
+        <p:nvCxnSpPr>
+          <p:cNvPr id="36" name="直線矢印コネクタ 35">
+            <a:extLst>
+              <a:ext uri="{FF2B5EF4-FFF2-40B4-BE49-F238E27FC236}">
+                <a16:creationId xmlns:a16="http://schemas.microsoft.com/office/drawing/2014/main" id="{5F347953-0B59-5B44-BEFD-27C17BA2F8FC}"/>
+              </a:ext>
+            </a:extLst>
+          </p:cNvPr>
+          <p:cNvCxnSpPr>
+            <a:cxnSpLocks/>
+            <a:endCxn id="29" idx="1"/>
+          </p:cNvCxnSpPr>
+          <p:nvPr/>
+        </p:nvCxnSpPr>
+        <p:spPr>
+          <a:xfrm>
+            <a:off x="4592320" y="2098339"/>
+            <a:ext cx="529226" cy="0"/>
+          </a:xfrm>
+          <a:prstGeom prst="straightConnector1">
+            <a:avLst/>
+          </a:prstGeom>
+          <a:ln w="19050">
+            <a:solidFill>
+              <a:srgbClr val="FF0000"/>
+            </a:solidFill>
+            <a:tailEnd type="triangle"/>
+          </a:ln>
+        </p:spPr>
+        <p:style>
+          <a:lnRef idx="1">
+            <a:schemeClr val="accent1"/>
+          </a:lnRef>
+          <a:fillRef idx="0">
+            <a:schemeClr val="accent1"/>
+          </a:fillRef>
+          <a:effectRef idx="0">
+            <a:schemeClr val="accent1"/>
+          </a:effectRef>
+          <a:fontRef idx="minor">
+            <a:schemeClr val="tx1"/>
+          </a:fontRef>
+        </p:style>
+      </p:cxnSp>
+      <p:cxnSp>
+        <p:nvCxnSpPr>
+          <p:cNvPr id="38" name="直線矢印コネクタ 37">
+            <a:extLst>
+              <a:ext uri="{FF2B5EF4-FFF2-40B4-BE49-F238E27FC236}">
+                <a16:creationId xmlns:a16="http://schemas.microsoft.com/office/drawing/2014/main" id="{1002CF52-46AB-E943-9695-563F0D56656C}"/>
+              </a:ext>
+            </a:extLst>
+          </p:cNvPr>
+          <p:cNvCxnSpPr>
+            <a:cxnSpLocks/>
+          </p:cNvCxnSpPr>
+          <p:nvPr/>
+        </p:nvCxnSpPr>
+        <p:spPr>
+          <a:xfrm>
+            <a:off x="4572000" y="2616499"/>
+            <a:ext cx="529226" cy="0"/>
+          </a:xfrm>
+          <a:prstGeom prst="straightConnector1">
+            <a:avLst/>
+          </a:prstGeom>
+          <a:ln w="19050">
+            <a:solidFill>
+              <a:srgbClr val="FF0000"/>
+            </a:solidFill>
+            <a:tailEnd type="triangle"/>
+          </a:ln>
+        </p:spPr>
+        <p:style>
+          <a:lnRef idx="1">
+            <a:schemeClr val="accent1"/>
+          </a:lnRef>
+          <a:fillRef idx="0">
+            <a:schemeClr val="accent1"/>
+          </a:fillRef>
+          <a:effectRef idx="0">
+            <a:schemeClr val="accent1"/>
+          </a:effectRef>
+          <a:fontRef idx="minor">
+            <a:schemeClr val="tx1"/>
+          </a:fontRef>
+        </p:style>
+      </p:cxnSp>
+      <p:sp>
+        <p:nvSpPr>
+          <p:cNvPr id="39" name="テキスト ボックス 38">
+            <a:extLst>
+              <a:ext uri="{FF2B5EF4-FFF2-40B4-BE49-F238E27FC236}">
+                <a16:creationId xmlns:a16="http://schemas.microsoft.com/office/drawing/2014/main" id="{FB6311DC-D3F4-B748-BA53-4FFE097F7657}"/>
+              </a:ext>
+            </a:extLst>
+          </p:cNvPr>
+          <p:cNvSpPr txBox="1"/>
+          <p:nvPr/>
+        </p:nvSpPr>
+        <p:spPr>
+          <a:xfrm>
+            <a:off x="4033520" y="4754880"/>
+            <a:ext cx="2182008" cy="523220"/>
+          </a:xfrm>
+          <a:prstGeom prst="rect">
+            <a:avLst/>
+          </a:prstGeom>
+          <a:noFill/>
+        </p:spPr>
+        <p:txBody>
+          <a:bodyPr wrap="square" rtlCol="0"/>
+          <a:lstStyle/>
+          <a:p>
+            <a:pPr>
+              <a:defRPr sz="1050"/>
+            </a:pPr>
+            <a:r>
+              <a:rPr lang="ja-JP" altLang="en-US" sz="1050" dirty="0"/>
+              <a:t>No dependency checking needed</a:t>
+            </a:r>
+            <a:endParaRPr lang="en-US" altLang="ja-JP" sz="1400" dirty="0"/>
+          </a:p>
+          <a:p>
+            <a:pPr>
+              <a:defRPr sz="1050"/>
+            </a:pPr>
+            <a:r>
+              <a:rPr lang="ja-JP" altLang="en-US" sz="1050" dirty="0"/>
+              <a:t>-&gt; hardware becomes simpler</a:t>
+            </a:r>
+            <a:endParaRPr lang="en-US" altLang="ja-JP" sz="1400" dirty="0"/>
+          </a:p>
+        </p:txBody>
+      </p:sp>
+      <p:sp>
+        <p:nvSpPr>
+          <p:cNvPr id="40" name="テキスト ボックス 39">
+            <a:extLst>
+              <a:ext uri="{FF2B5EF4-FFF2-40B4-BE49-F238E27FC236}">
+                <a16:creationId xmlns:a16="http://schemas.microsoft.com/office/drawing/2014/main" id="{619B4112-04B8-6A4A-B1FF-8D311471595D}"/>
+              </a:ext>
+            </a:extLst>
+          </p:cNvPr>
+          <p:cNvSpPr txBox="1"/>
+          <p:nvPr/>
+        </p:nvSpPr>
+        <p:spPr>
+          <a:xfrm>
+            <a:off x="3972560" y="5709920"/>
+            <a:ext cx="2877711" cy="523220"/>
+          </a:xfrm>
+          <a:prstGeom prst="rect">
+            <a:avLst/>
+          </a:prstGeom>
+          <a:noFill/>
+        </p:spPr>
+        <p:txBody>
+          <a:bodyPr wrap="square" rtlCol="0"/>
+          <a:lstStyle/>
+          <a:p>
+            <a:pPr>
+              <a:defRPr sz="1250"/>
+            </a:pPr>
+            <a:r>
+              <a:rPr lang="ja-JP" altLang="en-US" sz="1250" b="1" dirty="0">
+                <a:solidFill>
+                  <a:srgbClr val="FF0000"/>
+                </a:solidFill>
+              </a:rPr>
+              <a:t>Requires a godlike smart compiler</a:t>
+            </a:r>
+            <a:endParaRPr lang="en-US" altLang="ja-JP" sz="1400" b="1" dirty="0">
+              <a:solidFill>
+                <a:srgbClr val="FF0000"/>
+              </a:solidFill>
+            </a:endParaRPr>
+          </a:p>
+          <a:p>
+            <a:pPr>
+              <a:defRPr sz="1250"/>
+            </a:pPr>
+            <a:r>
+              <a:rPr lang="ja-JP" altLang="en-US" sz="1250" b="1" dirty="0">
+                <a:solidFill>
+                  <a:srgbClr val="FF0000"/>
+                </a:solidFill>
+              </a:rPr>
+              <a:t>Loses backward compatibility</a:t>
+            </a:r>
+            <a:endParaRPr lang="en-US" altLang="ja-JP" sz="1400" b="1" dirty="0">
+              <a:solidFill>
+                <a:srgbClr val="FF0000"/>
+              </a:solidFill>
+            </a:endParaRPr>
+          </a:p>
+        </p:txBody>
+      </p:sp>
+      <p:pic>
+        <p:nvPicPr>
+          <p:cNvPr id="41" name="図 40">
+            <a:extLst>
+              <a:ext uri="{FF2B5EF4-FFF2-40B4-BE49-F238E27FC236}">
+                <a16:creationId xmlns:a16="http://schemas.microsoft.com/office/drawing/2014/main" id="{DA5E1897-A7AC-7B45-8042-51CA094DD61B}"/>
+              </a:ext>
+            </a:extLst>
+          </p:cNvPr>
+          <p:cNvPicPr>
+            <a:picLocks noChangeAspect="1"/>
+          </p:cNvPicPr>
+          <p:nvPr/>
+        </p:nvPicPr>
+        <p:blipFill>
+          <a:blip r:embed="rId2"/>
+          <a:stretch>
+            <a:fillRect/>
+          </a:stretch>
+        </p:blipFill>
+        <p:spPr>
+          <a:xfrm>
+            <a:off x="228600" y="4685664"/>
+            <a:ext cx="584200" cy="569595"/>
+          </a:xfrm>
+          <a:prstGeom prst="rect">
+            <a:avLst/>
+          </a:prstGeom>
+        </p:spPr>
+      </p:pic>
+      <p:pic>
+        <p:nvPicPr>
+          <p:cNvPr id="42" name="図 41">
+            <a:extLst>
+              <a:ext uri="{FF2B5EF4-FFF2-40B4-BE49-F238E27FC236}">
+                <a16:creationId xmlns:a16="http://schemas.microsoft.com/office/drawing/2014/main" id="{14495E7E-AF7B-FA43-A775-B4EB3900A69B}"/>
+              </a:ext>
+            </a:extLst>
+          </p:cNvPr>
+          <p:cNvPicPr>
+            <a:picLocks noChangeAspect="1"/>
+          </p:cNvPicPr>
+          <p:nvPr/>
+        </p:nvPicPr>
+        <p:blipFill>
+          <a:blip r:embed="rId3"/>
+          <a:stretch>
+            <a:fillRect/>
+          </a:stretch>
+        </p:blipFill>
+        <p:spPr>
+          <a:xfrm>
+            <a:off x="228600" y="5679439"/>
+            <a:ext cx="584200" cy="569595"/>
+          </a:xfrm>
+          <a:prstGeom prst="rect">
+            <a:avLst/>
+          </a:prstGeom>
+        </p:spPr>
+      </p:pic>
+      <p:sp>
+        <p:nvSpPr>
+          <p:cNvPr id="43" name="角丸四角形 42">
+            <a:extLst>
+              <a:ext uri="{FF2B5EF4-FFF2-40B4-BE49-F238E27FC236}">
+                <a16:creationId xmlns:a16="http://schemas.microsoft.com/office/drawing/2014/main" id="{B3C4FBC2-DA56-F143-B1DA-6D2B7ADF7FDF}"/>
+              </a:ext>
+            </a:extLst>
+          </p:cNvPr>
+          <p:cNvSpPr/>
+          <p:nvPr/>
+        </p:nvSpPr>
+        <p:spPr>
+          <a:xfrm>
+            <a:off x="8615680" y="1764555"/>
+            <a:ext cx="995680" cy="1131045"/>
+          </a:xfrm>
+          <a:prstGeom prst="roundRect">
+            <a:avLst/>
+          </a:prstGeom>
+          <a:noFill/>
+          <a:ln>
+            <a:solidFill>
+              <a:schemeClr val="tx1"/>
+            </a:solidFill>
+          </a:ln>
+          <a:effectLst/>
+        </p:spPr>
+        <p:style>
+          <a:lnRef idx="1">
+            <a:schemeClr val="accent1"/>
+          </a:lnRef>
+          <a:fillRef idx="3">
+            <a:schemeClr val="accent1"/>
+          </a:fillRef>
+          <a:effectRef idx="2">
+            <a:schemeClr val="accent1"/>
+          </a:effectRef>
+          <a:fontRef idx="minor">
+            <a:schemeClr val="lt1"/>
+          </a:fontRef>
+        </p:style>
+        <p:txBody>
+          <a:bodyPr rtlCol="0" anchor="ctr"/>
+          <a:lstStyle/>
+          <a:p>
+            <a:pPr algn="ctr">
+              <a:defRPr/>
+            </a:pPr>
+            <a:r>
+              <a:rPr kumimoji="1" lang="ja-JP" altLang="en-US" sz="1400" dirty="0">
+                <a:solidFill>
+                  <a:schemeClr val="tx1"/>
+                </a:solidFill>
+              </a:rPr>
+              <a:t>Execution</a:t>
+            </a:r>
+            <a:endParaRPr kumimoji="1" lang="en-US" altLang="ja-JP" sz="1400" dirty="0">
+              <a:solidFill>
+                <a:schemeClr val="tx1"/>
+              </a:solidFill>
+            </a:endParaRPr>
+          </a:p>
+          <a:p>
+            <a:pPr algn="ctr">
+              <a:defRPr/>
+            </a:pPr>
+            <a:r>
+              <a:rPr kumimoji="1" lang="ja-JP" altLang="en-US" sz="1400" dirty="0">
+                <a:solidFill>
+                  <a:schemeClr val="tx1"/>
+                </a:solidFill>
+              </a:rPr>
+              <a:t>unit</a:t>
+            </a:r>
+            <a:endParaRPr kumimoji="1" lang="en-US" altLang="ja-JP" sz="1400" dirty="0">
+              <a:solidFill>
+                <a:schemeClr val="tx1"/>
+              </a:solidFill>
+            </a:endParaRPr>
+          </a:p>
+        </p:txBody>
+      </p:sp>
+      <p:pic>
+        <p:nvPicPr>
+          <p:cNvPr id="44" name="図 43">
+            <a:extLst>
+              <a:ext uri="{FF2B5EF4-FFF2-40B4-BE49-F238E27FC236}">
+                <a16:creationId xmlns:a16="http://schemas.microsoft.com/office/drawing/2014/main" id="{0645FA37-29FC-1D42-8341-F8CDB403614F}"/>
+              </a:ext>
+            </a:extLst>
+          </p:cNvPr>
+          <p:cNvPicPr>
+            <a:picLocks noChangeAspect="1"/>
+          </p:cNvPicPr>
+          <p:nvPr/>
+        </p:nvPicPr>
+        <p:blipFill>
+          <a:blip r:embed="rId2"/>
+          <a:stretch>
+            <a:fillRect/>
+          </a:stretch>
+        </p:blipFill>
+        <p:spPr>
+          <a:xfrm>
+            <a:off x="7056120" y="4665344"/>
+            <a:ext cx="584200" cy="569595"/>
+          </a:xfrm>
+          <a:prstGeom prst="rect">
+            <a:avLst/>
+          </a:prstGeom>
+        </p:spPr>
+      </p:pic>
+      <p:pic>
+        <p:nvPicPr>
+          <p:cNvPr id="45" name="図 44">
+            <a:extLst>
+              <a:ext uri="{FF2B5EF4-FFF2-40B4-BE49-F238E27FC236}">
+                <a16:creationId xmlns:a16="http://schemas.microsoft.com/office/drawing/2014/main" id="{EF4CF261-ABE1-E34D-A846-AC6F9A9BC9A2}"/>
+              </a:ext>
+            </a:extLst>
+          </p:cNvPr>
+          <p:cNvPicPr>
+            <a:picLocks noChangeAspect="1"/>
+          </p:cNvPicPr>
+          <p:nvPr/>
+        </p:nvPicPr>
+        <p:blipFill>
+          <a:blip r:embed="rId3"/>
+          <a:stretch>
+            <a:fillRect/>
+          </a:stretch>
+        </p:blipFill>
+        <p:spPr>
+          <a:xfrm>
+            <a:off x="7056120" y="5628639"/>
+            <a:ext cx="584200" cy="569595"/>
+          </a:xfrm>
+          <a:prstGeom prst="rect">
+            <a:avLst/>
+          </a:prstGeom>
+        </p:spPr>
+      </p:pic>
+      <p:sp>
+        <p:nvSpPr>
+          <p:cNvPr id="46" name="テキスト ボックス 45">
+            <a:extLst>
+              <a:ext uri="{FF2B5EF4-FFF2-40B4-BE49-F238E27FC236}">
+                <a16:creationId xmlns:a16="http://schemas.microsoft.com/office/drawing/2014/main" id="{3F5420BD-5D08-A84F-9B46-56EA80905771}"/>
+              </a:ext>
+            </a:extLst>
+          </p:cNvPr>
+          <p:cNvSpPr txBox="1"/>
+          <p:nvPr/>
+        </p:nvSpPr>
+        <p:spPr>
+          <a:xfrm>
+            <a:off x="7680960" y="4693920"/>
+            <a:ext cx="1800493" cy="523220"/>
+          </a:xfrm>
+          <a:prstGeom prst="rect">
+            <a:avLst/>
+          </a:prstGeom>
+          <a:noFill/>
+        </p:spPr>
+        <p:txBody>
+          <a:bodyPr wrap="square" rtlCol="0"/>
+          <a:lstStyle/>
+          <a:p>
+            <a:pPr>
+              <a:defRPr sz="1000"/>
+            </a:pPr>
+            <a:r>
+              <a:rPr lang="ja-JP" altLang="en-US" sz="1000" dirty="0"/>
+              <a:t>Hardware is simple</a:t>
+            </a:r>
+            <a:endParaRPr lang="en-US" altLang="ja-JP" sz="1400" dirty="0"/>
+          </a:p>
+          <a:p>
+            <a:pPr>
+              <a:defRPr sz="1000"/>
+            </a:pPr>
+            <a:r>
+              <a:rPr lang="ja-JP" altLang="en-US" sz="1000" dirty="0"/>
+              <a:t>Backward compatibility is preserved</a:t>
+            </a:r>
+            <a:endParaRPr lang="en-US" altLang="ja-JP" sz="1400" dirty="0"/>
+          </a:p>
+        </p:txBody>
+      </p:sp>
+      <p:sp>
+        <p:nvSpPr>
+          <p:cNvPr id="47" name="テキスト ボックス 46">
+            <a:extLst>
+              <a:ext uri="{FF2B5EF4-FFF2-40B4-BE49-F238E27FC236}">
+                <a16:creationId xmlns:a16="http://schemas.microsoft.com/office/drawing/2014/main" id="{FC96BEA1-A0AB-E141-BA29-6C73475B4D56}"/>
+              </a:ext>
+            </a:extLst>
+          </p:cNvPr>
+          <p:cNvSpPr txBox="1"/>
+          <p:nvPr/>
+        </p:nvSpPr>
+        <p:spPr>
+          <a:xfrm>
+            <a:off x="7660640" y="5750560"/>
+            <a:ext cx="1620957" cy="307777"/>
+          </a:xfrm>
+          <a:prstGeom prst="rect">
+            <a:avLst/>
+          </a:prstGeom>
+          <a:noFill/>
+        </p:spPr>
+        <p:txBody>
+          <a:bodyPr wrap="square" rtlCol="0"/>
+          <a:lstStyle/>
+          <a:p>
+            <a:pPr>
+              <a:defRPr sz="1150"/>
+            </a:pPr>
+            <a:r>
+              <a:rPr lang="ja-JP" altLang="en-US" sz="1150" b="1" dirty="0">
+                <a:solidFill>
+                  <a:srgbClr val="FF0000"/>
+                </a:solidFill>
+              </a:rPr>
+              <a:t>Programming is hard</a:t>
+            </a:r>
+            <a:endParaRPr kumimoji="1" lang="ja-JP" altLang="en-US" sz="1400" b="1">
+              <a:solidFill>
+                <a:srgbClr val="FF0000"/>
+              </a:solidFill>
+            </a:endParaRPr>
+          </a:p>
+        </p:txBody>
+      </p:sp>
+      <p:sp>
+        <p:nvSpPr>
+          <p:cNvPr id="48" name="正方形/長方形 47">
+            <a:extLst>
+              <a:ext uri="{FF2B5EF4-FFF2-40B4-BE49-F238E27FC236}">
+                <a16:creationId xmlns:a16="http://schemas.microsoft.com/office/drawing/2014/main" id="{9BE190D6-416D-4A4C-9CCC-EF2644F17F38}"/>
+              </a:ext>
+            </a:extLst>
+          </p:cNvPr>
+          <p:cNvSpPr/>
+          <p:nvPr/>
+        </p:nvSpPr>
+        <p:spPr>
+          <a:xfrm>
+            <a:off x="7447280" y="1793240"/>
+            <a:ext cx="533400" cy="1021080"/>
+          </a:xfrm>
+          <a:prstGeom prst="rect">
+            <a:avLst/>
+          </a:prstGeom>
+          <a:solidFill>
+            <a:schemeClr val="bg1"/>
+          </a:solidFill>
+          <a:ln>
+            <a:solidFill>
+              <a:schemeClr val="tx1"/>
+            </a:solidFill>
+          </a:ln>
+          <a:effectLst/>
+        </p:spPr>
+        <p:style>
+          <a:lnRef idx="1">
+            <a:schemeClr val="accent1"/>
+          </a:lnRef>
+          <a:fillRef idx="3">
+            <a:schemeClr val="accent1"/>
+          </a:fillRef>
+          <a:effectRef idx="2">
+            <a:schemeClr val="accent1"/>
+          </a:effectRef>
+          <a:fontRef idx="minor">
+            <a:schemeClr val="lt1"/>
+          </a:fontRef>
+        </p:style>
+        <p:txBody>
+          <a:bodyPr rtlCol="0" anchor="ctr"/>
+          <a:lstStyle/>
+          <a:p>
+            <a:pPr algn="ctr"/>
+            <a:endParaRPr kumimoji="1" lang="ja-JP" altLang="en-US" sz="1000" dirty="0">
+              <a:solidFill>
+                <a:schemeClr val="tx1"/>
+              </a:solidFill>
+            </a:endParaRPr>
+          </a:p>
+        </p:txBody>
+      </p:sp>
+      <p:cxnSp>
+        <p:nvCxnSpPr>
+          <p:cNvPr id="51" name="直線コネクタ 50">
+            <a:extLst>
+              <a:ext uri="{FF2B5EF4-FFF2-40B4-BE49-F238E27FC236}">
+                <a16:creationId xmlns:a16="http://schemas.microsoft.com/office/drawing/2014/main" id="{4DC1D1CF-CE23-534F-AE30-1416B58E2127}"/>
+              </a:ext>
+            </a:extLst>
+          </p:cNvPr>
+          <p:cNvCxnSpPr>
+            <a:stCxn id="43" idx="1"/>
+            <a:endCxn id="43" idx="3"/>
+          </p:cNvCxnSpPr>
+          <p:nvPr/>
+        </p:nvCxnSpPr>
+        <p:spPr>
+          <a:xfrm>
+            <a:off x="8615680" y="2330078"/>
+            <a:ext cx="995680" cy="0"/>
+          </a:xfrm>
+          <a:prstGeom prst="line">
+            <a:avLst/>
+          </a:prstGeom>
+          <a:ln w="12700">
+            <a:solidFill>
+              <a:schemeClr val="tx1"/>
+            </a:solidFill>
+            <a:prstDash val="sysDash"/>
+          </a:ln>
+        </p:spPr>
+        <p:style>
+          <a:lnRef idx="1">
+            <a:schemeClr val="accent1"/>
+          </a:lnRef>
+          <a:fillRef idx="0">
+            <a:schemeClr val="accent1"/>
+          </a:fillRef>
+          <a:effectRef idx="0">
+            <a:schemeClr val="accent1"/>
+          </a:effectRef>
+          <a:fontRef idx="minor">
+            <a:schemeClr val="tx1"/>
+          </a:fontRef>
+        </p:style>
+      </p:cxnSp>
+      <p:sp>
+        <p:nvSpPr>
+          <p:cNvPr id="52" name="正方形/長方形 51">
+            <a:extLst>
+              <a:ext uri="{FF2B5EF4-FFF2-40B4-BE49-F238E27FC236}">
+                <a16:creationId xmlns:a16="http://schemas.microsoft.com/office/drawing/2014/main" id="{3D4B4BE7-7C3B-3241-9969-1E74C0CF1B5E}"/>
+              </a:ext>
+            </a:extLst>
+          </p:cNvPr>
+          <p:cNvSpPr/>
+          <p:nvPr/>
+        </p:nvSpPr>
+        <p:spPr>
+          <a:xfrm>
+            <a:off x="1493520" y="1630680"/>
+            <a:ext cx="533400" cy="457200"/>
+          </a:xfrm>
+          <a:prstGeom prst="rect">
+            <a:avLst/>
+          </a:prstGeom>
+          <a:solidFill>
+            <a:schemeClr val="bg1"/>
+          </a:solidFill>
+          <a:ln>
+            <a:solidFill>
+              <a:schemeClr val="tx1"/>
+            </a:solidFill>
+          </a:ln>
+          <a:effectLst/>
+        </p:spPr>
+        <p:style>
+          <a:lnRef idx="1">
+            <a:schemeClr val="accent1"/>
+          </a:lnRef>
+          <a:fillRef idx="3">
+            <a:schemeClr val="accent1"/>
+          </a:fillRef>
+          <a:effectRef idx="2">
+            <a:schemeClr val="accent1"/>
+          </a:effectRef>
+          <a:fontRef idx="minor">
+            <a:schemeClr val="lt1"/>
+          </a:fontRef>
+        </p:style>
+        <p:txBody>
+          <a:bodyPr rtlCol="0" anchor="ctr" wrap="square">
+            <a:normAutofit/>
+          </a:bodyPr>
+          <a:lstStyle/>
+          <a:p>
+            <a:pPr algn="ctr">
+              <a:defRPr/>
+            </a:pPr>
+            <a:r>
+              <a:rPr kumimoji="1" lang="ja-JP" altLang="en-US" sz="1000" dirty="0">
+                <a:solidFill>
+                  <a:schemeClr val="tx1"/>
+                </a:solidFill>
+              </a:rPr>
+              <a:t>Instruction A</a:t>
+            </a:r>
+            <a:endParaRPr kumimoji="1" lang="ja-JP" altLang="en-US" sz="1000" dirty="0">
+              <a:solidFill>
+                <a:schemeClr val="tx1"/>
+              </a:solidFill>
+            </a:endParaRPr>
+          </a:p>
+        </p:txBody>
+      </p:sp>
+      <p:sp>
+        <p:nvSpPr>
+          <p:cNvPr id="53" name="正方形/長方形 52">
+            <a:extLst>
+              <a:ext uri="{FF2B5EF4-FFF2-40B4-BE49-F238E27FC236}">
+                <a16:creationId xmlns:a16="http://schemas.microsoft.com/office/drawing/2014/main" id="{34ECD519-ED67-9C4A-BC76-0C521D1FC110}"/>
+              </a:ext>
+            </a:extLst>
+          </p:cNvPr>
+          <p:cNvSpPr/>
+          <p:nvPr/>
+        </p:nvSpPr>
+        <p:spPr>
+          <a:xfrm>
+            <a:off x="1513840" y="2931160"/>
+            <a:ext cx="533400" cy="457200"/>
+          </a:xfrm>
+          <a:prstGeom prst="rect">
+            <a:avLst/>
+          </a:prstGeom>
+          <a:solidFill>
+            <a:schemeClr val="bg1"/>
+          </a:solidFill>
+          <a:ln>
+            <a:solidFill>
+              <a:schemeClr val="tx1"/>
+            </a:solidFill>
+          </a:ln>
+          <a:effectLst/>
+        </p:spPr>
+        <p:style>
+          <a:lnRef idx="1">
+            <a:schemeClr val="accent1"/>
+          </a:lnRef>
+          <a:fillRef idx="3">
+            <a:schemeClr val="accent1"/>
+          </a:fillRef>
+          <a:effectRef idx="2">
+            <a:schemeClr val="accent1"/>
+          </a:effectRef>
+          <a:fontRef idx="minor">
+            <a:schemeClr val="lt1"/>
+          </a:fontRef>
+        </p:style>
+        <p:txBody>
+          <a:bodyPr rtlCol="0" anchor="ctr" wrap="square">
+            <a:normAutofit/>
+          </a:bodyPr>
+          <a:lstStyle/>
+          <a:p>
+            <a:pPr algn="ctr">
+              <a:defRPr/>
+            </a:pPr>
+            <a:r>
+              <a:rPr kumimoji="1" lang="ja-JP" altLang="en-US" sz="1000" dirty="0">
+                <a:solidFill>
+                  <a:schemeClr val="tx1"/>
+                </a:solidFill>
+              </a:rPr>
+              <a:t>Instruction B</a:t>
+            </a:r>
+            <a:endParaRPr kumimoji="1" lang="ja-JP" altLang="en-US" sz="1000" dirty="0">
+              <a:solidFill>
+                <a:schemeClr val="tx1"/>
+              </a:solidFill>
+            </a:endParaRPr>
+          </a:p>
+        </p:txBody>
+      </p:sp>
+      <p:sp>
+        <p:nvSpPr>
+          <p:cNvPr id="54" name="テキスト ボックス 53">
+            <a:extLst>
+              <a:ext uri="{FF2B5EF4-FFF2-40B4-BE49-F238E27FC236}">
+                <a16:creationId xmlns:a16="http://schemas.microsoft.com/office/drawing/2014/main" id="{1D1DB946-7D3D-0849-AEC2-0094801815E2}"/>
+              </a:ext>
+            </a:extLst>
+          </p:cNvPr>
+          <p:cNvSpPr txBox="1"/>
+          <p:nvPr/>
+        </p:nvSpPr>
+        <p:spPr>
+          <a:xfrm>
+            <a:off x="528320" y="3606800"/>
+            <a:ext cx="2339102" cy="523220"/>
+          </a:xfrm>
+          <a:prstGeom prst="rect">
+            <a:avLst/>
+          </a:prstGeom>
+          <a:noFill/>
+        </p:spPr>
+        <p:txBody>
+          <a:bodyPr wrap="square" rtlCol="0"/>
+          <a:lstStyle/>
+          <a:p>
+            <a:pPr>
+              <a:defRPr sz="1000"/>
+            </a:pPr>
+            <a:r>
+              <a:rPr kumimoji="1" lang="ja-JP" altLang="en-US" sz="1000"/>
+              <a:t>Fetch multiple instructions,</a:t>
+            </a:r>
+            <a:endParaRPr kumimoji="1" lang="en-US" altLang="ja-JP" sz="1400"/>
+          </a:p>
+          <a:p>
+            <a:pPr>
+              <a:defRPr sz="1000"/>
+            </a:pPr>
+            <a:r>
+              <a:rPr kumimoji="1" lang="ja-JP" altLang="en-US" sz="1000"/>
+              <a:t>and the scheduler dispatches them</a:t>
+            </a:r>
+            <a:endParaRPr kumimoji="1" lang="en-US" altLang="ja-JP" sz="1400"/>
+          </a:p>
+        </p:txBody>
+      </p:sp>
+      <p:sp>
+        <p:nvSpPr>
+          <p:cNvPr id="55" name="テキスト ボックス 54">
+            <a:extLst>
+              <a:ext uri="{FF2B5EF4-FFF2-40B4-BE49-F238E27FC236}">
+                <a16:creationId xmlns:a16="http://schemas.microsoft.com/office/drawing/2014/main" id="{AA60636D-7C18-9A41-8E82-5E021712D277}"/>
+              </a:ext>
+            </a:extLst>
+          </p:cNvPr>
+          <p:cNvSpPr txBox="1"/>
+          <p:nvPr/>
+        </p:nvSpPr>
+        <p:spPr>
+          <a:xfrm>
+            <a:off x="3749040" y="3596640"/>
+            <a:ext cx="2518638" cy="523220"/>
+          </a:xfrm>
+          <a:prstGeom prst="rect">
+            <a:avLst/>
+          </a:prstGeom>
+          <a:noFill/>
+        </p:spPr>
+        <p:txBody>
+          <a:bodyPr wrap="square" rtlCol="0"/>
+          <a:lstStyle/>
+          <a:p>
+            <a:pPr>
+              <a:defRPr sz="1000"/>
+            </a:pPr>
+            <a:r>
+              <a:rPr lang="ja-JP" altLang="en-US" sz="1000"/>
+              <a:t>Bundle instructions that can run in parallel</a:t>
+            </a:r>
+            <a:endParaRPr kumimoji="1" lang="en-US" altLang="ja-JP" sz="1400"/>
+          </a:p>
+          <a:p>
+            <a:pPr>
+              <a:defRPr sz="1000"/>
+            </a:pPr>
+            <a:r>
+              <a:rPr lang="ja-JP" altLang="en-US" sz="1000"/>
+              <a:t>into one instruction in advance</a:t>
+            </a:r>
+            <a:endParaRPr kumimoji="1" lang="en-US" altLang="ja-JP" sz="1400"/>
+          </a:p>
+        </p:txBody>
+      </p:sp>
+      <p:cxnSp>
+        <p:nvCxnSpPr>
+          <p:cNvPr id="56" name="直線コネクタ 55">
+            <a:extLst>
+              <a:ext uri="{FF2B5EF4-FFF2-40B4-BE49-F238E27FC236}">
+                <a16:creationId xmlns:a16="http://schemas.microsoft.com/office/drawing/2014/main" id="{EC5146C0-9DB4-7E46-B352-AE6E99971C38}"/>
+              </a:ext>
+            </a:extLst>
+          </p:cNvPr>
+          <p:cNvCxnSpPr>
+            <a:cxnSpLocks/>
+            <a:stCxn id="48" idx="1"/>
+            <a:endCxn id="48" idx="3"/>
+          </p:cNvCxnSpPr>
+          <p:nvPr/>
+        </p:nvCxnSpPr>
+        <p:spPr>
+          <a:xfrm>
+            <a:off x="7447280" y="2303780"/>
+            <a:ext cx="533400" cy="0"/>
+          </a:xfrm>
+          <a:prstGeom prst="line">
+            <a:avLst/>
+          </a:prstGeom>
+          <a:ln w="12700">
+            <a:solidFill>
+              <a:schemeClr val="tx1"/>
+            </a:solidFill>
+            <a:prstDash val="sysDash"/>
+          </a:ln>
+        </p:spPr>
+        <p:style>
+          <a:lnRef idx="1">
+            <a:schemeClr val="accent1"/>
+          </a:lnRef>
+          <a:fillRef idx="0">
+            <a:schemeClr val="accent1"/>
+          </a:fillRef>
+          <a:effectRef idx="0">
+            <a:schemeClr val="accent1"/>
+          </a:effectRef>
+          <a:fontRef idx="minor">
+            <a:schemeClr val="tx1"/>
+          </a:fontRef>
+        </p:style>
+      </p:cxnSp>
+      <p:sp>
+        <p:nvSpPr>
+          <p:cNvPr id="59" name="テキスト ボックス 58">
+            <a:extLst>
+              <a:ext uri="{FF2B5EF4-FFF2-40B4-BE49-F238E27FC236}">
+                <a16:creationId xmlns:a16="http://schemas.microsoft.com/office/drawing/2014/main" id="{DCF15125-6D0F-514F-B858-4219162C6030}"/>
+              </a:ext>
+            </a:extLst>
+          </p:cNvPr>
+          <p:cNvSpPr txBox="1"/>
+          <p:nvPr/>
+        </p:nvSpPr>
+        <p:spPr>
+          <a:xfrm>
+            <a:off x="7386320" y="1930400"/>
+            <a:ext cx="643125" cy="246221"/>
+          </a:xfrm>
+          <a:prstGeom prst="rect">
+            <a:avLst/>
+          </a:prstGeom>
+          <a:noFill/>
+        </p:spPr>
+        <p:txBody>
+          <a:bodyPr wrap="none" rtlCol="0">
+            <a:spAutoFit/>
+          </a:bodyPr>
+          <a:lstStyle/>
+          <a:p>
+            <a:pPr>
+              <a:defRPr/>
+            </a:pPr>
+            <a:r>
+              <a:rPr lang="ja-JP" altLang="en-US" sz="1000"/>
+              <a:t>Data A</a:t>
+            </a:r>
+            <a:endParaRPr kumimoji="1" lang="ja-JP" altLang="en-US" sz="1000"/>
+          </a:p>
+        </p:txBody>
+      </p:sp>
+      <p:sp>
+        <p:nvSpPr>
+          <p:cNvPr id="60" name="テキスト ボックス 59">
+            <a:extLst>
+              <a:ext uri="{FF2B5EF4-FFF2-40B4-BE49-F238E27FC236}">
+                <a16:creationId xmlns:a16="http://schemas.microsoft.com/office/drawing/2014/main" id="{370B314B-33A5-6B41-919E-A5F0BF492BC3}"/>
+              </a:ext>
+            </a:extLst>
+          </p:cNvPr>
+          <p:cNvSpPr txBox="1"/>
+          <p:nvPr/>
+        </p:nvSpPr>
+        <p:spPr>
+          <a:xfrm>
+            <a:off x="7406640" y="2428240"/>
+            <a:ext cx="643125" cy="246221"/>
+          </a:xfrm>
+          <a:prstGeom prst="rect">
+            <a:avLst/>
+          </a:prstGeom>
+          <a:noFill/>
+        </p:spPr>
+        <p:txBody>
+          <a:bodyPr wrap="none" rtlCol="0">
+            <a:spAutoFit/>
+          </a:bodyPr>
+          <a:lstStyle/>
+          <a:p>
+            <a:pPr>
+              <a:defRPr/>
+            </a:pPr>
+            <a:r>
+              <a:rPr lang="ja-JP" altLang="en-US" sz="1000"/>
+              <a:t>Data B</a:t>
+            </a:r>
+            <a:endParaRPr kumimoji="1" lang="ja-JP" altLang="en-US" sz="1000"/>
+          </a:p>
+        </p:txBody>
+      </p:sp>
+      <p:sp>
+        <p:nvSpPr>
+          <p:cNvPr id="61" name="角丸四角形 60">
+            <a:extLst>
+              <a:ext uri="{FF2B5EF4-FFF2-40B4-BE49-F238E27FC236}">
+                <a16:creationId xmlns:a16="http://schemas.microsoft.com/office/drawing/2014/main" id="{C6F9AECB-E783-C84E-866C-6E20BEF09226}"/>
+              </a:ext>
+            </a:extLst>
+          </p:cNvPr>
+          <p:cNvSpPr/>
+          <p:nvPr/>
+        </p:nvSpPr>
+        <p:spPr>
+          <a:xfrm>
+            <a:off x="7376160" y="1706880"/>
+            <a:ext cx="690880" cy="1229360"/>
+          </a:xfrm>
+          <a:prstGeom prst="roundRect">
+            <a:avLst/>
+          </a:prstGeom>
+          <a:noFill/>
+          <a:ln w="38100">
+            <a:solidFill>
+              <a:schemeClr val="tx1"/>
+            </a:solidFill>
+            <a:prstDash val="sysDash"/>
+          </a:ln>
+        </p:spPr>
+        <p:style>
+          <a:lnRef idx="2">
+            <a:schemeClr val="accent1">
+              <a:shade val="50000"/>
+            </a:schemeClr>
+          </a:lnRef>
+          <a:fillRef idx="1">
+            <a:schemeClr val="accent1"/>
+          </a:fillRef>
+          <a:effectRef idx="0">
+            <a:schemeClr val="accent1"/>
+          </a:effectRef>
+          <a:fontRef idx="minor">
+            <a:schemeClr val="lt1"/>
+          </a:fontRef>
+        </p:style>
+        <p:txBody>
+          <a:bodyPr rtlCol="0" anchor="ctr"/>
+          <a:lstStyle/>
+          <a:p>
+            <a:pPr algn="ctr"/>
+            <a:endParaRPr kumimoji="1" lang="ja-JP" altLang="en-US"/>
+          </a:p>
+        </p:txBody>
+      </p:sp>
+      <p:sp>
+        <p:nvSpPr>
+          <p:cNvPr id="62" name="テキスト ボックス 61">
+            <a:extLst>
+              <a:ext uri="{FF2B5EF4-FFF2-40B4-BE49-F238E27FC236}">
+                <a16:creationId xmlns:a16="http://schemas.microsoft.com/office/drawing/2014/main" id="{B0F9939C-CF93-E041-9434-8467EB4A0B8A}"/>
+              </a:ext>
+            </a:extLst>
+          </p:cNvPr>
+          <p:cNvSpPr txBox="1"/>
+          <p:nvPr/>
+        </p:nvSpPr>
+        <p:spPr>
+          <a:xfrm>
+            <a:off x="7294880" y="1391920"/>
+            <a:ext cx="748923" cy="253916"/>
+          </a:xfrm>
+          <a:prstGeom prst="rect">
+            <a:avLst/>
+          </a:prstGeom>
+          <a:noFill/>
+        </p:spPr>
+        <p:txBody>
+          <a:bodyPr wrap="square" rtlCol="0">
+            <a:normAutofit/>
+          </a:bodyPr>
+          <a:lstStyle/>
+          <a:p>
+            <a:pPr>
+              <a:defRPr/>
+            </a:pPr>
+            <a:r>
+              <a:rPr kumimoji="1" lang="en-US" altLang="ja-JP" sz="1050"/>
+              <a:t>SIMD instruction</a:t>
+            </a:r>
+          </a:p>
+        </p:txBody>
+      </p:sp>
+      <p:sp>
+        <p:nvSpPr>
+          <p:cNvPr id="63" name="テキスト ボックス 62">
+            <a:extLst>
+              <a:ext uri="{FF2B5EF4-FFF2-40B4-BE49-F238E27FC236}">
+                <a16:creationId xmlns:a16="http://schemas.microsoft.com/office/drawing/2014/main" id="{F77A8080-ED24-CC4A-A38F-1265BDC2EF78}"/>
+              </a:ext>
+            </a:extLst>
+          </p:cNvPr>
+          <p:cNvSpPr txBox="1"/>
+          <p:nvPr/>
+        </p:nvSpPr>
+        <p:spPr>
+          <a:xfrm>
+            <a:off x="7051040" y="3556000"/>
+            <a:ext cx="2339102" cy="523220"/>
+          </a:xfrm>
+          <a:prstGeom prst="rect">
+            <a:avLst/>
+          </a:prstGeom>
+          <a:noFill/>
+        </p:spPr>
+        <p:txBody>
+          <a:bodyPr wrap="square" rtlCol="0"/>
+          <a:lstStyle/>
+          <a:p>
+            <a:pPr>
+              <a:defRPr sz="1000"/>
+            </a:pPr>
+            <a:r>
+              <a:rPr lang="ja-JP" altLang="en-US" sz="1000"/>
+              <a:t>Apply the same operation to multiple data items</a:t>
+            </a:r>
+            <a:endParaRPr lang="en-US" altLang="ja-JP" sz="1400"/>
+          </a:p>
+          <a:p>
+            <a:pPr>
+              <a:defRPr sz="1000"/>
+            </a:pPr>
+            <a:r>
+              <a:rPr lang="ja-JP" altLang="en-US" sz="1000"/>
+              <a:t>at once</a:t>
+            </a:r>
+            <a:endParaRPr lang="en-US" altLang="ja-JP" sz="1400"/>
+          </a:p>
+        </p:txBody>
+      </p:sp>
+      <p:cxnSp>
+        <p:nvCxnSpPr>
+          <p:cNvPr id="64" name="直線矢印コネクタ 63">
+            <a:extLst>
+              <a:ext uri="{FF2B5EF4-FFF2-40B4-BE49-F238E27FC236}">
+                <a16:creationId xmlns:a16="http://schemas.microsoft.com/office/drawing/2014/main" id="{2B0F8F8E-F928-0546-B6D3-0A74B33ED8F7}"/>
+              </a:ext>
+            </a:extLst>
+          </p:cNvPr>
+          <p:cNvCxnSpPr>
+            <a:cxnSpLocks/>
+          </p:cNvCxnSpPr>
+          <p:nvPr/>
+        </p:nvCxnSpPr>
+        <p:spPr>
+          <a:xfrm>
+            <a:off x="8097520" y="2311699"/>
+            <a:ext cx="529226" cy="0"/>
+          </a:xfrm>
+          <a:prstGeom prst="straightConnector1">
+            <a:avLst/>
+          </a:prstGeom>
+          <a:ln w="19050">
+            <a:solidFill>
+              <a:srgbClr val="FF0000"/>
+            </a:solidFill>
+            <a:tailEnd type="triangle"/>
+          </a:ln>
+        </p:spPr>
+        <p:style>
+          <a:lnRef idx="1">
+            <a:schemeClr val="accent1"/>
+          </a:lnRef>
+          <a:fillRef idx="0">
+            <a:schemeClr val="accent1"/>
+          </a:fillRef>
+          <a:effectRef idx="0">
+            <a:schemeClr val="accent1"/>
+          </a:effectRef>
+          <a:fontRef idx="minor">
+            <a:schemeClr val="tx1"/>
+          </a:fontRef>
+        </p:style>
+      </p:cxnSp>
+    </p:spTree>
+    <p:extLst>
+      <p:ext uri="{BB962C8B-B14F-4D97-AF65-F5344CB8AC3E}">
+        <p14:creationId xmlns:p14="http://schemas.microsoft.com/office/powerpoint/2010/main" val="2598289568"/>
+      </p:ext>
+    </p:extLst>
+  </p:cSld>
+  <p:clrMapOvr>
+    <a:masterClrMapping/>
+  </p:clrMapOvr>
+</p:sld>
+</file>
+
+<file path=ppt/slides/slide3.xml><?xml version="1.0" encoding="utf-8"?>
+<p:sld xmlns:a="http://schemas.openxmlformats.org/drawingml/2006/main" xmlns:r="http://schemas.openxmlformats.org/officeDocument/2006/relationships" xmlns:p="http://schemas.openxmlformats.org/presentationml/2006/main">
+  <p:cSld>
+    <p:spTree>
+      <p:nvGrpSpPr>
+        <p:cNvPr id="1" name=""/>
+        <p:cNvGrpSpPr/>
+        <p:nvPr/>
+      </p:nvGrpSpPr>
+      <p:grpSpPr>
+        <a:xfrm>
+          <a:off x="0" y="0"/>
+          <a:ext cx="0" cy="0"/>
+          <a:chOff x="0" y="0"/>
+          <a:chExt cx="0" cy="0"/>
+        </a:xfrm>
+      </p:grpSpPr>
+      <p:sp>
+        <p:nvSpPr>
           <p:cNvPr id="2" name="正方形/長方形 1">
             <a:extLst>
               <a:ext uri="{FF2B5EF4-FFF2-40B4-BE49-F238E27FC236}">
@@ -4322,7 +6659,1243 @@
 </p:sld>
 </file>
 
-<file path=ppt/slides/slide3.xml><?xml version="1.0" encoding="utf-8"?>
+<file path=ppt/slides/slide4.xml><?xml version="1.0" encoding="utf-8"?>
+<p:sld xmlns:a="http://schemas.openxmlformats.org/drawingml/2006/main" xmlns:r="http://schemas.openxmlformats.org/officeDocument/2006/relationships" xmlns:p="http://schemas.openxmlformats.org/presentationml/2006/main">
+  <p:cSld>
+    <p:spTree>
+      <p:nvGrpSpPr>
+        <p:cNvPr id="1" name=""/>
+        <p:cNvGrpSpPr/>
+        <p:nvPr/>
+      </p:nvGrpSpPr>
+      <p:grpSpPr>
+        <a:xfrm>
+          <a:off x="0" y="0"/>
+          <a:ext cx="0" cy="0"/>
+          <a:chOff x="0" y="0"/>
+          <a:chExt cx="0" cy="0"/>
+        </a:xfrm>
+      </p:grpSpPr>
+      <p:sp>
+        <p:nvSpPr>
+          <p:cNvPr id="2" name="正方形/長方形 1">
+            <a:extLst>
+              <a:ext uri="{FF2B5EF4-FFF2-40B4-BE49-F238E27FC236}">
+                <a16:creationId xmlns:a16="http://schemas.microsoft.com/office/drawing/2014/main" id="{47CC05BB-0392-D84B-A861-05329F5A211C}"/>
+              </a:ext>
+            </a:extLst>
+          </p:cNvPr>
+          <p:cNvSpPr/>
+          <p:nvPr/>
+        </p:nvSpPr>
+        <p:spPr>
+          <a:xfrm>
+            <a:off x="1136576" y="1556792"/>
+            <a:ext cx="504056" cy="504056"/>
+          </a:xfrm>
+          <a:prstGeom prst="rect">
+            <a:avLst/>
+          </a:prstGeom>
+          <a:noFill/>
+          <a:ln>
+            <a:solidFill>
+              <a:schemeClr val="tx1"/>
+            </a:solidFill>
+          </a:ln>
+        </p:spPr>
+        <p:style>
+          <a:lnRef idx="2">
+            <a:schemeClr val="accent1">
+              <a:shade val="50000"/>
+            </a:schemeClr>
+          </a:lnRef>
+          <a:fillRef idx="1">
+            <a:schemeClr val="accent1"/>
+          </a:fillRef>
+          <a:effectRef idx="0">
+            <a:schemeClr val="accent1"/>
+          </a:effectRef>
+          <a:fontRef idx="minor">
+            <a:schemeClr val="lt1"/>
+          </a:fontRef>
+        </p:style>
+        <p:txBody>
+          <a:bodyPr rtlCol="0" anchor="ctr"/>
+          <a:lstStyle/>
+          <a:p>
+            <a:pPr algn="ctr"/>
+            <a:endParaRPr kumimoji="1" lang="ja-JP" altLang="en-US">
+              <a:solidFill>
+                <a:schemeClr val="tx1"/>
+              </a:solidFill>
+            </a:endParaRPr>
+          </a:p>
+        </p:txBody>
+      </p:sp>
+      <p:sp>
+        <p:nvSpPr>
+          <p:cNvPr id="3" name="正方形/長方形 2">
+            <a:extLst>
+              <a:ext uri="{FF2B5EF4-FFF2-40B4-BE49-F238E27FC236}">
+                <a16:creationId xmlns:a16="http://schemas.microsoft.com/office/drawing/2014/main" id="{EB9DE39E-69F7-4F46-B7C3-44B36D9EDE80}"/>
+              </a:ext>
+            </a:extLst>
+          </p:cNvPr>
+          <p:cNvSpPr/>
+          <p:nvPr/>
+        </p:nvSpPr>
+        <p:spPr>
+          <a:xfrm>
+            <a:off x="1640632" y="1556792"/>
+            <a:ext cx="504056" cy="504056"/>
+          </a:xfrm>
+          <a:prstGeom prst="rect">
+            <a:avLst/>
+          </a:prstGeom>
+          <a:noFill/>
+          <a:ln>
+            <a:solidFill>
+              <a:schemeClr val="tx1"/>
+            </a:solidFill>
+          </a:ln>
+        </p:spPr>
+        <p:style>
+          <a:lnRef idx="2">
+            <a:schemeClr val="accent1">
+              <a:shade val="50000"/>
+            </a:schemeClr>
+          </a:lnRef>
+          <a:fillRef idx="1">
+            <a:schemeClr val="accent1"/>
+          </a:fillRef>
+          <a:effectRef idx="0">
+            <a:schemeClr val="accent1"/>
+          </a:effectRef>
+          <a:fontRef idx="minor">
+            <a:schemeClr val="lt1"/>
+          </a:fontRef>
+        </p:style>
+        <p:txBody>
+          <a:bodyPr rtlCol="0" anchor="ctr"/>
+          <a:lstStyle/>
+          <a:p>
+            <a:pPr algn="ctr">
+              <a:defRPr/>
+            </a:pPr>
+            <a:r>
+              <a:rPr kumimoji="1" lang="en-US" altLang="ja-JP">
+                <a:solidFill>
+                  <a:schemeClr val="tx1"/>
+                </a:solidFill>
+              </a:rPr>
+              <a:t>z</a:t>
+            </a:r>
+            <a:endParaRPr kumimoji="1" lang="ja-JP" altLang="en-US">
+              <a:solidFill>
+                <a:schemeClr val="tx1"/>
+              </a:solidFill>
+            </a:endParaRPr>
+          </a:p>
+        </p:txBody>
+      </p:sp>
+      <p:sp>
+        <p:nvSpPr>
+          <p:cNvPr id="4" name="正方形/長方形 3">
+            <a:extLst>
+              <a:ext uri="{FF2B5EF4-FFF2-40B4-BE49-F238E27FC236}">
+                <a16:creationId xmlns:a16="http://schemas.microsoft.com/office/drawing/2014/main" id="{CEF8B834-2614-4140-BF00-39C4EA7DE4A7}"/>
+              </a:ext>
+            </a:extLst>
+          </p:cNvPr>
+          <p:cNvSpPr/>
+          <p:nvPr/>
+        </p:nvSpPr>
+        <p:spPr>
+          <a:xfrm>
+            <a:off x="2144688" y="1556792"/>
+            <a:ext cx="504056" cy="504056"/>
+          </a:xfrm>
+          <a:prstGeom prst="rect">
+            <a:avLst/>
+          </a:prstGeom>
+          <a:noFill/>
+          <a:ln>
+            <a:solidFill>
+              <a:schemeClr val="tx1"/>
+            </a:solidFill>
+          </a:ln>
+        </p:spPr>
+        <p:style>
+          <a:lnRef idx="2">
+            <a:schemeClr val="accent1">
+              <a:shade val="50000"/>
+            </a:schemeClr>
+          </a:lnRef>
+          <a:fillRef idx="1">
+            <a:schemeClr val="accent1"/>
+          </a:fillRef>
+          <a:effectRef idx="0">
+            <a:schemeClr val="accent1"/>
+          </a:effectRef>
+          <a:fontRef idx="minor">
+            <a:schemeClr val="lt1"/>
+          </a:fontRef>
+        </p:style>
+        <p:txBody>
+          <a:bodyPr rtlCol="0" anchor="ctr"/>
+          <a:lstStyle/>
+          <a:p>
+            <a:pPr algn="ctr">
+              <a:defRPr/>
+            </a:pPr>
+            <a:r>
+              <a:rPr kumimoji="1" lang="en-US" altLang="ja-JP">
+                <a:solidFill>
+                  <a:schemeClr val="tx1"/>
+                </a:solidFill>
+              </a:rPr>
+              <a:t>y</a:t>
+            </a:r>
+            <a:endParaRPr kumimoji="1" lang="ja-JP" altLang="en-US">
+              <a:solidFill>
+                <a:schemeClr val="tx1"/>
+              </a:solidFill>
+            </a:endParaRPr>
+          </a:p>
+        </p:txBody>
+      </p:sp>
+      <p:sp>
+        <p:nvSpPr>
+          <p:cNvPr id="5" name="正方形/長方形 4">
+            <a:extLst>
+              <a:ext uri="{FF2B5EF4-FFF2-40B4-BE49-F238E27FC236}">
+                <a16:creationId xmlns:a16="http://schemas.microsoft.com/office/drawing/2014/main" id="{A334687B-6C5E-A542-B6B2-47ADE5E92E66}"/>
+              </a:ext>
+            </a:extLst>
+          </p:cNvPr>
+          <p:cNvSpPr/>
+          <p:nvPr/>
+        </p:nvSpPr>
+        <p:spPr>
+          <a:xfrm>
+            <a:off x="2648744" y="1556792"/>
+            <a:ext cx="504056" cy="504056"/>
+          </a:xfrm>
+          <a:prstGeom prst="rect">
+            <a:avLst/>
+          </a:prstGeom>
+          <a:noFill/>
+          <a:ln>
+            <a:solidFill>
+              <a:schemeClr val="tx1"/>
+            </a:solidFill>
+          </a:ln>
+        </p:spPr>
+        <p:style>
+          <a:lnRef idx="2">
+            <a:schemeClr val="accent1">
+              <a:shade val="50000"/>
+            </a:schemeClr>
+          </a:lnRef>
+          <a:fillRef idx="1">
+            <a:schemeClr val="accent1"/>
+          </a:fillRef>
+          <a:effectRef idx="0">
+            <a:schemeClr val="accent1"/>
+          </a:effectRef>
+          <a:fontRef idx="minor">
+            <a:schemeClr val="lt1"/>
+          </a:fontRef>
+        </p:style>
+        <p:txBody>
+          <a:bodyPr rtlCol="0" anchor="ctr"/>
+          <a:lstStyle/>
+          <a:p>
+            <a:pPr algn="ctr">
+              <a:defRPr/>
+            </a:pPr>
+            <a:r>
+              <a:rPr kumimoji="1" lang="en-US" altLang="ja-JP">
+                <a:solidFill>
+                  <a:schemeClr val="tx1"/>
+                </a:solidFill>
+              </a:rPr>
+              <a:t>x</a:t>
+            </a:r>
+            <a:endParaRPr kumimoji="1" lang="ja-JP" altLang="en-US">
+              <a:solidFill>
+                <a:schemeClr val="tx1"/>
+              </a:solidFill>
+            </a:endParaRPr>
+          </a:p>
+        </p:txBody>
+      </p:sp>
+      <p:sp>
+        <p:nvSpPr>
+          <p:cNvPr id="6" name="正方形/長方形 5">
+            <a:extLst>
+              <a:ext uri="{FF2B5EF4-FFF2-40B4-BE49-F238E27FC236}">
+                <a16:creationId xmlns:a16="http://schemas.microsoft.com/office/drawing/2014/main" id="{5CAAB22D-C4E1-8E43-84A5-27D396984BE8}"/>
+              </a:ext>
+            </a:extLst>
+          </p:cNvPr>
+          <p:cNvSpPr/>
+          <p:nvPr/>
+        </p:nvSpPr>
+        <p:spPr>
+          <a:xfrm>
+            <a:off x="3152800" y="1556792"/>
+            <a:ext cx="504056" cy="504056"/>
+          </a:xfrm>
+          <a:prstGeom prst="rect">
+            <a:avLst/>
+          </a:prstGeom>
+          <a:noFill/>
+          <a:ln>
+            <a:solidFill>
+              <a:schemeClr val="tx1"/>
+            </a:solidFill>
+          </a:ln>
+        </p:spPr>
+        <p:style>
+          <a:lnRef idx="2">
+            <a:schemeClr val="accent1">
+              <a:shade val="50000"/>
+            </a:schemeClr>
+          </a:lnRef>
+          <a:fillRef idx="1">
+            <a:schemeClr val="accent1"/>
+          </a:fillRef>
+          <a:effectRef idx="0">
+            <a:schemeClr val="accent1"/>
+          </a:effectRef>
+          <a:fontRef idx="minor">
+            <a:schemeClr val="lt1"/>
+          </a:fontRef>
+        </p:style>
+        <p:txBody>
+          <a:bodyPr rtlCol="0" anchor="ctr"/>
+          <a:lstStyle/>
+          <a:p>
+            <a:pPr algn="ctr"/>
+            <a:endParaRPr kumimoji="1" lang="ja-JP" altLang="en-US">
+              <a:solidFill>
+                <a:schemeClr val="tx1"/>
+              </a:solidFill>
+            </a:endParaRPr>
+          </a:p>
+        </p:txBody>
+      </p:sp>
+      <p:sp>
+        <p:nvSpPr>
+          <p:cNvPr id="7" name="正方形/長方形 6">
+            <a:extLst>
+              <a:ext uri="{FF2B5EF4-FFF2-40B4-BE49-F238E27FC236}">
+                <a16:creationId xmlns:a16="http://schemas.microsoft.com/office/drawing/2014/main" id="{A00338E8-DDDB-6D46-9F92-CD55199194CE}"/>
+              </a:ext>
+            </a:extLst>
+          </p:cNvPr>
+          <p:cNvSpPr/>
+          <p:nvPr/>
+        </p:nvSpPr>
+        <p:spPr>
+          <a:xfrm>
+            <a:off x="3656856" y="1556792"/>
+            <a:ext cx="504056" cy="504056"/>
+          </a:xfrm>
+          <a:prstGeom prst="rect">
+            <a:avLst/>
+          </a:prstGeom>
+          <a:noFill/>
+          <a:ln>
+            <a:solidFill>
+              <a:schemeClr val="tx1"/>
+            </a:solidFill>
+          </a:ln>
+        </p:spPr>
+        <p:style>
+          <a:lnRef idx="2">
+            <a:schemeClr val="accent1">
+              <a:shade val="50000"/>
+            </a:schemeClr>
+          </a:lnRef>
+          <a:fillRef idx="1">
+            <a:schemeClr val="accent1"/>
+          </a:fillRef>
+          <a:effectRef idx="0">
+            <a:schemeClr val="accent1"/>
+          </a:effectRef>
+          <a:fontRef idx="minor">
+            <a:schemeClr val="lt1"/>
+          </a:fontRef>
+        </p:style>
+        <p:txBody>
+          <a:bodyPr rtlCol="0" anchor="ctr"/>
+          <a:lstStyle/>
+          <a:p>
+            <a:pPr algn="ctr">
+              <a:defRPr/>
+            </a:pPr>
+            <a:r>
+              <a:rPr kumimoji="1" lang="en-US" altLang="ja-JP">
+                <a:solidFill>
+                  <a:schemeClr val="tx1"/>
+                </a:solidFill>
+              </a:rPr>
+              <a:t>z</a:t>
+            </a:r>
+            <a:endParaRPr kumimoji="1" lang="ja-JP" altLang="en-US">
+              <a:solidFill>
+                <a:schemeClr val="tx1"/>
+              </a:solidFill>
+            </a:endParaRPr>
+          </a:p>
+        </p:txBody>
+      </p:sp>
+      <p:sp>
+        <p:nvSpPr>
+          <p:cNvPr id="8" name="正方形/長方形 7">
+            <a:extLst>
+              <a:ext uri="{FF2B5EF4-FFF2-40B4-BE49-F238E27FC236}">
+                <a16:creationId xmlns:a16="http://schemas.microsoft.com/office/drawing/2014/main" id="{A618CAD4-6122-6647-99D4-4FCD87E8E339}"/>
+              </a:ext>
+            </a:extLst>
+          </p:cNvPr>
+          <p:cNvSpPr/>
+          <p:nvPr/>
+        </p:nvSpPr>
+        <p:spPr>
+          <a:xfrm>
+            <a:off x="4160912" y="1556792"/>
+            <a:ext cx="504056" cy="504056"/>
+          </a:xfrm>
+          <a:prstGeom prst="rect">
+            <a:avLst/>
+          </a:prstGeom>
+          <a:noFill/>
+          <a:ln>
+            <a:solidFill>
+              <a:schemeClr val="tx1"/>
+            </a:solidFill>
+          </a:ln>
+        </p:spPr>
+        <p:style>
+          <a:lnRef idx="2">
+            <a:schemeClr val="accent1">
+              <a:shade val="50000"/>
+            </a:schemeClr>
+          </a:lnRef>
+          <a:fillRef idx="1">
+            <a:schemeClr val="accent1"/>
+          </a:fillRef>
+          <a:effectRef idx="0">
+            <a:schemeClr val="accent1"/>
+          </a:effectRef>
+          <a:fontRef idx="minor">
+            <a:schemeClr val="lt1"/>
+          </a:fontRef>
+        </p:style>
+        <p:txBody>
+          <a:bodyPr rtlCol="0" anchor="ctr"/>
+          <a:lstStyle/>
+          <a:p>
+            <a:pPr algn="ctr">
+              <a:defRPr/>
+            </a:pPr>
+            <a:r>
+              <a:rPr kumimoji="1" lang="en-US" altLang="ja-JP">
+                <a:solidFill>
+                  <a:schemeClr val="tx1"/>
+                </a:solidFill>
+              </a:rPr>
+              <a:t>y</a:t>
+            </a:r>
+            <a:endParaRPr kumimoji="1" lang="ja-JP" altLang="en-US">
+              <a:solidFill>
+                <a:schemeClr val="tx1"/>
+              </a:solidFill>
+            </a:endParaRPr>
+          </a:p>
+        </p:txBody>
+      </p:sp>
+      <p:sp>
+        <p:nvSpPr>
+          <p:cNvPr id="9" name="正方形/長方形 8">
+            <a:extLst>
+              <a:ext uri="{FF2B5EF4-FFF2-40B4-BE49-F238E27FC236}">
+                <a16:creationId xmlns:a16="http://schemas.microsoft.com/office/drawing/2014/main" id="{2547F031-2BD7-5F4A-BF70-E25AF907D652}"/>
+              </a:ext>
+            </a:extLst>
+          </p:cNvPr>
+          <p:cNvSpPr/>
+          <p:nvPr/>
+        </p:nvSpPr>
+        <p:spPr>
+          <a:xfrm>
+            <a:off x="4664968" y="1556792"/>
+            <a:ext cx="504056" cy="504056"/>
+          </a:xfrm>
+          <a:prstGeom prst="rect">
+            <a:avLst/>
+          </a:prstGeom>
+          <a:noFill/>
+          <a:ln>
+            <a:solidFill>
+              <a:schemeClr val="tx1"/>
+            </a:solidFill>
+          </a:ln>
+        </p:spPr>
+        <p:style>
+          <a:lnRef idx="2">
+            <a:schemeClr val="accent1">
+              <a:shade val="50000"/>
+            </a:schemeClr>
+          </a:lnRef>
+          <a:fillRef idx="1">
+            <a:schemeClr val="accent1"/>
+          </a:fillRef>
+          <a:effectRef idx="0">
+            <a:schemeClr val="accent1"/>
+          </a:effectRef>
+          <a:fontRef idx="minor">
+            <a:schemeClr val="lt1"/>
+          </a:fontRef>
+        </p:style>
+        <p:txBody>
+          <a:bodyPr rtlCol="0" anchor="ctr"/>
+          <a:lstStyle/>
+          <a:p>
+            <a:pPr algn="ctr">
+              <a:defRPr/>
+            </a:pPr>
+            <a:r>
+              <a:rPr kumimoji="1" lang="en-US" altLang="ja-JP">
+                <a:solidFill>
+                  <a:schemeClr val="tx1"/>
+                </a:solidFill>
+              </a:rPr>
+              <a:t>x</a:t>
+            </a:r>
+            <a:endParaRPr kumimoji="1" lang="ja-JP" altLang="en-US">
+              <a:solidFill>
+                <a:schemeClr val="tx1"/>
+              </a:solidFill>
+            </a:endParaRPr>
+          </a:p>
+        </p:txBody>
+      </p:sp>
+      <p:sp>
+        <p:nvSpPr>
+          <p:cNvPr id="10" name="正方形/長方形 9">
+            <a:extLst>
+              <a:ext uri="{FF2B5EF4-FFF2-40B4-BE49-F238E27FC236}">
+                <a16:creationId xmlns:a16="http://schemas.microsoft.com/office/drawing/2014/main" id="{1CE34BAB-2EFD-4848-85E1-5C1C0F231290}"/>
+              </a:ext>
+            </a:extLst>
+          </p:cNvPr>
+          <p:cNvSpPr/>
+          <p:nvPr/>
+        </p:nvSpPr>
+        <p:spPr>
+          <a:xfrm>
+            <a:off x="5169024" y="1556792"/>
+            <a:ext cx="504056" cy="504056"/>
+          </a:xfrm>
+          <a:prstGeom prst="rect">
+            <a:avLst/>
+          </a:prstGeom>
+          <a:noFill/>
+          <a:ln>
+            <a:solidFill>
+              <a:schemeClr val="tx1"/>
+            </a:solidFill>
+          </a:ln>
+        </p:spPr>
+        <p:style>
+          <a:lnRef idx="2">
+            <a:schemeClr val="accent1">
+              <a:shade val="50000"/>
+            </a:schemeClr>
+          </a:lnRef>
+          <a:fillRef idx="1">
+            <a:schemeClr val="accent1"/>
+          </a:fillRef>
+          <a:effectRef idx="0">
+            <a:schemeClr val="accent1"/>
+          </a:effectRef>
+          <a:fontRef idx="minor">
+            <a:schemeClr val="lt1"/>
+          </a:fontRef>
+        </p:style>
+        <p:txBody>
+          <a:bodyPr rtlCol="0" anchor="ctr"/>
+          <a:lstStyle/>
+          <a:p>
+            <a:pPr algn="ctr"/>
+            <a:endParaRPr kumimoji="1" lang="ja-JP" altLang="en-US">
+              <a:solidFill>
+                <a:schemeClr val="tx1"/>
+              </a:solidFill>
+            </a:endParaRPr>
+          </a:p>
+        </p:txBody>
+      </p:sp>
+      <p:sp>
+        <p:nvSpPr>
+          <p:cNvPr id="11" name="正方形/長方形 10">
+            <a:extLst>
+              <a:ext uri="{FF2B5EF4-FFF2-40B4-BE49-F238E27FC236}">
+                <a16:creationId xmlns:a16="http://schemas.microsoft.com/office/drawing/2014/main" id="{45671A90-4C57-7945-930D-796B82392C6E}"/>
+              </a:ext>
+            </a:extLst>
+          </p:cNvPr>
+          <p:cNvSpPr/>
+          <p:nvPr/>
+        </p:nvSpPr>
+        <p:spPr>
+          <a:xfrm>
+            <a:off x="5673080" y="1556792"/>
+            <a:ext cx="504056" cy="504056"/>
+          </a:xfrm>
+          <a:prstGeom prst="rect">
+            <a:avLst/>
+          </a:prstGeom>
+          <a:noFill/>
+          <a:ln>
+            <a:solidFill>
+              <a:schemeClr val="tx1"/>
+            </a:solidFill>
+          </a:ln>
+        </p:spPr>
+        <p:style>
+          <a:lnRef idx="2">
+            <a:schemeClr val="accent1">
+              <a:shade val="50000"/>
+            </a:schemeClr>
+          </a:lnRef>
+          <a:fillRef idx="1">
+            <a:schemeClr val="accent1"/>
+          </a:fillRef>
+          <a:effectRef idx="0">
+            <a:schemeClr val="accent1"/>
+          </a:effectRef>
+          <a:fontRef idx="minor">
+            <a:schemeClr val="lt1"/>
+          </a:fontRef>
+        </p:style>
+        <p:txBody>
+          <a:bodyPr rtlCol="0" anchor="ctr"/>
+          <a:lstStyle/>
+          <a:p>
+            <a:pPr algn="ctr">
+              <a:defRPr/>
+            </a:pPr>
+            <a:r>
+              <a:rPr kumimoji="1" lang="en-US" altLang="ja-JP">
+                <a:solidFill>
+                  <a:schemeClr val="tx1"/>
+                </a:solidFill>
+              </a:rPr>
+              <a:t>z</a:t>
+            </a:r>
+            <a:endParaRPr kumimoji="1" lang="ja-JP" altLang="en-US">
+              <a:solidFill>
+                <a:schemeClr val="tx1"/>
+              </a:solidFill>
+            </a:endParaRPr>
+          </a:p>
+        </p:txBody>
+      </p:sp>
+      <p:sp>
+        <p:nvSpPr>
+          <p:cNvPr id="12" name="正方形/長方形 11">
+            <a:extLst>
+              <a:ext uri="{FF2B5EF4-FFF2-40B4-BE49-F238E27FC236}">
+                <a16:creationId xmlns:a16="http://schemas.microsoft.com/office/drawing/2014/main" id="{79B2AB3B-FABC-4C42-AC2D-D2D30F1B45FA}"/>
+              </a:ext>
+            </a:extLst>
+          </p:cNvPr>
+          <p:cNvSpPr/>
+          <p:nvPr/>
+        </p:nvSpPr>
+        <p:spPr>
+          <a:xfrm>
+            <a:off x="6177136" y="1556792"/>
+            <a:ext cx="504056" cy="504056"/>
+          </a:xfrm>
+          <a:prstGeom prst="rect">
+            <a:avLst/>
+          </a:prstGeom>
+          <a:noFill/>
+          <a:ln>
+            <a:solidFill>
+              <a:schemeClr val="tx1"/>
+            </a:solidFill>
+          </a:ln>
+        </p:spPr>
+        <p:style>
+          <a:lnRef idx="2">
+            <a:schemeClr val="accent1">
+              <a:shade val="50000"/>
+            </a:schemeClr>
+          </a:lnRef>
+          <a:fillRef idx="1">
+            <a:schemeClr val="accent1"/>
+          </a:fillRef>
+          <a:effectRef idx="0">
+            <a:schemeClr val="accent1"/>
+          </a:effectRef>
+          <a:fontRef idx="minor">
+            <a:schemeClr val="lt1"/>
+          </a:fontRef>
+        </p:style>
+        <p:txBody>
+          <a:bodyPr rtlCol="0" anchor="ctr"/>
+          <a:lstStyle/>
+          <a:p>
+            <a:pPr algn="ctr">
+              <a:defRPr/>
+            </a:pPr>
+            <a:r>
+              <a:rPr kumimoji="1" lang="en-US" altLang="ja-JP">
+                <a:solidFill>
+                  <a:schemeClr val="tx1"/>
+                </a:solidFill>
+              </a:rPr>
+              <a:t>y</a:t>
+            </a:r>
+            <a:endParaRPr kumimoji="1" lang="ja-JP" altLang="en-US">
+              <a:solidFill>
+                <a:schemeClr val="tx1"/>
+              </a:solidFill>
+            </a:endParaRPr>
+          </a:p>
+        </p:txBody>
+      </p:sp>
+      <p:sp>
+        <p:nvSpPr>
+          <p:cNvPr id="13" name="正方形/長方形 12">
+            <a:extLst>
+              <a:ext uri="{FF2B5EF4-FFF2-40B4-BE49-F238E27FC236}">
+                <a16:creationId xmlns:a16="http://schemas.microsoft.com/office/drawing/2014/main" id="{896FAB4C-F11E-5244-9018-EC06698F63DC}"/>
+              </a:ext>
+            </a:extLst>
+          </p:cNvPr>
+          <p:cNvSpPr/>
+          <p:nvPr/>
+        </p:nvSpPr>
+        <p:spPr>
+          <a:xfrm>
+            <a:off x="6681192" y="1556792"/>
+            <a:ext cx="504056" cy="504056"/>
+          </a:xfrm>
+          <a:prstGeom prst="rect">
+            <a:avLst/>
+          </a:prstGeom>
+          <a:noFill/>
+          <a:ln>
+            <a:solidFill>
+              <a:schemeClr val="tx1"/>
+            </a:solidFill>
+          </a:ln>
+        </p:spPr>
+        <p:style>
+          <a:lnRef idx="2">
+            <a:schemeClr val="accent1">
+              <a:shade val="50000"/>
+            </a:schemeClr>
+          </a:lnRef>
+          <a:fillRef idx="1">
+            <a:schemeClr val="accent1"/>
+          </a:fillRef>
+          <a:effectRef idx="0">
+            <a:schemeClr val="accent1"/>
+          </a:effectRef>
+          <a:fontRef idx="minor">
+            <a:schemeClr val="lt1"/>
+          </a:fontRef>
+        </p:style>
+        <p:txBody>
+          <a:bodyPr rtlCol="0" anchor="ctr"/>
+          <a:lstStyle/>
+          <a:p>
+            <a:pPr algn="ctr">
+              <a:defRPr/>
+            </a:pPr>
+            <a:r>
+              <a:rPr kumimoji="1" lang="en-US" altLang="ja-JP">
+                <a:solidFill>
+                  <a:schemeClr val="tx1"/>
+                </a:solidFill>
+              </a:rPr>
+              <a:t>x</a:t>
+            </a:r>
+            <a:endParaRPr kumimoji="1" lang="ja-JP" altLang="en-US">
+              <a:solidFill>
+                <a:schemeClr val="tx1"/>
+              </a:solidFill>
+            </a:endParaRPr>
+          </a:p>
+        </p:txBody>
+      </p:sp>
+      <p:sp>
+        <p:nvSpPr>
+          <p:cNvPr id="14" name="正方形/長方形 13">
+            <a:extLst>
+              <a:ext uri="{FF2B5EF4-FFF2-40B4-BE49-F238E27FC236}">
+                <a16:creationId xmlns:a16="http://schemas.microsoft.com/office/drawing/2014/main" id="{104A163A-DCD6-E142-8030-A559EBD4F460}"/>
+              </a:ext>
+            </a:extLst>
+          </p:cNvPr>
+          <p:cNvSpPr/>
+          <p:nvPr/>
+        </p:nvSpPr>
+        <p:spPr>
+          <a:xfrm>
+            <a:off x="3152800" y="2924944"/>
+            <a:ext cx="504056" cy="504056"/>
+          </a:xfrm>
+          <a:prstGeom prst="rect">
+            <a:avLst/>
+          </a:prstGeom>
+          <a:noFill/>
+          <a:ln>
+            <a:solidFill>
+              <a:schemeClr val="tx1"/>
+            </a:solidFill>
+          </a:ln>
+        </p:spPr>
+        <p:style>
+          <a:lnRef idx="2">
+            <a:schemeClr val="accent1">
+              <a:shade val="50000"/>
+            </a:schemeClr>
+          </a:lnRef>
+          <a:fillRef idx="1">
+            <a:schemeClr val="accent1"/>
+          </a:fillRef>
+          <a:effectRef idx="0">
+            <a:schemeClr val="accent1"/>
+          </a:effectRef>
+          <a:fontRef idx="minor">
+            <a:schemeClr val="lt1"/>
+          </a:fontRef>
+        </p:style>
+        <p:txBody>
+          <a:bodyPr rtlCol="0" anchor="ctr"/>
+          <a:lstStyle/>
+          <a:p>
+            <a:pPr algn="ctr"/>
+            <a:endParaRPr kumimoji="1" lang="ja-JP" altLang="en-US">
+              <a:solidFill>
+                <a:schemeClr val="tx1"/>
+              </a:solidFill>
+            </a:endParaRPr>
+          </a:p>
+        </p:txBody>
+      </p:sp>
+      <p:sp>
+        <p:nvSpPr>
+          <p:cNvPr id="15" name="正方形/長方形 14">
+            <a:extLst>
+              <a:ext uri="{FF2B5EF4-FFF2-40B4-BE49-F238E27FC236}">
+                <a16:creationId xmlns:a16="http://schemas.microsoft.com/office/drawing/2014/main" id="{51197534-5923-4743-A124-E15B05284933}"/>
+              </a:ext>
+            </a:extLst>
+          </p:cNvPr>
+          <p:cNvSpPr/>
+          <p:nvPr/>
+        </p:nvSpPr>
+        <p:spPr>
+          <a:xfrm>
+            <a:off x="3656856" y="2924944"/>
+            <a:ext cx="504056" cy="504056"/>
+          </a:xfrm>
+          <a:prstGeom prst="rect">
+            <a:avLst/>
+          </a:prstGeom>
+          <a:noFill/>
+          <a:ln>
+            <a:solidFill>
+              <a:schemeClr val="tx1"/>
+            </a:solidFill>
+          </a:ln>
+        </p:spPr>
+        <p:style>
+          <a:lnRef idx="2">
+            <a:schemeClr val="accent1">
+              <a:shade val="50000"/>
+            </a:schemeClr>
+          </a:lnRef>
+          <a:fillRef idx="1">
+            <a:schemeClr val="accent1"/>
+          </a:fillRef>
+          <a:effectRef idx="0">
+            <a:schemeClr val="accent1"/>
+          </a:effectRef>
+          <a:fontRef idx="minor">
+            <a:schemeClr val="lt1"/>
+          </a:fontRef>
+        </p:style>
+        <p:txBody>
+          <a:bodyPr rtlCol="0" anchor="ctr"/>
+          <a:lstStyle/>
+          <a:p>
+            <a:pPr algn="ctr">
+              <a:defRPr/>
+            </a:pPr>
+            <a:r>
+              <a:rPr kumimoji="1" lang="en-US" altLang="ja-JP">
+                <a:solidFill>
+                  <a:schemeClr val="tx1"/>
+                </a:solidFill>
+              </a:rPr>
+              <a:t>z</a:t>
+            </a:r>
+            <a:endParaRPr kumimoji="1" lang="ja-JP" altLang="en-US">
+              <a:solidFill>
+                <a:schemeClr val="tx1"/>
+              </a:solidFill>
+            </a:endParaRPr>
+          </a:p>
+        </p:txBody>
+      </p:sp>
+      <p:sp>
+        <p:nvSpPr>
+          <p:cNvPr id="16" name="正方形/長方形 15">
+            <a:extLst>
+              <a:ext uri="{FF2B5EF4-FFF2-40B4-BE49-F238E27FC236}">
+                <a16:creationId xmlns:a16="http://schemas.microsoft.com/office/drawing/2014/main" id="{E9BEF369-DA9B-CF44-8ED4-FFCD95EE18F6}"/>
+              </a:ext>
+            </a:extLst>
+          </p:cNvPr>
+          <p:cNvSpPr/>
+          <p:nvPr/>
+        </p:nvSpPr>
+        <p:spPr>
+          <a:xfrm>
+            <a:off x="4160912" y="2924944"/>
+            <a:ext cx="504056" cy="504056"/>
+          </a:xfrm>
+          <a:prstGeom prst="rect">
+            <a:avLst/>
+          </a:prstGeom>
+          <a:noFill/>
+          <a:ln>
+            <a:solidFill>
+              <a:schemeClr val="tx1"/>
+            </a:solidFill>
+          </a:ln>
+        </p:spPr>
+        <p:style>
+          <a:lnRef idx="2">
+            <a:schemeClr val="accent1">
+              <a:shade val="50000"/>
+            </a:schemeClr>
+          </a:lnRef>
+          <a:fillRef idx="1">
+            <a:schemeClr val="accent1"/>
+          </a:fillRef>
+          <a:effectRef idx="0">
+            <a:schemeClr val="accent1"/>
+          </a:effectRef>
+          <a:fontRef idx="minor">
+            <a:schemeClr val="lt1"/>
+          </a:fontRef>
+        </p:style>
+        <p:txBody>
+          <a:bodyPr rtlCol="0" anchor="ctr"/>
+          <a:lstStyle/>
+          <a:p>
+            <a:pPr algn="ctr">
+              <a:defRPr/>
+            </a:pPr>
+            <a:r>
+              <a:rPr kumimoji="1" lang="en-US" altLang="ja-JP">
+                <a:solidFill>
+                  <a:schemeClr val="tx1"/>
+                </a:solidFill>
+              </a:rPr>
+              <a:t>y</a:t>
+            </a:r>
+            <a:endParaRPr kumimoji="1" lang="ja-JP" altLang="en-US">
+              <a:solidFill>
+                <a:schemeClr val="tx1"/>
+              </a:solidFill>
+            </a:endParaRPr>
+          </a:p>
+        </p:txBody>
+      </p:sp>
+      <p:sp>
+        <p:nvSpPr>
+          <p:cNvPr id="17" name="正方形/長方形 16">
+            <a:extLst>
+              <a:ext uri="{FF2B5EF4-FFF2-40B4-BE49-F238E27FC236}">
+                <a16:creationId xmlns:a16="http://schemas.microsoft.com/office/drawing/2014/main" id="{1EAED7F2-5937-5E4A-83ED-7FB12B1A7E1B}"/>
+              </a:ext>
+            </a:extLst>
+          </p:cNvPr>
+          <p:cNvSpPr/>
+          <p:nvPr/>
+        </p:nvSpPr>
+        <p:spPr>
+          <a:xfrm>
+            <a:off x="4664968" y="2924944"/>
+            <a:ext cx="504056" cy="504056"/>
+          </a:xfrm>
+          <a:prstGeom prst="rect">
+            <a:avLst/>
+          </a:prstGeom>
+          <a:noFill/>
+          <a:ln>
+            <a:solidFill>
+              <a:schemeClr val="tx1"/>
+            </a:solidFill>
+          </a:ln>
+        </p:spPr>
+        <p:style>
+          <a:lnRef idx="2">
+            <a:schemeClr val="accent1">
+              <a:shade val="50000"/>
+            </a:schemeClr>
+          </a:lnRef>
+          <a:fillRef idx="1">
+            <a:schemeClr val="accent1"/>
+          </a:fillRef>
+          <a:effectRef idx="0">
+            <a:schemeClr val="accent1"/>
+          </a:effectRef>
+          <a:fontRef idx="minor">
+            <a:schemeClr val="lt1"/>
+          </a:fontRef>
+        </p:style>
+        <p:txBody>
+          <a:bodyPr rtlCol="0" anchor="ctr"/>
+          <a:lstStyle/>
+          <a:p>
+            <a:pPr algn="ctr">
+              <a:defRPr/>
+            </a:pPr>
+            <a:r>
+              <a:rPr kumimoji="1" lang="en-US" altLang="ja-JP">
+                <a:solidFill>
+                  <a:schemeClr val="tx1"/>
+                </a:solidFill>
+              </a:rPr>
+              <a:t>x</a:t>
+            </a:r>
+            <a:endParaRPr kumimoji="1" lang="ja-JP" altLang="en-US">
+              <a:solidFill>
+                <a:schemeClr val="tx1"/>
+              </a:solidFill>
+            </a:endParaRPr>
+          </a:p>
+        </p:txBody>
+      </p:sp>
+      <p:sp>
+        <p:nvSpPr>
+          <p:cNvPr id="18" name="下矢印 17">
+            <a:extLst>
+              <a:ext uri="{FF2B5EF4-FFF2-40B4-BE49-F238E27FC236}">
+                <a16:creationId xmlns:a16="http://schemas.microsoft.com/office/drawing/2014/main" id="{AA48D07F-D839-CD4B-9258-11D473255823}"/>
+              </a:ext>
+            </a:extLst>
+          </p:cNvPr>
+          <p:cNvSpPr/>
+          <p:nvPr/>
+        </p:nvSpPr>
+        <p:spPr>
+          <a:xfrm>
+            <a:off x="3944888" y="2348880"/>
+            <a:ext cx="432048" cy="360040"/>
+          </a:xfrm>
+          <a:prstGeom prst="downArrow">
+            <a:avLst/>
+          </a:prstGeom>
+          <a:solidFill>
+            <a:srgbClr val="FF0000"/>
+          </a:solidFill>
+          <a:ln>
+            <a:solidFill>
+              <a:schemeClr val="tx1"/>
+            </a:solidFill>
+          </a:ln>
+        </p:spPr>
+        <p:style>
+          <a:lnRef idx="2">
+            <a:schemeClr val="accent1">
+              <a:shade val="50000"/>
+            </a:schemeClr>
+          </a:lnRef>
+          <a:fillRef idx="1">
+            <a:schemeClr val="accent1"/>
+          </a:fillRef>
+          <a:effectRef idx="0">
+            <a:schemeClr val="accent1"/>
+          </a:effectRef>
+          <a:fontRef idx="minor">
+            <a:schemeClr val="lt1"/>
+          </a:fontRef>
+        </p:style>
+        <p:txBody>
+          <a:bodyPr rtlCol="0" anchor="ctr"/>
+          <a:lstStyle/>
+          <a:p>
+            <a:pPr algn="ctr"/>
+            <a:endParaRPr kumimoji="1" lang="ja-JP" altLang="en-US"/>
+          </a:p>
+        </p:txBody>
+      </p:sp>
+      <p:sp>
+        <p:nvSpPr>
+          <p:cNvPr id="19" name="正方形/長方形 18">
+            <a:extLst>
+              <a:ext uri="{FF2B5EF4-FFF2-40B4-BE49-F238E27FC236}">
+                <a16:creationId xmlns:a16="http://schemas.microsoft.com/office/drawing/2014/main" id="{64B6C3A1-1730-3F43-9217-3E09B667FB75}"/>
+              </a:ext>
+            </a:extLst>
+          </p:cNvPr>
+          <p:cNvSpPr/>
+          <p:nvPr/>
+        </p:nvSpPr>
+        <p:spPr>
+          <a:xfrm>
+            <a:off x="4664968" y="2132856"/>
+            <a:ext cx="2114681" cy="646331"/>
+          </a:xfrm>
+          <a:prstGeom prst="rect">
+            <a:avLst/>
+          </a:prstGeom>
+        </p:spPr>
+        <p:txBody>
+          <a:bodyPr wrap="none">
+            <a:spAutoFit/>
+          </a:bodyPr>
+          <a:lstStyle/>
+          <a:p>
+            <a:pPr algn="ctr">
+              <a:defRPr/>
+            </a:pPr>
+            <a:r>
+              <a:rPr lang="en" altLang="ja-JP">
+                <a:effectLst/>
+                <a:latin typeface="Monaco" pitchFamily="2" charset="0"/>
+              </a:rPr>
+              <a:t>_mm256_load_pd</a:t>
+            </a:r>
+          </a:p>
+          <a:p>
+            <a:pPr algn="ctr">
+              <a:defRPr/>
+            </a:pPr>
+            <a:r>
+              <a:rPr lang="en" altLang="ja-JP">
+                <a:effectLst/>
+                <a:latin typeface="Monaco" pitchFamily="2" charset="0"/>
+              </a:rPr>
+              <a:t>(vmovapd)</a:t>
+            </a:r>
+          </a:p>
+        </p:txBody>
+      </p:sp>
+      <p:sp>
+        <p:nvSpPr>
+          <p:cNvPr id="20" name="正方形/長方形 19">
+            <a:extLst>
+              <a:ext uri="{FF2B5EF4-FFF2-40B4-BE49-F238E27FC236}">
+                <a16:creationId xmlns:a16="http://schemas.microsoft.com/office/drawing/2014/main" id="{DD3CF0DC-6BDB-BF44-A5C5-F05B1C91A510}"/>
+              </a:ext>
+            </a:extLst>
+          </p:cNvPr>
+          <p:cNvSpPr/>
+          <p:nvPr/>
+        </p:nvSpPr>
+        <p:spPr>
+          <a:xfrm>
+            <a:off x="4448944" y="620688"/>
+            <a:ext cx="1425390" cy="369332"/>
+          </a:xfrm>
+          <a:prstGeom prst="rect">
+            <a:avLst/>
+          </a:prstGeom>
+        </p:spPr>
+        <p:txBody>
+          <a:bodyPr wrap="none">
+            <a:spAutoFit/>
+          </a:bodyPr>
+          <a:lstStyle/>
+          <a:p>
+            <a:pPr>
+              <a:defRPr/>
+            </a:pPr>
+            <a:r>
+              <a:rPr lang="en" altLang="ja-JP">
+                <a:effectLst/>
+                <a:latin typeface="Monaco" pitchFamily="2" charset="0"/>
+              </a:rPr>
+              <a:t>&amp;(v[i].x)</a:t>
+            </a:r>
+          </a:p>
+        </p:txBody>
+      </p:sp>
+      <p:cxnSp>
+        <p:nvCxnSpPr>
+          <p:cNvPr id="22" name="直線矢印コネクタ 21">
+            <a:extLst>
+              <a:ext uri="{FF2B5EF4-FFF2-40B4-BE49-F238E27FC236}">
+                <a16:creationId xmlns:a16="http://schemas.microsoft.com/office/drawing/2014/main" id="{8D566827-85D3-024D-ADFD-98150F71B4BF}"/>
+              </a:ext>
+            </a:extLst>
+          </p:cNvPr>
+          <p:cNvCxnSpPr>
+            <a:cxnSpLocks/>
+          </p:cNvCxnSpPr>
+          <p:nvPr/>
+        </p:nvCxnSpPr>
+        <p:spPr>
+          <a:xfrm>
+            <a:off x="5169024" y="1052736"/>
+            <a:ext cx="0" cy="504056"/>
+          </a:xfrm>
+          <a:prstGeom prst="straightConnector1">
+            <a:avLst/>
+          </a:prstGeom>
+          <a:ln>
+            <a:solidFill>
+              <a:schemeClr val="tx1"/>
+            </a:solidFill>
+            <a:tailEnd type="triangle"/>
+          </a:ln>
+        </p:spPr>
+        <p:style>
+          <a:lnRef idx="1">
+            <a:schemeClr val="accent1"/>
+          </a:lnRef>
+          <a:fillRef idx="0">
+            <a:schemeClr val="accent1"/>
+          </a:fillRef>
+          <a:effectRef idx="0">
+            <a:schemeClr val="accent1"/>
+          </a:effectRef>
+          <a:fontRef idx="minor">
+            <a:schemeClr val="tx1"/>
+          </a:fontRef>
+        </p:style>
+      </p:cxnSp>
+    </p:spTree>
+    <p:extLst>
+      <p:ext uri="{BB962C8B-B14F-4D97-AF65-F5344CB8AC3E}">
+        <p14:creationId xmlns:p14="http://schemas.microsoft.com/office/powerpoint/2010/main" val="3277191283"/>
+      </p:ext>
+    </p:extLst>
+  </p:cSld>
+  <p:clrMapOvr>
+    <a:masterClrMapping/>
+  </p:clrMapOvr>
+</p:sld>
+</file>
+
+<file path=ppt/slides/slide5.xml><?xml version="1.0" encoding="utf-8"?>
 <p:sld xmlns:a="http://schemas.openxmlformats.org/drawingml/2006/main" xmlns:r="http://schemas.openxmlformats.org/officeDocument/2006/relationships" xmlns:p="http://schemas.openxmlformats.org/presentationml/2006/main">
   <p:cSld>
     <p:spTree>
@@ -6647,3459 +10220,6 @@
 </p:sld>
 </file>
 
-<file path=ppt/slides/slide4.xml><?xml version="1.0" encoding="utf-8"?>
-<p:sld xmlns:a="http://schemas.openxmlformats.org/drawingml/2006/main" xmlns:r="http://schemas.openxmlformats.org/officeDocument/2006/relationships" xmlns:p="http://schemas.openxmlformats.org/presentationml/2006/main">
-  <p:cSld>
-    <p:spTree>
-      <p:nvGrpSpPr>
-        <p:cNvPr id="1" name=""/>
-        <p:cNvGrpSpPr/>
-        <p:nvPr/>
-      </p:nvGrpSpPr>
-      <p:grpSpPr>
-        <a:xfrm>
-          <a:off x="0" y="0"/>
-          <a:ext cx="0" cy="0"/>
-          <a:chOff x="0" y="0"/>
-          <a:chExt cx="0" cy="0"/>
-        </a:xfrm>
-      </p:grpSpPr>
-      <p:sp>
-        <p:nvSpPr>
-          <p:cNvPr id="2" name="テキスト ボックス 1">
-            <a:extLst>
-              <a:ext uri="{FF2B5EF4-FFF2-40B4-BE49-F238E27FC236}">
-                <a16:creationId xmlns:a16="http://schemas.microsoft.com/office/drawing/2014/main" id="{E1F492F3-EA16-9840-BF6B-F17F7BFF6F08}"/>
-              </a:ext>
-            </a:extLst>
-          </p:cNvPr>
-          <p:cNvSpPr txBox="1"/>
-          <p:nvPr/>
-        </p:nvSpPr>
-        <p:spPr>
-          <a:xfrm>
-            <a:off x="457200" y="365760"/>
-            <a:ext cx="2339102" cy="461665"/>
-          </a:xfrm>
-          <a:prstGeom prst="rect">
-            <a:avLst/>
-          </a:prstGeom>
-          <a:noFill/>
-          <a:ln>
-            <a:solidFill>
-              <a:schemeClr val="tx1"/>
-            </a:solidFill>
-          </a:ln>
-        </p:spPr>
-        <p:txBody>
-          <a:bodyPr wrap="none" rtlCol="0">
-            <a:spAutoFit/>
-          </a:bodyPr>
-          <a:lstStyle/>
-          <a:p>
-            <a:r>
-              <a:rPr kumimoji="1" lang="ja-JP" altLang="en-US" sz="2400"/>
-              <a:t>Superscalar</a:t>
-            </a:r>
-          </a:p>
-        </p:txBody>
-      </p:sp>
-      <p:sp>
-        <p:nvSpPr>
-          <p:cNvPr id="3" name="テキスト ボックス 2">
-            <a:extLst>
-              <a:ext uri="{FF2B5EF4-FFF2-40B4-BE49-F238E27FC236}">
-                <a16:creationId xmlns:a16="http://schemas.microsoft.com/office/drawing/2014/main" id="{7051BBA0-954A-BA4F-BE23-34DD042C3180}"/>
-              </a:ext>
-            </a:extLst>
-          </p:cNvPr>
-          <p:cNvSpPr txBox="1"/>
-          <p:nvPr/>
-        </p:nvSpPr>
-        <p:spPr>
-          <a:xfrm>
-            <a:off x="111760" y="1056640"/>
-            <a:ext cx="2852063" cy="338554"/>
-          </a:xfrm>
-          <a:prstGeom prst="rect">
-            <a:avLst/>
-          </a:prstGeom>
-          <a:noFill/>
-          <a:ln>
-            <a:noFill/>
-          </a:ln>
-        </p:spPr>
-        <p:txBody>
-          <a:bodyPr wrap="none" rtlCol="0">
-            <a:spAutoFit/>
-          </a:bodyPr>
-          <a:lstStyle/>
-          <a:p>
-            <a:r>
-              <a:rPr kumimoji="1" lang="ja-JP" altLang="en-US" sz="1600" b="1" dirty="0">
-                <a:solidFill>
-                  <a:srgbClr val="FF0000"/>
-                </a:solidFill>
-              </a:rPr>
-              <a:t>Make the hardware work hard</a:t>
-            </a:r>
-          </a:p>
-        </p:txBody>
-      </p:sp>
-      <p:sp>
-        <p:nvSpPr>
-          <p:cNvPr id="4" name="テキスト ボックス 3">
-            <a:extLst>
-              <a:ext uri="{FF2B5EF4-FFF2-40B4-BE49-F238E27FC236}">
-                <a16:creationId xmlns:a16="http://schemas.microsoft.com/office/drawing/2014/main" id="{C75A6943-B583-9C49-850F-A11CDB81BD43}"/>
-              </a:ext>
-            </a:extLst>
-          </p:cNvPr>
-          <p:cNvSpPr txBox="1"/>
-          <p:nvPr/>
-        </p:nvSpPr>
-        <p:spPr>
-          <a:xfrm>
-            <a:off x="4361284" y="325120"/>
-            <a:ext cx="840295" cy="461665"/>
-          </a:xfrm>
-          <a:prstGeom prst="rect">
-            <a:avLst/>
-          </a:prstGeom>
-          <a:noFill/>
-          <a:ln>
-            <a:solidFill>
-              <a:schemeClr val="tx1"/>
-            </a:solidFill>
-          </a:ln>
-        </p:spPr>
-        <p:txBody>
-          <a:bodyPr wrap="none" rtlCol="0">
-            <a:spAutoFit/>
-          </a:bodyPr>
-          <a:lstStyle/>
-          <a:p>
-            <a:r>
-              <a:rPr kumimoji="1" lang="en-US" altLang="ja-JP" sz="2400"/>
-              <a:t>VLIW</a:t>
-            </a:r>
-            <a:endParaRPr kumimoji="1" lang="ja-JP" altLang="en-US" sz="2400"/>
-          </a:p>
-        </p:txBody>
-      </p:sp>
-      <p:sp>
-        <p:nvSpPr>
-          <p:cNvPr id="5" name="テキスト ボックス 4">
-            <a:extLst>
-              <a:ext uri="{FF2B5EF4-FFF2-40B4-BE49-F238E27FC236}">
-                <a16:creationId xmlns:a16="http://schemas.microsoft.com/office/drawing/2014/main" id="{E155F947-E83E-8344-B2E8-5B00AEB31904}"/>
-              </a:ext>
-            </a:extLst>
-          </p:cNvPr>
-          <p:cNvSpPr txBox="1"/>
-          <p:nvPr/>
-        </p:nvSpPr>
-        <p:spPr>
-          <a:xfrm>
-            <a:off x="3484880" y="1016000"/>
-            <a:ext cx="2646878" cy="338554"/>
-          </a:xfrm>
-          <a:prstGeom prst="rect">
-            <a:avLst/>
-          </a:prstGeom>
-          <a:noFill/>
-          <a:ln>
-            <a:noFill/>
-          </a:ln>
-        </p:spPr>
-        <p:txBody>
-          <a:bodyPr wrap="none" rtlCol="0">
-            <a:spAutoFit/>
-          </a:bodyPr>
-          <a:lstStyle/>
-          <a:p>
-            <a:r>
-              <a:rPr kumimoji="1" lang="ja-JP" altLang="en-US" sz="1600" b="1" dirty="0">
-                <a:solidFill>
-                  <a:srgbClr val="FF0000"/>
-                </a:solidFill>
-              </a:rPr>
-              <a:t>Make the compiler work hard</a:t>
-            </a:r>
-          </a:p>
-        </p:txBody>
-      </p:sp>
-      <p:sp>
-        <p:nvSpPr>
-          <p:cNvPr id="6" name="テキスト ボックス 5">
-            <a:extLst>
-              <a:ext uri="{FF2B5EF4-FFF2-40B4-BE49-F238E27FC236}">
-                <a16:creationId xmlns:a16="http://schemas.microsoft.com/office/drawing/2014/main" id="{236C4897-F8AE-F341-95E3-F0142750F2F1}"/>
-              </a:ext>
-            </a:extLst>
-          </p:cNvPr>
-          <p:cNvSpPr txBox="1"/>
-          <p:nvPr/>
-        </p:nvSpPr>
-        <p:spPr>
-          <a:xfrm>
-            <a:off x="7620000" y="304800"/>
-            <a:ext cx="854721" cy="461665"/>
-          </a:xfrm>
-          <a:prstGeom prst="rect">
-            <a:avLst/>
-          </a:prstGeom>
-          <a:noFill/>
-          <a:ln>
-            <a:solidFill>
-              <a:schemeClr val="tx1"/>
-            </a:solidFill>
-          </a:ln>
-        </p:spPr>
-        <p:txBody>
-          <a:bodyPr wrap="none" rtlCol="0">
-            <a:spAutoFit/>
-          </a:bodyPr>
-          <a:lstStyle/>
-          <a:p>
-            <a:r>
-              <a:rPr kumimoji="1" lang="en-US" altLang="ja-JP" sz="2400"/>
-              <a:t>SIMD</a:t>
-            </a:r>
-            <a:endParaRPr kumimoji="1" lang="ja-JP" altLang="en-US" sz="2400"/>
-          </a:p>
-        </p:txBody>
-      </p:sp>
-      <p:sp>
-        <p:nvSpPr>
-          <p:cNvPr id="7" name="テキスト ボックス 6">
-            <a:extLst>
-              <a:ext uri="{FF2B5EF4-FFF2-40B4-BE49-F238E27FC236}">
-                <a16:creationId xmlns:a16="http://schemas.microsoft.com/office/drawing/2014/main" id="{53E2A7F9-3F02-3E42-AC3E-C3C27164A771}"/>
-              </a:ext>
-            </a:extLst>
-          </p:cNvPr>
-          <p:cNvSpPr txBox="1"/>
-          <p:nvPr/>
-        </p:nvSpPr>
-        <p:spPr>
-          <a:xfrm>
-            <a:off x="6797040" y="995680"/>
-            <a:ext cx="2646878" cy="338554"/>
-          </a:xfrm>
-          <a:prstGeom prst="rect">
-            <a:avLst/>
-          </a:prstGeom>
-          <a:noFill/>
-          <a:ln>
-            <a:noFill/>
-          </a:ln>
-        </p:spPr>
-        <p:txBody>
-          <a:bodyPr wrap="none" rtlCol="0">
-            <a:spAutoFit/>
-          </a:bodyPr>
-          <a:lstStyle/>
-          <a:p>
-            <a:r>
-              <a:rPr kumimoji="1" lang="ja-JP" altLang="en-US" sz="1600" b="1" dirty="0">
-                <a:solidFill>
-                  <a:srgbClr val="FF0000"/>
-                </a:solidFill>
-              </a:rPr>
-              <a:t>Make the programmer work hard</a:t>
-            </a:r>
-          </a:p>
-        </p:txBody>
-      </p:sp>
-      <p:sp>
-        <p:nvSpPr>
-          <p:cNvPr id="9" name="角丸四角形 8">
-            <a:extLst>
-              <a:ext uri="{FF2B5EF4-FFF2-40B4-BE49-F238E27FC236}">
-                <a16:creationId xmlns:a16="http://schemas.microsoft.com/office/drawing/2014/main" id="{16B706E8-71B3-F54F-B6D3-5195D7B3CF23}"/>
-              </a:ext>
-            </a:extLst>
-          </p:cNvPr>
-          <p:cNvSpPr/>
-          <p:nvPr/>
-        </p:nvSpPr>
-        <p:spPr>
-          <a:xfrm>
-            <a:off x="2123440" y="1983740"/>
-            <a:ext cx="1046480" cy="416107"/>
-          </a:xfrm>
-          <a:prstGeom prst="roundRect">
-            <a:avLst/>
-          </a:prstGeom>
-          <a:noFill/>
-          <a:ln>
-            <a:solidFill>
-              <a:schemeClr val="tx1"/>
-            </a:solidFill>
-          </a:ln>
-          <a:effectLst/>
-        </p:spPr>
-        <p:style>
-          <a:lnRef idx="1">
-            <a:schemeClr val="accent1"/>
-          </a:lnRef>
-          <a:fillRef idx="3">
-            <a:schemeClr val="accent1"/>
-          </a:fillRef>
-          <a:effectRef idx="2">
-            <a:schemeClr val="accent1"/>
-          </a:effectRef>
-          <a:fontRef idx="minor">
-            <a:schemeClr val="lt1"/>
-          </a:fontRef>
-        </p:style>
-        <p:txBody>
-          <a:bodyPr rtlCol="0" anchor="ctr"/>
-          <a:lstStyle/>
-          <a:p>
-            <a:pPr algn="ctr"/>
-            <a:r>
-              <a:rPr kumimoji="1" lang="ja-JP" altLang="en-US" sz="1200" dirty="0">
-                <a:solidFill>
-                  <a:schemeClr val="tx1"/>
-                </a:solidFill>
-              </a:rPr>
-              <a:t>Execution</a:t>
-            </a:r>
-            <a:endParaRPr kumimoji="1" lang="en-US" altLang="ja-JP" sz="1200" dirty="0">
-              <a:solidFill>
-                <a:schemeClr val="tx1"/>
-              </a:solidFill>
-            </a:endParaRPr>
-          </a:p>
-          <a:p>
-            <a:pPr algn="ctr"/>
-            <a:r>
-              <a:rPr kumimoji="1" lang="ja-JP" altLang="en-US" sz="1200" dirty="0">
-                <a:solidFill>
-                  <a:schemeClr val="tx1"/>
-                </a:solidFill>
-              </a:rPr>
-              <a:t>unit</a:t>
-            </a:r>
-            <a:endParaRPr kumimoji="1" lang="en-US" altLang="ja-JP" sz="1200" dirty="0">
-              <a:solidFill>
-                <a:schemeClr val="tx1"/>
-              </a:solidFill>
-            </a:endParaRPr>
-          </a:p>
-        </p:txBody>
-      </p:sp>
-      <p:sp>
-        <p:nvSpPr>
-          <p:cNvPr id="10" name="角丸四角形 9">
-            <a:extLst>
-              <a:ext uri="{FF2B5EF4-FFF2-40B4-BE49-F238E27FC236}">
-                <a16:creationId xmlns:a16="http://schemas.microsoft.com/office/drawing/2014/main" id="{F1AE55D0-F074-E646-9F94-830067ABBBB1}"/>
-              </a:ext>
-            </a:extLst>
-          </p:cNvPr>
-          <p:cNvSpPr/>
-          <p:nvPr/>
-        </p:nvSpPr>
-        <p:spPr>
-          <a:xfrm>
-            <a:off x="2133600" y="2625018"/>
-            <a:ext cx="1036320" cy="416107"/>
-          </a:xfrm>
-          <a:prstGeom prst="roundRect">
-            <a:avLst/>
-          </a:prstGeom>
-          <a:noFill/>
-          <a:ln>
-            <a:solidFill>
-              <a:schemeClr val="tx1"/>
-            </a:solidFill>
-          </a:ln>
-          <a:effectLst/>
-        </p:spPr>
-        <p:style>
-          <a:lnRef idx="1">
-            <a:schemeClr val="accent1"/>
-          </a:lnRef>
-          <a:fillRef idx="3">
-            <a:schemeClr val="accent1"/>
-          </a:fillRef>
-          <a:effectRef idx="2">
-            <a:schemeClr val="accent1"/>
-          </a:effectRef>
-          <a:fontRef idx="minor">
-            <a:schemeClr val="lt1"/>
-          </a:fontRef>
-        </p:style>
-        <p:txBody>
-          <a:bodyPr rtlCol="0" anchor="ctr"/>
-          <a:lstStyle/>
-          <a:p>
-            <a:pPr algn="ctr"/>
-            <a:r>
-              <a:rPr kumimoji="1" lang="ja-JP" altLang="en-US" sz="1200" dirty="0">
-                <a:solidFill>
-                  <a:schemeClr val="tx1"/>
-                </a:solidFill>
-              </a:rPr>
-              <a:t>Execution</a:t>
-            </a:r>
-            <a:endParaRPr kumimoji="1" lang="en-US" altLang="ja-JP" sz="1200" dirty="0">
-              <a:solidFill>
-                <a:schemeClr val="tx1"/>
-              </a:solidFill>
-            </a:endParaRPr>
-          </a:p>
-          <a:p>
-            <a:pPr algn="ctr"/>
-            <a:r>
-              <a:rPr kumimoji="1" lang="ja-JP" altLang="en-US" sz="1200" dirty="0">
-                <a:solidFill>
-                  <a:schemeClr val="tx1"/>
-                </a:solidFill>
-              </a:rPr>
-              <a:t>unit</a:t>
-            </a:r>
-            <a:endParaRPr kumimoji="1" lang="en-US" altLang="ja-JP" sz="1200" dirty="0">
-              <a:solidFill>
-                <a:schemeClr val="tx1"/>
-              </a:solidFill>
-            </a:endParaRPr>
-          </a:p>
-        </p:txBody>
-      </p:sp>
-      <p:cxnSp>
-        <p:nvCxnSpPr>
-          <p:cNvPr id="11" name="カギ線コネクタ 10">
-            <a:extLst>
-              <a:ext uri="{FF2B5EF4-FFF2-40B4-BE49-F238E27FC236}">
-                <a16:creationId xmlns:a16="http://schemas.microsoft.com/office/drawing/2014/main" id="{59846A2A-048D-204D-8AE4-FF3FB51F840C}"/>
-              </a:ext>
-            </a:extLst>
-          </p:cNvPr>
-          <p:cNvCxnSpPr>
-            <a:cxnSpLocks/>
-            <a:stCxn id="13" idx="3"/>
-            <a:endCxn id="9" idx="1"/>
-          </p:cNvCxnSpPr>
-          <p:nvPr/>
-        </p:nvCxnSpPr>
-        <p:spPr>
-          <a:xfrm flipV="1">
-            <a:off x="1209040" y="2191794"/>
-            <a:ext cx="914400" cy="327886"/>
-          </a:xfrm>
-          <a:prstGeom prst="bentConnector3">
-            <a:avLst>
-              <a:gd name="adj1" fmla="val 48889"/>
-            </a:avLst>
-          </a:prstGeom>
-          <a:ln w="19050">
-            <a:solidFill>
-              <a:srgbClr val="FF0000"/>
-            </a:solidFill>
-            <a:headEnd type="none" w="med" len="med"/>
-            <a:tailEnd type="arrow"/>
-          </a:ln>
-        </p:spPr>
-        <p:style>
-          <a:lnRef idx="1">
-            <a:schemeClr val="accent1"/>
-          </a:lnRef>
-          <a:fillRef idx="0">
-            <a:schemeClr val="accent1"/>
-          </a:fillRef>
-          <a:effectRef idx="0">
-            <a:schemeClr val="accent1"/>
-          </a:effectRef>
-          <a:fontRef idx="minor">
-            <a:schemeClr val="tx1"/>
-          </a:fontRef>
-        </p:style>
-      </p:cxnSp>
-      <p:cxnSp>
-        <p:nvCxnSpPr>
-          <p:cNvPr id="12" name="カギ線コネクタ 11">
-            <a:extLst>
-              <a:ext uri="{FF2B5EF4-FFF2-40B4-BE49-F238E27FC236}">
-                <a16:creationId xmlns:a16="http://schemas.microsoft.com/office/drawing/2014/main" id="{1CF5CF92-D7EB-2448-B433-3FF70A8992E2}"/>
-              </a:ext>
-            </a:extLst>
-          </p:cNvPr>
-          <p:cNvCxnSpPr>
-            <a:cxnSpLocks/>
-            <a:stCxn id="13" idx="3"/>
-            <a:endCxn id="10" idx="1"/>
-          </p:cNvCxnSpPr>
-          <p:nvPr/>
-        </p:nvCxnSpPr>
-        <p:spPr>
-          <a:xfrm>
-            <a:off x="1209040" y="2519680"/>
-            <a:ext cx="924560" cy="313392"/>
-          </a:xfrm>
-          <a:prstGeom prst="bentConnector3">
-            <a:avLst>
-              <a:gd name="adj1" fmla="val 48901"/>
-            </a:avLst>
-          </a:prstGeom>
-          <a:ln w="19050">
-            <a:solidFill>
-              <a:srgbClr val="FF0000"/>
-            </a:solidFill>
-            <a:headEnd type="none" w="med" len="med"/>
-            <a:tailEnd type="arrow"/>
-          </a:ln>
-        </p:spPr>
-        <p:style>
-          <a:lnRef idx="1">
-            <a:schemeClr val="accent1"/>
-          </a:lnRef>
-          <a:fillRef idx="0">
-            <a:schemeClr val="accent1"/>
-          </a:fillRef>
-          <a:effectRef idx="0">
-            <a:schemeClr val="accent1"/>
-          </a:effectRef>
-          <a:fontRef idx="minor">
-            <a:schemeClr val="tx1"/>
-          </a:fontRef>
-        </p:style>
-      </p:cxnSp>
-      <p:sp>
-        <p:nvSpPr>
-          <p:cNvPr id="13" name="角丸四角形 12">
-            <a:extLst>
-              <a:ext uri="{FF2B5EF4-FFF2-40B4-BE49-F238E27FC236}">
-                <a16:creationId xmlns:a16="http://schemas.microsoft.com/office/drawing/2014/main" id="{05614538-FE36-464E-A9D7-A32C16F5C67B}"/>
-              </a:ext>
-            </a:extLst>
-          </p:cNvPr>
-          <p:cNvSpPr/>
-          <p:nvPr/>
-        </p:nvSpPr>
-        <p:spPr>
-          <a:xfrm>
-            <a:off x="487680" y="1981200"/>
-            <a:ext cx="721360" cy="1076959"/>
-          </a:xfrm>
-          <a:prstGeom prst="roundRect">
-            <a:avLst/>
-          </a:prstGeom>
-          <a:solidFill>
-            <a:schemeClr val="bg1"/>
-          </a:solidFill>
-          <a:ln>
-            <a:solidFill>
-              <a:schemeClr val="tx1"/>
-            </a:solidFill>
-          </a:ln>
-          <a:effectLst/>
-        </p:spPr>
-        <p:style>
-          <a:lnRef idx="1">
-            <a:schemeClr val="accent1"/>
-          </a:lnRef>
-          <a:fillRef idx="3">
-            <a:schemeClr val="accent1"/>
-          </a:fillRef>
-          <a:effectRef idx="2">
-            <a:schemeClr val="accent1"/>
-          </a:effectRef>
-          <a:fontRef idx="minor">
-            <a:schemeClr val="lt1"/>
-          </a:fontRef>
-        </p:style>
-        <p:txBody>
-          <a:bodyPr rtlCol="0" anchor="ctr"/>
-          <a:lstStyle/>
-          <a:p>
-            <a:pPr algn="ctr"/>
-            <a:r>
-              <a:rPr kumimoji="1" lang="ja-JP" altLang="en-US" sz="1200" dirty="0">
-                <a:solidFill>
-                  <a:schemeClr val="tx1"/>
-                </a:solidFill>
-              </a:rPr>
-              <a:t>Instruction queue</a:t>
-            </a:r>
-          </a:p>
-        </p:txBody>
-      </p:sp>
-      <p:sp>
-        <p:nvSpPr>
-          <p:cNvPr id="14" name="テキスト ボックス 13">
-            <a:extLst>
-              <a:ext uri="{FF2B5EF4-FFF2-40B4-BE49-F238E27FC236}">
-                <a16:creationId xmlns:a16="http://schemas.microsoft.com/office/drawing/2014/main" id="{26BE572B-4298-184B-8524-7A29377ED6D3}"/>
-              </a:ext>
-            </a:extLst>
-          </p:cNvPr>
-          <p:cNvSpPr txBox="1"/>
-          <p:nvPr/>
-        </p:nvSpPr>
-        <p:spPr>
-          <a:xfrm>
-            <a:off x="741681" y="1665148"/>
-            <a:ext cx="808786" cy="276999"/>
-          </a:xfrm>
-          <a:prstGeom prst="rect">
-            <a:avLst/>
-          </a:prstGeom>
-          <a:noFill/>
-        </p:spPr>
-        <p:txBody>
-          <a:bodyPr wrap="square" rtlCol="0">
-            <a:spAutoFit/>
-          </a:bodyPr>
-          <a:lstStyle/>
-          <a:p>
-            <a:r>
-              <a:rPr kumimoji="1" lang="ja-JP" altLang="en-US" sz="1200" dirty="0"/>
-              <a:t>Dispatch</a:t>
-            </a:r>
-          </a:p>
-        </p:txBody>
-      </p:sp>
-      <p:sp>
-        <p:nvSpPr>
-          <p:cNvPr id="20" name="テキスト ボックス 19">
-            <a:extLst>
-              <a:ext uri="{FF2B5EF4-FFF2-40B4-BE49-F238E27FC236}">
-                <a16:creationId xmlns:a16="http://schemas.microsoft.com/office/drawing/2014/main" id="{4D504E4A-D45E-4346-8869-A6D4580087F3}"/>
-              </a:ext>
-            </a:extLst>
-          </p:cNvPr>
-          <p:cNvSpPr txBox="1"/>
-          <p:nvPr/>
-        </p:nvSpPr>
-        <p:spPr>
-          <a:xfrm>
-            <a:off x="798865" y="5695017"/>
-            <a:ext cx="2159566" cy="523220"/>
-          </a:xfrm>
-          <a:prstGeom prst="rect">
-            <a:avLst/>
-          </a:prstGeom>
-          <a:noFill/>
-        </p:spPr>
-        <p:txBody>
-          <a:bodyPr wrap="none" rtlCol="0">
-            <a:spAutoFit/>
-          </a:bodyPr>
-          <a:lstStyle/>
-          <a:p>
-            <a:r>
-              <a:rPr kumimoji="1" lang="ja-JP" altLang="en-US" sz="1400" b="1" dirty="0">
-                <a:solidFill>
-                  <a:srgbClr val="FF0000"/>
-                </a:solidFill>
-              </a:rPr>
-              <a:t>As execution units increase,</a:t>
-            </a:r>
-            <a:endParaRPr kumimoji="1" lang="en-US" altLang="ja-JP" sz="1400" b="1" dirty="0">
-              <a:solidFill>
-                <a:srgbClr val="FF0000"/>
-              </a:solidFill>
-            </a:endParaRPr>
-          </a:p>
-          <a:p>
-            <a:r>
-              <a:rPr kumimoji="1" lang="ja-JP" altLang="en-US" sz="1400" b="1" dirty="0">
-                <a:solidFill>
-                  <a:srgbClr val="FF0000"/>
-                </a:solidFill>
-              </a:rPr>
-              <a:t>instruction dispatch becomes the bottleneck</a:t>
-            </a:r>
-            <a:endParaRPr kumimoji="1" lang="en-US" altLang="ja-JP" sz="1400" b="1" dirty="0">
-              <a:solidFill>
-                <a:srgbClr val="FF0000"/>
-              </a:solidFill>
-            </a:endParaRPr>
-          </a:p>
-        </p:txBody>
-      </p:sp>
-      <p:sp>
-        <p:nvSpPr>
-          <p:cNvPr id="21" name="テキスト ボックス 20">
-            <a:extLst>
-              <a:ext uri="{FF2B5EF4-FFF2-40B4-BE49-F238E27FC236}">
-                <a16:creationId xmlns:a16="http://schemas.microsoft.com/office/drawing/2014/main" id="{F57E9AB9-8E76-6A47-AFC5-EFA81D236582}"/>
-              </a:ext>
-            </a:extLst>
-          </p:cNvPr>
-          <p:cNvSpPr txBox="1"/>
-          <p:nvPr/>
-        </p:nvSpPr>
-        <p:spPr>
-          <a:xfrm>
-            <a:off x="770128" y="4821257"/>
-            <a:ext cx="2379177" cy="307777"/>
-          </a:xfrm>
-          <a:prstGeom prst="rect">
-            <a:avLst/>
-          </a:prstGeom>
-          <a:noFill/>
-        </p:spPr>
-        <p:txBody>
-          <a:bodyPr wrap="none" rtlCol="0">
-            <a:spAutoFit/>
-          </a:bodyPr>
-          <a:lstStyle/>
-          <a:p>
-            <a:r>
-              <a:rPr kumimoji="1" lang="en-US" altLang="ja-JP" sz="1400" dirty="0"/>
-              <a:t>Instruction backward compatibility is preserved</a:t>
-            </a:r>
-            <a:endParaRPr kumimoji="1" lang="en-US" altLang="ja-JP" sz="1400" dirty="0"/>
-          </a:p>
-        </p:txBody>
-      </p:sp>
-      <p:pic>
-        <p:nvPicPr>
-          <p:cNvPr id="24" name="図 23">
-            <a:extLst>
-              <a:ext uri="{FF2B5EF4-FFF2-40B4-BE49-F238E27FC236}">
-                <a16:creationId xmlns:a16="http://schemas.microsoft.com/office/drawing/2014/main" id="{447CC45F-CAA5-194F-8B12-2F6A7B26F6FC}"/>
-              </a:ext>
-            </a:extLst>
-          </p:cNvPr>
-          <p:cNvPicPr>
-            <a:picLocks noChangeAspect="1"/>
-          </p:cNvPicPr>
-          <p:nvPr/>
-        </p:nvPicPr>
-        <p:blipFill>
-          <a:blip r:embed="rId2"/>
-          <a:stretch>
-            <a:fillRect/>
-          </a:stretch>
-        </p:blipFill>
-        <p:spPr>
-          <a:xfrm>
-            <a:off x="3439160" y="4665344"/>
-            <a:ext cx="584200" cy="569595"/>
-          </a:xfrm>
-          <a:prstGeom prst="rect">
-            <a:avLst/>
-          </a:prstGeom>
-        </p:spPr>
-      </p:pic>
-      <p:pic>
-        <p:nvPicPr>
-          <p:cNvPr id="25" name="図 24">
-            <a:extLst>
-              <a:ext uri="{FF2B5EF4-FFF2-40B4-BE49-F238E27FC236}">
-                <a16:creationId xmlns:a16="http://schemas.microsoft.com/office/drawing/2014/main" id="{78665135-5BEE-F440-AFDB-395CC70BA0E9}"/>
-              </a:ext>
-            </a:extLst>
-          </p:cNvPr>
-          <p:cNvPicPr>
-            <a:picLocks noChangeAspect="1"/>
-          </p:cNvPicPr>
-          <p:nvPr/>
-        </p:nvPicPr>
-        <p:blipFill>
-          <a:blip r:embed="rId3"/>
-          <a:stretch>
-            <a:fillRect/>
-          </a:stretch>
-        </p:blipFill>
-        <p:spPr>
-          <a:xfrm>
-            <a:off x="3439160" y="5659119"/>
-            <a:ext cx="584200" cy="569595"/>
-          </a:xfrm>
-          <a:prstGeom prst="rect">
-            <a:avLst/>
-          </a:prstGeom>
-        </p:spPr>
-      </p:pic>
-      <p:sp>
-        <p:nvSpPr>
-          <p:cNvPr id="29" name="角丸四角形 28">
-            <a:extLst>
-              <a:ext uri="{FF2B5EF4-FFF2-40B4-BE49-F238E27FC236}">
-                <a16:creationId xmlns:a16="http://schemas.microsoft.com/office/drawing/2014/main" id="{6A11AA7C-B4A8-3C4C-B8AE-43F67A10FBDC}"/>
-              </a:ext>
-            </a:extLst>
-          </p:cNvPr>
-          <p:cNvSpPr/>
-          <p:nvPr/>
-        </p:nvSpPr>
-        <p:spPr>
-          <a:xfrm>
-            <a:off x="5121546" y="1855995"/>
-            <a:ext cx="969374" cy="484687"/>
-          </a:xfrm>
-          <a:prstGeom prst="roundRect">
-            <a:avLst/>
-          </a:prstGeom>
-          <a:noFill/>
-          <a:ln>
-            <a:solidFill>
-              <a:schemeClr val="tx1"/>
-            </a:solidFill>
-          </a:ln>
-          <a:effectLst/>
-        </p:spPr>
-        <p:style>
-          <a:lnRef idx="1">
-            <a:schemeClr val="accent1"/>
-          </a:lnRef>
-          <a:fillRef idx="3">
-            <a:schemeClr val="accent1"/>
-          </a:fillRef>
-          <a:effectRef idx="2">
-            <a:schemeClr val="accent1"/>
-          </a:effectRef>
-          <a:fontRef idx="minor">
-            <a:schemeClr val="lt1"/>
-          </a:fontRef>
-        </p:style>
-        <p:txBody>
-          <a:bodyPr rtlCol="0" anchor="ctr"/>
-          <a:lstStyle/>
-          <a:p>
-            <a:pPr algn="ctr"/>
-            <a:r>
-              <a:rPr kumimoji="1" lang="ja-JP" altLang="en-US" sz="1400" dirty="0">
-                <a:solidFill>
-                  <a:schemeClr val="tx1"/>
-                </a:solidFill>
-              </a:rPr>
-              <a:t>Execution</a:t>
-            </a:r>
-            <a:endParaRPr kumimoji="1" lang="en-US" altLang="ja-JP" sz="1400" dirty="0">
-              <a:solidFill>
-                <a:schemeClr val="tx1"/>
-              </a:solidFill>
-            </a:endParaRPr>
-          </a:p>
-          <a:p>
-            <a:pPr algn="ctr"/>
-            <a:r>
-              <a:rPr kumimoji="1" lang="ja-JP" altLang="en-US" sz="1400" dirty="0">
-                <a:solidFill>
-                  <a:schemeClr val="tx1"/>
-                </a:solidFill>
-              </a:rPr>
-              <a:t>unit</a:t>
-            </a:r>
-            <a:endParaRPr kumimoji="1" lang="en-US" altLang="ja-JP" sz="1400" dirty="0">
-              <a:solidFill>
-                <a:schemeClr val="tx1"/>
-              </a:solidFill>
-            </a:endParaRPr>
-          </a:p>
-        </p:txBody>
-      </p:sp>
-      <p:sp>
-        <p:nvSpPr>
-          <p:cNvPr id="30" name="角丸四角形 29">
-            <a:extLst>
-              <a:ext uri="{FF2B5EF4-FFF2-40B4-BE49-F238E27FC236}">
-                <a16:creationId xmlns:a16="http://schemas.microsoft.com/office/drawing/2014/main" id="{5FC68AB8-34CF-1D40-8414-F799436B41E4}"/>
-              </a:ext>
-            </a:extLst>
-          </p:cNvPr>
-          <p:cNvSpPr/>
-          <p:nvPr/>
-        </p:nvSpPr>
-        <p:spPr>
-          <a:xfrm>
-            <a:off x="5121546" y="2344873"/>
-            <a:ext cx="969374" cy="484687"/>
-          </a:xfrm>
-          <a:prstGeom prst="roundRect">
-            <a:avLst/>
-          </a:prstGeom>
-          <a:noFill/>
-          <a:ln>
-            <a:solidFill>
-              <a:schemeClr val="tx1"/>
-            </a:solidFill>
-          </a:ln>
-          <a:effectLst/>
-        </p:spPr>
-        <p:style>
-          <a:lnRef idx="1">
-            <a:schemeClr val="accent1"/>
-          </a:lnRef>
-          <a:fillRef idx="3">
-            <a:schemeClr val="accent1"/>
-          </a:fillRef>
-          <a:effectRef idx="2">
-            <a:schemeClr val="accent1"/>
-          </a:effectRef>
-          <a:fontRef idx="minor">
-            <a:schemeClr val="lt1"/>
-          </a:fontRef>
-        </p:style>
-        <p:txBody>
-          <a:bodyPr rtlCol="0" anchor="ctr"/>
-          <a:lstStyle/>
-          <a:p>
-            <a:pPr algn="ctr"/>
-            <a:r>
-              <a:rPr kumimoji="1" lang="ja-JP" altLang="en-US" sz="1400" dirty="0">
-                <a:solidFill>
-                  <a:schemeClr val="tx1"/>
-                </a:solidFill>
-              </a:rPr>
-              <a:t>Execution</a:t>
-            </a:r>
-            <a:endParaRPr kumimoji="1" lang="en-US" altLang="ja-JP" sz="1400" dirty="0">
-              <a:solidFill>
-                <a:schemeClr val="tx1"/>
-              </a:solidFill>
-            </a:endParaRPr>
-          </a:p>
-          <a:p>
-            <a:pPr algn="ctr"/>
-            <a:r>
-              <a:rPr kumimoji="1" lang="ja-JP" altLang="en-US" sz="1400" dirty="0">
-                <a:solidFill>
-                  <a:schemeClr val="tx1"/>
-                </a:solidFill>
-              </a:rPr>
-              <a:t>unit</a:t>
-            </a:r>
-            <a:endParaRPr kumimoji="1" lang="en-US" altLang="ja-JP" sz="1400" dirty="0">
-              <a:solidFill>
-                <a:schemeClr val="tx1"/>
-              </a:solidFill>
-            </a:endParaRPr>
-          </a:p>
-        </p:txBody>
-      </p:sp>
-      <p:sp>
-        <p:nvSpPr>
-          <p:cNvPr id="31" name="正方形/長方形 30">
-            <a:extLst>
-              <a:ext uri="{FF2B5EF4-FFF2-40B4-BE49-F238E27FC236}">
-                <a16:creationId xmlns:a16="http://schemas.microsoft.com/office/drawing/2014/main" id="{336FF39C-A5D9-884C-9297-9573EA638016}"/>
-              </a:ext>
-            </a:extLst>
-          </p:cNvPr>
-          <p:cNvSpPr/>
-          <p:nvPr/>
-        </p:nvSpPr>
-        <p:spPr>
-          <a:xfrm>
-            <a:off x="4033520" y="1915160"/>
-            <a:ext cx="533400" cy="457200"/>
-          </a:xfrm>
-          <a:prstGeom prst="rect">
-            <a:avLst/>
-          </a:prstGeom>
-          <a:solidFill>
-            <a:schemeClr val="bg1"/>
-          </a:solidFill>
-          <a:ln>
-            <a:solidFill>
-              <a:schemeClr val="tx1"/>
-            </a:solidFill>
-          </a:ln>
-          <a:effectLst/>
-        </p:spPr>
-        <p:style>
-          <a:lnRef idx="1">
-            <a:schemeClr val="accent1"/>
-          </a:lnRef>
-          <a:fillRef idx="3">
-            <a:schemeClr val="accent1"/>
-          </a:fillRef>
-          <a:effectRef idx="2">
-            <a:schemeClr val="accent1"/>
-          </a:effectRef>
-          <a:fontRef idx="minor">
-            <a:schemeClr val="lt1"/>
-          </a:fontRef>
-        </p:style>
-        <p:txBody>
-          <a:bodyPr rtlCol="0" anchor="ctr"/>
-          <a:lstStyle/>
-          <a:p>
-            <a:pPr algn="ctr"/>
-            <a:r>
-              <a:rPr kumimoji="1" lang="ja-JP" altLang="en-US" sz="1000" dirty="0">
-                <a:solidFill>
-                  <a:schemeClr val="tx1"/>
-                </a:solidFill>
-              </a:rPr>
-              <a:t>Instruction A</a:t>
-            </a:r>
-            <a:endParaRPr kumimoji="1" lang="ja-JP" altLang="en-US" sz="1000" dirty="0">
-              <a:solidFill>
-                <a:schemeClr val="tx1"/>
-              </a:solidFill>
-            </a:endParaRPr>
-          </a:p>
-        </p:txBody>
-      </p:sp>
-      <p:sp>
-        <p:nvSpPr>
-          <p:cNvPr id="32" name="正方形/長方形 31">
-            <a:extLst>
-              <a:ext uri="{FF2B5EF4-FFF2-40B4-BE49-F238E27FC236}">
-                <a16:creationId xmlns:a16="http://schemas.microsoft.com/office/drawing/2014/main" id="{C9774A07-3EC8-2D42-98B1-9FE5746B09DD}"/>
-              </a:ext>
-            </a:extLst>
-          </p:cNvPr>
-          <p:cNvSpPr/>
-          <p:nvPr/>
-        </p:nvSpPr>
-        <p:spPr>
-          <a:xfrm>
-            <a:off x="4033520" y="2372360"/>
-            <a:ext cx="533400" cy="457200"/>
-          </a:xfrm>
-          <a:prstGeom prst="rect">
-            <a:avLst/>
-          </a:prstGeom>
-          <a:solidFill>
-            <a:schemeClr val="bg1"/>
-          </a:solidFill>
-          <a:ln>
-            <a:solidFill>
-              <a:schemeClr val="tx1"/>
-            </a:solidFill>
-          </a:ln>
-          <a:effectLst/>
-        </p:spPr>
-        <p:style>
-          <a:lnRef idx="1">
-            <a:schemeClr val="accent1"/>
-          </a:lnRef>
-          <a:fillRef idx="3">
-            <a:schemeClr val="accent1"/>
-          </a:fillRef>
-          <a:effectRef idx="2">
-            <a:schemeClr val="accent1"/>
-          </a:effectRef>
-          <a:fontRef idx="minor">
-            <a:schemeClr val="lt1"/>
-          </a:fontRef>
-        </p:style>
-        <p:txBody>
-          <a:bodyPr rtlCol="0" anchor="ctr"/>
-          <a:lstStyle/>
-          <a:p>
-            <a:pPr algn="ctr"/>
-            <a:r>
-              <a:rPr kumimoji="1" lang="ja-JP" altLang="en-US" sz="1000" dirty="0">
-                <a:solidFill>
-                  <a:schemeClr val="tx1"/>
-                </a:solidFill>
-              </a:rPr>
-              <a:t>Instruction B</a:t>
-            </a:r>
-            <a:endParaRPr kumimoji="1" lang="ja-JP" altLang="en-US" sz="1000" dirty="0">
-              <a:solidFill>
-                <a:schemeClr val="tx1"/>
-              </a:solidFill>
-            </a:endParaRPr>
-          </a:p>
-        </p:txBody>
-      </p:sp>
-      <p:sp>
-        <p:nvSpPr>
-          <p:cNvPr id="33" name="角丸四角形 32">
-            <a:extLst>
-              <a:ext uri="{FF2B5EF4-FFF2-40B4-BE49-F238E27FC236}">
-                <a16:creationId xmlns:a16="http://schemas.microsoft.com/office/drawing/2014/main" id="{089701AB-4285-6349-BA79-97B92563B5AA}"/>
-              </a:ext>
-            </a:extLst>
-          </p:cNvPr>
-          <p:cNvSpPr/>
-          <p:nvPr/>
-        </p:nvSpPr>
-        <p:spPr>
-          <a:xfrm>
-            <a:off x="3952240" y="1757680"/>
-            <a:ext cx="690880" cy="1229360"/>
-          </a:xfrm>
-          <a:prstGeom prst="roundRect">
-            <a:avLst/>
-          </a:prstGeom>
-          <a:noFill/>
-          <a:ln w="38100">
-            <a:solidFill>
-              <a:schemeClr val="tx1"/>
-            </a:solidFill>
-            <a:prstDash val="sysDash"/>
-          </a:ln>
-        </p:spPr>
-        <p:style>
-          <a:lnRef idx="2">
-            <a:schemeClr val="accent1">
-              <a:shade val="50000"/>
-            </a:schemeClr>
-          </a:lnRef>
-          <a:fillRef idx="1">
-            <a:schemeClr val="accent1"/>
-          </a:fillRef>
-          <a:effectRef idx="0">
-            <a:schemeClr val="accent1"/>
-          </a:effectRef>
-          <a:fontRef idx="minor">
-            <a:schemeClr val="lt1"/>
-          </a:fontRef>
-        </p:style>
-        <p:txBody>
-          <a:bodyPr rtlCol="0" anchor="ctr"/>
-          <a:lstStyle/>
-          <a:p>
-            <a:pPr algn="ctr"/>
-            <a:endParaRPr kumimoji="1" lang="ja-JP" altLang="en-US"/>
-          </a:p>
-        </p:txBody>
-      </p:sp>
-      <p:sp>
-        <p:nvSpPr>
-          <p:cNvPr id="34" name="テキスト ボックス 33">
-            <a:extLst>
-              <a:ext uri="{FF2B5EF4-FFF2-40B4-BE49-F238E27FC236}">
-                <a16:creationId xmlns:a16="http://schemas.microsoft.com/office/drawing/2014/main" id="{2B0B985A-CA7E-EA4B-8FD4-9B450FAB5D2C}"/>
-              </a:ext>
-            </a:extLst>
-          </p:cNvPr>
-          <p:cNvSpPr txBox="1"/>
-          <p:nvPr/>
-        </p:nvSpPr>
-        <p:spPr>
-          <a:xfrm>
-            <a:off x="3688080" y="1452880"/>
-            <a:ext cx="1279517" cy="253916"/>
-          </a:xfrm>
-          <a:prstGeom prst="rect">
-            <a:avLst/>
-          </a:prstGeom>
-          <a:noFill/>
-        </p:spPr>
-        <p:txBody>
-          <a:bodyPr wrap="none" rtlCol="0">
-            <a:spAutoFit/>
-          </a:bodyPr>
-          <a:lstStyle/>
-          <a:p>
-            <a:r>
-              <a:rPr kumimoji="1" lang="en-US" altLang="ja-JP" sz="1050"/>
-              <a:t>One VLIW instruction</a:t>
-            </a:r>
-          </a:p>
-        </p:txBody>
-      </p:sp>
-      <p:cxnSp>
-        <p:nvCxnSpPr>
-          <p:cNvPr id="36" name="直線矢印コネクタ 35">
-            <a:extLst>
-              <a:ext uri="{FF2B5EF4-FFF2-40B4-BE49-F238E27FC236}">
-                <a16:creationId xmlns:a16="http://schemas.microsoft.com/office/drawing/2014/main" id="{5F347953-0B59-5B44-BEFD-27C17BA2F8FC}"/>
-              </a:ext>
-            </a:extLst>
-          </p:cNvPr>
-          <p:cNvCxnSpPr>
-            <a:cxnSpLocks/>
-            <a:endCxn id="29" idx="1"/>
-          </p:cNvCxnSpPr>
-          <p:nvPr/>
-        </p:nvCxnSpPr>
-        <p:spPr>
-          <a:xfrm>
-            <a:off x="4592320" y="2098339"/>
-            <a:ext cx="529226" cy="0"/>
-          </a:xfrm>
-          <a:prstGeom prst="straightConnector1">
-            <a:avLst/>
-          </a:prstGeom>
-          <a:ln w="19050">
-            <a:solidFill>
-              <a:srgbClr val="FF0000"/>
-            </a:solidFill>
-            <a:tailEnd type="triangle"/>
-          </a:ln>
-        </p:spPr>
-        <p:style>
-          <a:lnRef idx="1">
-            <a:schemeClr val="accent1"/>
-          </a:lnRef>
-          <a:fillRef idx="0">
-            <a:schemeClr val="accent1"/>
-          </a:fillRef>
-          <a:effectRef idx="0">
-            <a:schemeClr val="accent1"/>
-          </a:effectRef>
-          <a:fontRef idx="minor">
-            <a:schemeClr val="tx1"/>
-          </a:fontRef>
-        </p:style>
-      </p:cxnSp>
-      <p:cxnSp>
-        <p:nvCxnSpPr>
-          <p:cNvPr id="38" name="直線矢印コネクタ 37">
-            <a:extLst>
-              <a:ext uri="{FF2B5EF4-FFF2-40B4-BE49-F238E27FC236}">
-                <a16:creationId xmlns:a16="http://schemas.microsoft.com/office/drawing/2014/main" id="{1002CF52-46AB-E943-9695-563F0D56656C}"/>
-              </a:ext>
-            </a:extLst>
-          </p:cNvPr>
-          <p:cNvCxnSpPr>
-            <a:cxnSpLocks/>
-          </p:cNvCxnSpPr>
-          <p:nvPr/>
-        </p:nvCxnSpPr>
-        <p:spPr>
-          <a:xfrm>
-            <a:off x="4572000" y="2616499"/>
-            <a:ext cx="529226" cy="0"/>
-          </a:xfrm>
-          <a:prstGeom prst="straightConnector1">
-            <a:avLst/>
-          </a:prstGeom>
-          <a:ln w="19050">
-            <a:solidFill>
-              <a:srgbClr val="FF0000"/>
-            </a:solidFill>
-            <a:tailEnd type="triangle"/>
-          </a:ln>
-        </p:spPr>
-        <p:style>
-          <a:lnRef idx="1">
-            <a:schemeClr val="accent1"/>
-          </a:lnRef>
-          <a:fillRef idx="0">
-            <a:schemeClr val="accent1"/>
-          </a:fillRef>
-          <a:effectRef idx="0">
-            <a:schemeClr val="accent1"/>
-          </a:effectRef>
-          <a:fontRef idx="minor">
-            <a:schemeClr val="tx1"/>
-          </a:fontRef>
-        </p:style>
-      </p:cxnSp>
-      <p:sp>
-        <p:nvSpPr>
-          <p:cNvPr id="39" name="テキスト ボックス 38">
-            <a:extLst>
-              <a:ext uri="{FF2B5EF4-FFF2-40B4-BE49-F238E27FC236}">
-                <a16:creationId xmlns:a16="http://schemas.microsoft.com/office/drawing/2014/main" id="{FB6311DC-D3F4-B748-BA53-4FFE097F7657}"/>
-              </a:ext>
-            </a:extLst>
-          </p:cNvPr>
-          <p:cNvSpPr txBox="1"/>
-          <p:nvPr/>
-        </p:nvSpPr>
-        <p:spPr>
-          <a:xfrm>
-            <a:off x="4033520" y="4754880"/>
-            <a:ext cx="2182008" cy="523220"/>
-          </a:xfrm>
-          <a:prstGeom prst="rect">
-            <a:avLst/>
-          </a:prstGeom>
-          <a:noFill/>
-        </p:spPr>
-        <p:txBody>
-          <a:bodyPr wrap="none" rtlCol="0">
-            <a:spAutoFit/>
-          </a:bodyPr>
-          <a:lstStyle/>
-          <a:p>
-            <a:r>
-              <a:rPr lang="ja-JP" altLang="en-US" sz="1400" dirty="0"/>
-              <a:t>No dependency checking needed</a:t>
-            </a:r>
-            <a:endParaRPr lang="en-US" altLang="ja-JP" sz="1400" dirty="0"/>
-          </a:p>
-          <a:p>
-            <a:r>
-              <a:rPr lang="ja-JP" altLang="en-US" sz="1400" dirty="0"/>
-              <a:t>-&gt; hardware becomes simpler</a:t>
-            </a:r>
-            <a:endParaRPr lang="en-US" altLang="ja-JP" sz="1400" dirty="0"/>
-          </a:p>
-        </p:txBody>
-      </p:sp>
-      <p:sp>
-        <p:nvSpPr>
-          <p:cNvPr id="40" name="テキスト ボックス 39">
-            <a:extLst>
-              <a:ext uri="{FF2B5EF4-FFF2-40B4-BE49-F238E27FC236}">
-                <a16:creationId xmlns:a16="http://schemas.microsoft.com/office/drawing/2014/main" id="{619B4112-04B8-6A4A-B1FF-8D311471595D}"/>
-              </a:ext>
-            </a:extLst>
-          </p:cNvPr>
-          <p:cNvSpPr txBox="1"/>
-          <p:nvPr/>
-        </p:nvSpPr>
-        <p:spPr>
-          <a:xfrm>
-            <a:off x="3972560" y="5709920"/>
-            <a:ext cx="2877711" cy="523220"/>
-          </a:xfrm>
-          <a:prstGeom prst="rect">
-            <a:avLst/>
-          </a:prstGeom>
-          <a:noFill/>
-        </p:spPr>
-        <p:txBody>
-          <a:bodyPr wrap="none" rtlCol="0">
-            <a:spAutoFit/>
-          </a:bodyPr>
-          <a:lstStyle/>
-          <a:p>
-            <a:r>
-              <a:rPr lang="ja-JP" altLang="en-US" sz="1400" b="1" dirty="0">
-                <a:solidFill>
-                  <a:srgbClr val="FF0000"/>
-                </a:solidFill>
-              </a:rPr>
-              <a:t>Requires a godlike smart compiler</a:t>
-            </a:r>
-            <a:endParaRPr lang="en-US" altLang="ja-JP" sz="1400" b="1" dirty="0">
-              <a:solidFill>
-                <a:srgbClr val="FF0000"/>
-              </a:solidFill>
-            </a:endParaRPr>
-          </a:p>
-          <a:p>
-            <a:r>
-              <a:rPr lang="ja-JP" altLang="en-US" sz="1400" b="1" dirty="0">
-                <a:solidFill>
-                  <a:srgbClr val="FF0000"/>
-                </a:solidFill>
-              </a:rPr>
-              <a:t>Loses backward compatibility</a:t>
-            </a:r>
-            <a:endParaRPr lang="en-US" altLang="ja-JP" sz="1400" b="1" dirty="0">
-              <a:solidFill>
-                <a:srgbClr val="FF0000"/>
-              </a:solidFill>
-            </a:endParaRPr>
-          </a:p>
-        </p:txBody>
-      </p:sp>
-      <p:pic>
-        <p:nvPicPr>
-          <p:cNvPr id="41" name="図 40">
-            <a:extLst>
-              <a:ext uri="{FF2B5EF4-FFF2-40B4-BE49-F238E27FC236}">
-                <a16:creationId xmlns:a16="http://schemas.microsoft.com/office/drawing/2014/main" id="{DA5E1897-A7AC-7B45-8042-51CA094DD61B}"/>
-              </a:ext>
-            </a:extLst>
-          </p:cNvPr>
-          <p:cNvPicPr>
-            <a:picLocks noChangeAspect="1"/>
-          </p:cNvPicPr>
-          <p:nvPr/>
-        </p:nvPicPr>
-        <p:blipFill>
-          <a:blip r:embed="rId2"/>
-          <a:stretch>
-            <a:fillRect/>
-          </a:stretch>
-        </p:blipFill>
-        <p:spPr>
-          <a:xfrm>
-            <a:off x="228600" y="4685664"/>
-            <a:ext cx="584200" cy="569595"/>
-          </a:xfrm>
-          <a:prstGeom prst="rect">
-            <a:avLst/>
-          </a:prstGeom>
-        </p:spPr>
-      </p:pic>
-      <p:pic>
-        <p:nvPicPr>
-          <p:cNvPr id="42" name="図 41">
-            <a:extLst>
-              <a:ext uri="{FF2B5EF4-FFF2-40B4-BE49-F238E27FC236}">
-                <a16:creationId xmlns:a16="http://schemas.microsoft.com/office/drawing/2014/main" id="{14495E7E-AF7B-FA43-A775-B4EB3900A69B}"/>
-              </a:ext>
-            </a:extLst>
-          </p:cNvPr>
-          <p:cNvPicPr>
-            <a:picLocks noChangeAspect="1"/>
-          </p:cNvPicPr>
-          <p:nvPr/>
-        </p:nvPicPr>
-        <p:blipFill>
-          <a:blip r:embed="rId3"/>
-          <a:stretch>
-            <a:fillRect/>
-          </a:stretch>
-        </p:blipFill>
-        <p:spPr>
-          <a:xfrm>
-            <a:off x="228600" y="5679439"/>
-            <a:ext cx="584200" cy="569595"/>
-          </a:xfrm>
-          <a:prstGeom prst="rect">
-            <a:avLst/>
-          </a:prstGeom>
-        </p:spPr>
-      </p:pic>
-      <p:sp>
-        <p:nvSpPr>
-          <p:cNvPr id="43" name="角丸四角形 42">
-            <a:extLst>
-              <a:ext uri="{FF2B5EF4-FFF2-40B4-BE49-F238E27FC236}">
-                <a16:creationId xmlns:a16="http://schemas.microsoft.com/office/drawing/2014/main" id="{B3C4FBC2-DA56-F143-B1DA-6D2B7ADF7FDF}"/>
-              </a:ext>
-            </a:extLst>
-          </p:cNvPr>
-          <p:cNvSpPr/>
-          <p:nvPr/>
-        </p:nvSpPr>
-        <p:spPr>
-          <a:xfrm>
-            <a:off x="8615680" y="1764555"/>
-            <a:ext cx="995680" cy="1131045"/>
-          </a:xfrm>
-          <a:prstGeom prst="roundRect">
-            <a:avLst/>
-          </a:prstGeom>
-          <a:noFill/>
-          <a:ln>
-            <a:solidFill>
-              <a:schemeClr val="tx1"/>
-            </a:solidFill>
-          </a:ln>
-          <a:effectLst/>
-        </p:spPr>
-        <p:style>
-          <a:lnRef idx="1">
-            <a:schemeClr val="accent1"/>
-          </a:lnRef>
-          <a:fillRef idx="3">
-            <a:schemeClr val="accent1"/>
-          </a:fillRef>
-          <a:effectRef idx="2">
-            <a:schemeClr val="accent1"/>
-          </a:effectRef>
-          <a:fontRef idx="minor">
-            <a:schemeClr val="lt1"/>
-          </a:fontRef>
-        </p:style>
-        <p:txBody>
-          <a:bodyPr rtlCol="0" anchor="ctr"/>
-          <a:lstStyle/>
-          <a:p>
-            <a:pPr algn="ctr"/>
-            <a:r>
-              <a:rPr kumimoji="1" lang="ja-JP" altLang="en-US" sz="1400" dirty="0">
-                <a:solidFill>
-                  <a:schemeClr val="tx1"/>
-                </a:solidFill>
-              </a:rPr>
-              <a:t>Execution</a:t>
-            </a:r>
-            <a:endParaRPr kumimoji="1" lang="en-US" altLang="ja-JP" sz="1400" dirty="0">
-              <a:solidFill>
-                <a:schemeClr val="tx1"/>
-              </a:solidFill>
-            </a:endParaRPr>
-          </a:p>
-          <a:p>
-            <a:pPr algn="ctr"/>
-            <a:r>
-              <a:rPr kumimoji="1" lang="ja-JP" altLang="en-US" sz="1400" dirty="0">
-                <a:solidFill>
-                  <a:schemeClr val="tx1"/>
-                </a:solidFill>
-              </a:rPr>
-              <a:t>unit</a:t>
-            </a:r>
-            <a:endParaRPr kumimoji="1" lang="en-US" altLang="ja-JP" sz="1400" dirty="0">
-              <a:solidFill>
-                <a:schemeClr val="tx1"/>
-              </a:solidFill>
-            </a:endParaRPr>
-          </a:p>
-        </p:txBody>
-      </p:sp>
-      <p:pic>
-        <p:nvPicPr>
-          <p:cNvPr id="44" name="図 43">
-            <a:extLst>
-              <a:ext uri="{FF2B5EF4-FFF2-40B4-BE49-F238E27FC236}">
-                <a16:creationId xmlns:a16="http://schemas.microsoft.com/office/drawing/2014/main" id="{0645FA37-29FC-1D42-8341-F8CDB403614F}"/>
-              </a:ext>
-            </a:extLst>
-          </p:cNvPr>
-          <p:cNvPicPr>
-            <a:picLocks noChangeAspect="1"/>
-          </p:cNvPicPr>
-          <p:nvPr/>
-        </p:nvPicPr>
-        <p:blipFill>
-          <a:blip r:embed="rId2"/>
-          <a:stretch>
-            <a:fillRect/>
-          </a:stretch>
-        </p:blipFill>
-        <p:spPr>
-          <a:xfrm>
-            <a:off x="7056120" y="4665344"/>
-            <a:ext cx="584200" cy="569595"/>
-          </a:xfrm>
-          <a:prstGeom prst="rect">
-            <a:avLst/>
-          </a:prstGeom>
-        </p:spPr>
-      </p:pic>
-      <p:pic>
-        <p:nvPicPr>
-          <p:cNvPr id="45" name="図 44">
-            <a:extLst>
-              <a:ext uri="{FF2B5EF4-FFF2-40B4-BE49-F238E27FC236}">
-                <a16:creationId xmlns:a16="http://schemas.microsoft.com/office/drawing/2014/main" id="{EF4CF261-ABE1-E34D-A846-AC6F9A9BC9A2}"/>
-              </a:ext>
-            </a:extLst>
-          </p:cNvPr>
-          <p:cNvPicPr>
-            <a:picLocks noChangeAspect="1"/>
-          </p:cNvPicPr>
-          <p:nvPr/>
-        </p:nvPicPr>
-        <p:blipFill>
-          <a:blip r:embed="rId3"/>
-          <a:stretch>
-            <a:fillRect/>
-          </a:stretch>
-        </p:blipFill>
-        <p:spPr>
-          <a:xfrm>
-            <a:off x="7056120" y="5628639"/>
-            <a:ext cx="584200" cy="569595"/>
-          </a:xfrm>
-          <a:prstGeom prst="rect">
-            <a:avLst/>
-          </a:prstGeom>
-        </p:spPr>
-      </p:pic>
-      <p:sp>
-        <p:nvSpPr>
-          <p:cNvPr id="46" name="テキスト ボックス 45">
-            <a:extLst>
-              <a:ext uri="{FF2B5EF4-FFF2-40B4-BE49-F238E27FC236}">
-                <a16:creationId xmlns:a16="http://schemas.microsoft.com/office/drawing/2014/main" id="{3F5420BD-5D08-A84F-9B46-56EA80905771}"/>
-              </a:ext>
-            </a:extLst>
-          </p:cNvPr>
-          <p:cNvSpPr txBox="1"/>
-          <p:nvPr/>
-        </p:nvSpPr>
-        <p:spPr>
-          <a:xfrm>
-            <a:off x="7680960" y="4693920"/>
-            <a:ext cx="1800493" cy="523220"/>
-          </a:xfrm>
-          <a:prstGeom prst="rect">
-            <a:avLst/>
-          </a:prstGeom>
-          <a:noFill/>
-        </p:spPr>
-        <p:txBody>
-          <a:bodyPr wrap="none" rtlCol="0">
-            <a:spAutoFit/>
-          </a:bodyPr>
-          <a:lstStyle/>
-          <a:p>
-            <a:r>
-              <a:rPr lang="ja-JP" altLang="en-US" sz="1400" dirty="0"/>
-              <a:t>Hardware is simple</a:t>
-            </a:r>
-            <a:endParaRPr lang="en-US" altLang="ja-JP" sz="1400" dirty="0"/>
-          </a:p>
-          <a:p>
-            <a:r>
-              <a:rPr lang="ja-JP" altLang="en-US" sz="1400" dirty="0"/>
-              <a:t>Backward compatibility is preserved</a:t>
-            </a:r>
-            <a:endParaRPr lang="en-US" altLang="ja-JP" sz="1400" dirty="0"/>
-          </a:p>
-        </p:txBody>
-      </p:sp>
-      <p:sp>
-        <p:nvSpPr>
-          <p:cNvPr id="47" name="テキスト ボックス 46">
-            <a:extLst>
-              <a:ext uri="{FF2B5EF4-FFF2-40B4-BE49-F238E27FC236}">
-                <a16:creationId xmlns:a16="http://schemas.microsoft.com/office/drawing/2014/main" id="{FC96BEA1-A0AB-E141-BA29-6C73475B4D56}"/>
-              </a:ext>
-            </a:extLst>
-          </p:cNvPr>
-          <p:cNvSpPr txBox="1"/>
-          <p:nvPr/>
-        </p:nvSpPr>
-        <p:spPr>
-          <a:xfrm>
-            <a:off x="7660640" y="5750560"/>
-            <a:ext cx="1620957" cy="307777"/>
-          </a:xfrm>
-          <a:prstGeom prst="rect">
-            <a:avLst/>
-          </a:prstGeom>
-          <a:noFill/>
-        </p:spPr>
-        <p:txBody>
-          <a:bodyPr wrap="none" rtlCol="0">
-            <a:spAutoFit/>
-          </a:bodyPr>
-          <a:lstStyle/>
-          <a:p>
-            <a:r>
-              <a:rPr lang="ja-JP" altLang="en-US" sz="1400" b="1" dirty="0">
-                <a:solidFill>
-                  <a:srgbClr val="FF0000"/>
-                </a:solidFill>
-              </a:rPr>
-              <a:t>Programming is hard</a:t>
-            </a:r>
-            <a:endParaRPr kumimoji="1" lang="ja-JP" altLang="en-US" sz="1400" b="1">
-              <a:solidFill>
-                <a:srgbClr val="FF0000"/>
-              </a:solidFill>
-            </a:endParaRPr>
-          </a:p>
-        </p:txBody>
-      </p:sp>
-      <p:sp>
-        <p:nvSpPr>
-          <p:cNvPr id="48" name="正方形/長方形 47">
-            <a:extLst>
-              <a:ext uri="{FF2B5EF4-FFF2-40B4-BE49-F238E27FC236}">
-                <a16:creationId xmlns:a16="http://schemas.microsoft.com/office/drawing/2014/main" id="{9BE190D6-416D-4A4C-9CCC-EF2644F17F38}"/>
-              </a:ext>
-            </a:extLst>
-          </p:cNvPr>
-          <p:cNvSpPr/>
-          <p:nvPr/>
-        </p:nvSpPr>
-        <p:spPr>
-          <a:xfrm>
-            <a:off x="7447280" y="1793240"/>
-            <a:ext cx="533400" cy="1021080"/>
-          </a:xfrm>
-          <a:prstGeom prst="rect">
-            <a:avLst/>
-          </a:prstGeom>
-          <a:solidFill>
-            <a:schemeClr val="bg1"/>
-          </a:solidFill>
-          <a:ln>
-            <a:solidFill>
-              <a:schemeClr val="tx1"/>
-            </a:solidFill>
-          </a:ln>
-          <a:effectLst/>
-        </p:spPr>
-        <p:style>
-          <a:lnRef idx="1">
-            <a:schemeClr val="accent1"/>
-          </a:lnRef>
-          <a:fillRef idx="3">
-            <a:schemeClr val="accent1"/>
-          </a:fillRef>
-          <a:effectRef idx="2">
-            <a:schemeClr val="accent1"/>
-          </a:effectRef>
-          <a:fontRef idx="minor">
-            <a:schemeClr val="lt1"/>
-          </a:fontRef>
-        </p:style>
-        <p:txBody>
-          <a:bodyPr rtlCol="0" anchor="ctr"/>
-          <a:lstStyle/>
-          <a:p>
-            <a:pPr algn="ctr"/>
-            <a:endParaRPr kumimoji="1" lang="ja-JP" altLang="en-US" sz="1000" dirty="0">
-              <a:solidFill>
-                <a:schemeClr val="tx1"/>
-              </a:solidFill>
-            </a:endParaRPr>
-          </a:p>
-        </p:txBody>
-      </p:sp>
-      <p:cxnSp>
-        <p:nvCxnSpPr>
-          <p:cNvPr id="51" name="直線コネクタ 50">
-            <a:extLst>
-              <a:ext uri="{FF2B5EF4-FFF2-40B4-BE49-F238E27FC236}">
-                <a16:creationId xmlns:a16="http://schemas.microsoft.com/office/drawing/2014/main" id="{4DC1D1CF-CE23-534F-AE30-1416B58E2127}"/>
-              </a:ext>
-            </a:extLst>
-          </p:cNvPr>
-          <p:cNvCxnSpPr>
-            <a:stCxn id="43" idx="1"/>
-            <a:endCxn id="43" idx="3"/>
-          </p:cNvCxnSpPr>
-          <p:nvPr/>
-        </p:nvCxnSpPr>
-        <p:spPr>
-          <a:xfrm>
-            <a:off x="8615680" y="2330078"/>
-            <a:ext cx="995680" cy="0"/>
-          </a:xfrm>
-          <a:prstGeom prst="line">
-            <a:avLst/>
-          </a:prstGeom>
-          <a:ln w="12700">
-            <a:solidFill>
-              <a:schemeClr val="tx1"/>
-            </a:solidFill>
-            <a:prstDash val="sysDash"/>
-          </a:ln>
-        </p:spPr>
-        <p:style>
-          <a:lnRef idx="1">
-            <a:schemeClr val="accent1"/>
-          </a:lnRef>
-          <a:fillRef idx="0">
-            <a:schemeClr val="accent1"/>
-          </a:fillRef>
-          <a:effectRef idx="0">
-            <a:schemeClr val="accent1"/>
-          </a:effectRef>
-          <a:fontRef idx="minor">
-            <a:schemeClr val="tx1"/>
-          </a:fontRef>
-        </p:style>
-      </p:cxnSp>
-      <p:sp>
-        <p:nvSpPr>
-          <p:cNvPr id="52" name="正方形/長方形 51">
-            <a:extLst>
-              <a:ext uri="{FF2B5EF4-FFF2-40B4-BE49-F238E27FC236}">
-                <a16:creationId xmlns:a16="http://schemas.microsoft.com/office/drawing/2014/main" id="{3D4B4BE7-7C3B-3241-9969-1E74C0CF1B5E}"/>
-              </a:ext>
-            </a:extLst>
-          </p:cNvPr>
-          <p:cNvSpPr/>
-          <p:nvPr/>
-        </p:nvSpPr>
-        <p:spPr>
-          <a:xfrm>
-            <a:off x="1493520" y="1630680"/>
-            <a:ext cx="533400" cy="457200"/>
-          </a:xfrm>
-          <a:prstGeom prst="rect">
-            <a:avLst/>
-          </a:prstGeom>
-          <a:solidFill>
-            <a:schemeClr val="bg1"/>
-          </a:solidFill>
-          <a:ln>
-            <a:solidFill>
-              <a:schemeClr val="tx1"/>
-            </a:solidFill>
-          </a:ln>
-          <a:effectLst/>
-        </p:spPr>
-        <p:style>
-          <a:lnRef idx="1">
-            <a:schemeClr val="accent1"/>
-          </a:lnRef>
-          <a:fillRef idx="3">
-            <a:schemeClr val="accent1"/>
-          </a:fillRef>
-          <a:effectRef idx="2">
-            <a:schemeClr val="accent1"/>
-          </a:effectRef>
-          <a:fontRef idx="minor">
-            <a:schemeClr val="lt1"/>
-          </a:fontRef>
-        </p:style>
-        <p:txBody>
-          <a:bodyPr rtlCol="0" anchor="ctr"/>
-          <a:lstStyle/>
-          <a:p>
-            <a:pPr algn="ctr"/>
-            <a:r>
-              <a:rPr kumimoji="1" lang="ja-JP" altLang="en-US" sz="1000" dirty="0">
-                <a:solidFill>
-                  <a:schemeClr val="tx1"/>
-                </a:solidFill>
-              </a:rPr>
-              <a:t>Instruction A</a:t>
-            </a:r>
-            <a:endParaRPr kumimoji="1" lang="ja-JP" altLang="en-US" sz="1000" dirty="0">
-              <a:solidFill>
-                <a:schemeClr val="tx1"/>
-              </a:solidFill>
-            </a:endParaRPr>
-          </a:p>
-        </p:txBody>
-      </p:sp>
-      <p:sp>
-        <p:nvSpPr>
-          <p:cNvPr id="53" name="正方形/長方形 52">
-            <a:extLst>
-              <a:ext uri="{FF2B5EF4-FFF2-40B4-BE49-F238E27FC236}">
-                <a16:creationId xmlns:a16="http://schemas.microsoft.com/office/drawing/2014/main" id="{34ECD519-ED67-9C4A-BC76-0C521D1FC110}"/>
-              </a:ext>
-            </a:extLst>
-          </p:cNvPr>
-          <p:cNvSpPr/>
-          <p:nvPr/>
-        </p:nvSpPr>
-        <p:spPr>
-          <a:xfrm>
-            <a:off x="1513840" y="2931160"/>
-            <a:ext cx="533400" cy="457200"/>
-          </a:xfrm>
-          <a:prstGeom prst="rect">
-            <a:avLst/>
-          </a:prstGeom>
-          <a:solidFill>
-            <a:schemeClr val="bg1"/>
-          </a:solidFill>
-          <a:ln>
-            <a:solidFill>
-              <a:schemeClr val="tx1"/>
-            </a:solidFill>
-          </a:ln>
-          <a:effectLst/>
-        </p:spPr>
-        <p:style>
-          <a:lnRef idx="1">
-            <a:schemeClr val="accent1"/>
-          </a:lnRef>
-          <a:fillRef idx="3">
-            <a:schemeClr val="accent1"/>
-          </a:fillRef>
-          <a:effectRef idx="2">
-            <a:schemeClr val="accent1"/>
-          </a:effectRef>
-          <a:fontRef idx="minor">
-            <a:schemeClr val="lt1"/>
-          </a:fontRef>
-        </p:style>
-        <p:txBody>
-          <a:bodyPr rtlCol="0" anchor="ctr"/>
-          <a:lstStyle/>
-          <a:p>
-            <a:pPr algn="ctr"/>
-            <a:r>
-              <a:rPr kumimoji="1" lang="ja-JP" altLang="en-US" sz="1000" dirty="0">
-                <a:solidFill>
-                  <a:schemeClr val="tx1"/>
-                </a:solidFill>
-              </a:rPr>
-              <a:t>Instruction B</a:t>
-            </a:r>
-            <a:endParaRPr kumimoji="1" lang="ja-JP" altLang="en-US" sz="1000" dirty="0">
-              <a:solidFill>
-                <a:schemeClr val="tx1"/>
-              </a:solidFill>
-            </a:endParaRPr>
-          </a:p>
-        </p:txBody>
-      </p:sp>
-      <p:sp>
-        <p:nvSpPr>
-          <p:cNvPr id="54" name="テキスト ボックス 53">
-            <a:extLst>
-              <a:ext uri="{FF2B5EF4-FFF2-40B4-BE49-F238E27FC236}">
-                <a16:creationId xmlns:a16="http://schemas.microsoft.com/office/drawing/2014/main" id="{1D1DB946-7D3D-0849-AEC2-0094801815E2}"/>
-              </a:ext>
-            </a:extLst>
-          </p:cNvPr>
-          <p:cNvSpPr txBox="1"/>
-          <p:nvPr/>
-        </p:nvSpPr>
-        <p:spPr>
-          <a:xfrm>
-            <a:off x="528320" y="3606800"/>
-            <a:ext cx="2339102" cy="523220"/>
-          </a:xfrm>
-          <a:prstGeom prst="rect">
-            <a:avLst/>
-          </a:prstGeom>
-          <a:noFill/>
-        </p:spPr>
-        <p:txBody>
-          <a:bodyPr wrap="none" rtlCol="0">
-            <a:spAutoFit/>
-          </a:bodyPr>
-          <a:lstStyle/>
-          <a:p>
-            <a:r>
-              <a:rPr kumimoji="1" lang="ja-JP" altLang="en-US" sz="1400"/>
-              <a:t>Fetch multiple instructions,</a:t>
-            </a:r>
-            <a:endParaRPr kumimoji="1" lang="en-US" altLang="ja-JP" sz="1400"/>
-          </a:p>
-          <a:p>
-            <a:r>
-              <a:rPr kumimoji="1" lang="ja-JP" altLang="en-US" sz="1400"/>
-              <a:t>and the scheduler dispatches them</a:t>
-            </a:r>
-            <a:endParaRPr kumimoji="1" lang="en-US" altLang="ja-JP" sz="1400"/>
-          </a:p>
-        </p:txBody>
-      </p:sp>
-      <p:sp>
-        <p:nvSpPr>
-          <p:cNvPr id="55" name="テキスト ボックス 54">
-            <a:extLst>
-              <a:ext uri="{FF2B5EF4-FFF2-40B4-BE49-F238E27FC236}">
-                <a16:creationId xmlns:a16="http://schemas.microsoft.com/office/drawing/2014/main" id="{AA60636D-7C18-9A41-8E82-5E021712D277}"/>
-              </a:ext>
-            </a:extLst>
-          </p:cNvPr>
-          <p:cNvSpPr txBox="1"/>
-          <p:nvPr/>
-        </p:nvSpPr>
-        <p:spPr>
-          <a:xfrm>
-            <a:off x="3749040" y="3596640"/>
-            <a:ext cx="2518638" cy="523220"/>
-          </a:xfrm>
-          <a:prstGeom prst="rect">
-            <a:avLst/>
-          </a:prstGeom>
-          <a:noFill/>
-        </p:spPr>
-        <p:txBody>
-          <a:bodyPr wrap="none" rtlCol="0">
-            <a:spAutoFit/>
-          </a:bodyPr>
-          <a:lstStyle/>
-          <a:p>
-            <a:r>
-              <a:rPr lang="ja-JP" altLang="en-US" sz="1400"/>
-              <a:t>Bundle instructions that can run in parallel</a:t>
-            </a:r>
-            <a:endParaRPr kumimoji="1" lang="en-US" altLang="ja-JP" sz="1400"/>
-          </a:p>
-          <a:p>
-            <a:r>
-              <a:rPr lang="ja-JP" altLang="en-US" sz="1400"/>
-              <a:t>into one instruction in advance</a:t>
-            </a:r>
-            <a:endParaRPr kumimoji="1" lang="en-US" altLang="ja-JP" sz="1400"/>
-          </a:p>
-        </p:txBody>
-      </p:sp>
-      <p:cxnSp>
-        <p:nvCxnSpPr>
-          <p:cNvPr id="56" name="直線コネクタ 55">
-            <a:extLst>
-              <a:ext uri="{FF2B5EF4-FFF2-40B4-BE49-F238E27FC236}">
-                <a16:creationId xmlns:a16="http://schemas.microsoft.com/office/drawing/2014/main" id="{EC5146C0-9DB4-7E46-B352-AE6E99971C38}"/>
-              </a:ext>
-            </a:extLst>
-          </p:cNvPr>
-          <p:cNvCxnSpPr>
-            <a:cxnSpLocks/>
-            <a:stCxn id="48" idx="1"/>
-            <a:endCxn id="48" idx="3"/>
-          </p:cNvCxnSpPr>
-          <p:nvPr/>
-        </p:nvCxnSpPr>
-        <p:spPr>
-          <a:xfrm>
-            <a:off x="7447280" y="2303780"/>
-            <a:ext cx="533400" cy="0"/>
-          </a:xfrm>
-          <a:prstGeom prst="line">
-            <a:avLst/>
-          </a:prstGeom>
-          <a:ln w="12700">
-            <a:solidFill>
-              <a:schemeClr val="tx1"/>
-            </a:solidFill>
-            <a:prstDash val="sysDash"/>
-          </a:ln>
-        </p:spPr>
-        <p:style>
-          <a:lnRef idx="1">
-            <a:schemeClr val="accent1"/>
-          </a:lnRef>
-          <a:fillRef idx="0">
-            <a:schemeClr val="accent1"/>
-          </a:fillRef>
-          <a:effectRef idx="0">
-            <a:schemeClr val="accent1"/>
-          </a:effectRef>
-          <a:fontRef idx="minor">
-            <a:schemeClr val="tx1"/>
-          </a:fontRef>
-        </p:style>
-      </p:cxnSp>
-      <p:sp>
-        <p:nvSpPr>
-          <p:cNvPr id="59" name="テキスト ボックス 58">
-            <a:extLst>
-              <a:ext uri="{FF2B5EF4-FFF2-40B4-BE49-F238E27FC236}">
-                <a16:creationId xmlns:a16="http://schemas.microsoft.com/office/drawing/2014/main" id="{DCF15125-6D0F-514F-B858-4219162C6030}"/>
-              </a:ext>
-            </a:extLst>
-          </p:cNvPr>
-          <p:cNvSpPr txBox="1"/>
-          <p:nvPr/>
-        </p:nvSpPr>
-        <p:spPr>
-          <a:xfrm>
-            <a:off x="7386320" y="1930400"/>
-            <a:ext cx="643125" cy="246221"/>
-          </a:xfrm>
-          <a:prstGeom prst="rect">
-            <a:avLst/>
-          </a:prstGeom>
-          <a:noFill/>
-        </p:spPr>
-        <p:txBody>
-          <a:bodyPr wrap="none" rtlCol="0">
-            <a:spAutoFit/>
-          </a:bodyPr>
-          <a:lstStyle/>
-          <a:p>
-            <a:r>
-              <a:rPr lang="ja-JP" altLang="en-US" sz="1000"/>
-              <a:t>Data A</a:t>
-            </a:r>
-            <a:endParaRPr kumimoji="1" lang="ja-JP" altLang="en-US" sz="1000"/>
-          </a:p>
-        </p:txBody>
-      </p:sp>
-      <p:sp>
-        <p:nvSpPr>
-          <p:cNvPr id="60" name="テキスト ボックス 59">
-            <a:extLst>
-              <a:ext uri="{FF2B5EF4-FFF2-40B4-BE49-F238E27FC236}">
-                <a16:creationId xmlns:a16="http://schemas.microsoft.com/office/drawing/2014/main" id="{370B314B-33A5-6B41-919E-A5F0BF492BC3}"/>
-              </a:ext>
-            </a:extLst>
-          </p:cNvPr>
-          <p:cNvSpPr txBox="1"/>
-          <p:nvPr/>
-        </p:nvSpPr>
-        <p:spPr>
-          <a:xfrm>
-            <a:off x="7406640" y="2428240"/>
-            <a:ext cx="643125" cy="246221"/>
-          </a:xfrm>
-          <a:prstGeom prst="rect">
-            <a:avLst/>
-          </a:prstGeom>
-          <a:noFill/>
-        </p:spPr>
-        <p:txBody>
-          <a:bodyPr wrap="none" rtlCol="0">
-            <a:spAutoFit/>
-          </a:bodyPr>
-          <a:lstStyle/>
-          <a:p>
-            <a:r>
-              <a:rPr lang="ja-JP" altLang="en-US" sz="1000"/>
-              <a:t>Data B</a:t>
-            </a:r>
-            <a:endParaRPr kumimoji="1" lang="ja-JP" altLang="en-US" sz="1000"/>
-          </a:p>
-        </p:txBody>
-      </p:sp>
-      <p:sp>
-        <p:nvSpPr>
-          <p:cNvPr id="61" name="角丸四角形 60">
-            <a:extLst>
-              <a:ext uri="{FF2B5EF4-FFF2-40B4-BE49-F238E27FC236}">
-                <a16:creationId xmlns:a16="http://schemas.microsoft.com/office/drawing/2014/main" id="{C6F9AECB-E783-C84E-866C-6E20BEF09226}"/>
-              </a:ext>
-            </a:extLst>
-          </p:cNvPr>
-          <p:cNvSpPr/>
-          <p:nvPr/>
-        </p:nvSpPr>
-        <p:spPr>
-          <a:xfrm>
-            <a:off x="7376160" y="1706880"/>
-            <a:ext cx="690880" cy="1229360"/>
-          </a:xfrm>
-          <a:prstGeom prst="roundRect">
-            <a:avLst/>
-          </a:prstGeom>
-          <a:noFill/>
-          <a:ln w="38100">
-            <a:solidFill>
-              <a:schemeClr val="tx1"/>
-            </a:solidFill>
-            <a:prstDash val="sysDash"/>
-          </a:ln>
-        </p:spPr>
-        <p:style>
-          <a:lnRef idx="2">
-            <a:schemeClr val="accent1">
-              <a:shade val="50000"/>
-            </a:schemeClr>
-          </a:lnRef>
-          <a:fillRef idx="1">
-            <a:schemeClr val="accent1"/>
-          </a:fillRef>
-          <a:effectRef idx="0">
-            <a:schemeClr val="accent1"/>
-          </a:effectRef>
-          <a:fontRef idx="minor">
-            <a:schemeClr val="lt1"/>
-          </a:fontRef>
-        </p:style>
-        <p:txBody>
-          <a:bodyPr rtlCol="0" anchor="ctr"/>
-          <a:lstStyle/>
-          <a:p>
-            <a:pPr algn="ctr"/>
-            <a:endParaRPr kumimoji="1" lang="ja-JP" altLang="en-US"/>
-          </a:p>
-        </p:txBody>
-      </p:sp>
-      <p:sp>
-        <p:nvSpPr>
-          <p:cNvPr id="62" name="テキスト ボックス 61">
-            <a:extLst>
-              <a:ext uri="{FF2B5EF4-FFF2-40B4-BE49-F238E27FC236}">
-                <a16:creationId xmlns:a16="http://schemas.microsoft.com/office/drawing/2014/main" id="{B0F9939C-CF93-E041-9434-8467EB4A0B8A}"/>
-              </a:ext>
-            </a:extLst>
-          </p:cNvPr>
-          <p:cNvSpPr txBox="1"/>
-          <p:nvPr/>
-        </p:nvSpPr>
-        <p:spPr>
-          <a:xfrm>
-            <a:off x="7294880" y="1391920"/>
-            <a:ext cx="748923" cy="253916"/>
-          </a:xfrm>
-          <a:prstGeom prst="rect">
-            <a:avLst/>
-          </a:prstGeom>
-          <a:noFill/>
-        </p:spPr>
-        <p:txBody>
-          <a:bodyPr wrap="none" rtlCol="0">
-            <a:spAutoFit/>
-          </a:bodyPr>
-          <a:lstStyle/>
-          <a:p>
-            <a:r>
-              <a:rPr kumimoji="1" lang="en-US" altLang="ja-JP" sz="1050"/>
-              <a:t>SIMD instruction</a:t>
-            </a:r>
-          </a:p>
-        </p:txBody>
-      </p:sp>
-      <p:sp>
-        <p:nvSpPr>
-          <p:cNvPr id="63" name="テキスト ボックス 62">
-            <a:extLst>
-              <a:ext uri="{FF2B5EF4-FFF2-40B4-BE49-F238E27FC236}">
-                <a16:creationId xmlns:a16="http://schemas.microsoft.com/office/drawing/2014/main" id="{F77A8080-ED24-CC4A-A38F-1265BDC2EF78}"/>
-              </a:ext>
-            </a:extLst>
-          </p:cNvPr>
-          <p:cNvSpPr txBox="1"/>
-          <p:nvPr/>
-        </p:nvSpPr>
-        <p:spPr>
-          <a:xfrm>
-            <a:off x="7051040" y="3556000"/>
-            <a:ext cx="2339102" cy="523220"/>
-          </a:xfrm>
-          <a:prstGeom prst="rect">
-            <a:avLst/>
-          </a:prstGeom>
-          <a:noFill/>
-        </p:spPr>
-        <p:txBody>
-          <a:bodyPr wrap="none" rtlCol="0">
-            <a:spAutoFit/>
-          </a:bodyPr>
-          <a:lstStyle/>
-          <a:p>
-            <a:r>
-              <a:rPr lang="ja-JP" altLang="en-US" sz="1400"/>
-              <a:t>Apply the same operation to multiple data items</a:t>
-            </a:r>
-            <a:endParaRPr lang="en-US" altLang="ja-JP" sz="1400"/>
-          </a:p>
-          <a:p>
-            <a:r>
-              <a:rPr lang="ja-JP" altLang="en-US" sz="1400"/>
-              <a:t>at once</a:t>
-            </a:r>
-            <a:endParaRPr lang="en-US" altLang="ja-JP" sz="1400"/>
-          </a:p>
-        </p:txBody>
-      </p:sp>
-      <p:cxnSp>
-        <p:nvCxnSpPr>
-          <p:cNvPr id="64" name="直線矢印コネクタ 63">
-            <a:extLst>
-              <a:ext uri="{FF2B5EF4-FFF2-40B4-BE49-F238E27FC236}">
-                <a16:creationId xmlns:a16="http://schemas.microsoft.com/office/drawing/2014/main" id="{2B0F8F8E-F928-0546-B6D3-0A74B33ED8F7}"/>
-              </a:ext>
-            </a:extLst>
-          </p:cNvPr>
-          <p:cNvCxnSpPr>
-            <a:cxnSpLocks/>
-          </p:cNvCxnSpPr>
-          <p:nvPr/>
-        </p:nvCxnSpPr>
-        <p:spPr>
-          <a:xfrm>
-            <a:off x="8097520" y="2311699"/>
-            <a:ext cx="529226" cy="0"/>
-          </a:xfrm>
-          <a:prstGeom prst="straightConnector1">
-            <a:avLst/>
-          </a:prstGeom>
-          <a:ln w="19050">
-            <a:solidFill>
-              <a:srgbClr val="FF0000"/>
-            </a:solidFill>
-            <a:tailEnd type="triangle"/>
-          </a:ln>
-        </p:spPr>
-        <p:style>
-          <a:lnRef idx="1">
-            <a:schemeClr val="accent1"/>
-          </a:lnRef>
-          <a:fillRef idx="0">
-            <a:schemeClr val="accent1"/>
-          </a:fillRef>
-          <a:effectRef idx="0">
-            <a:schemeClr val="accent1"/>
-          </a:effectRef>
-          <a:fontRef idx="minor">
-            <a:schemeClr val="tx1"/>
-          </a:fontRef>
-        </p:style>
-      </p:cxnSp>
-    </p:spTree>
-    <p:extLst>
-      <p:ext uri="{BB962C8B-B14F-4D97-AF65-F5344CB8AC3E}">
-        <p14:creationId xmlns:p14="http://schemas.microsoft.com/office/powerpoint/2010/main" val="2598289568"/>
-      </p:ext>
-    </p:extLst>
-  </p:cSld>
-  <p:clrMapOvr>
-    <a:masterClrMapping/>
-  </p:clrMapOvr>
-</p:sld>
-</file>
-
-<file path=ppt/slides/slide5.xml><?xml version="1.0" encoding="utf-8"?>
-<p:sld xmlns:a="http://schemas.openxmlformats.org/drawingml/2006/main" xmlns:r="http://schemas.openxmlformats.org/officeDocument/2006/relationships" xmlns:p="http://schemas.openxmlformats.org/presentationml/2006/main">
-  <p:cSld>
-    <p:spTree>
-      <p:nvGrpSpPr>
-        <p:cNvPr id="1" name=""/>
-        <p:cNvGrpSpPr/>
-        <p:nvPr/>
-      </p:nvGrpSpPr>
-      <p:grpSpPr>
-        <a:xfrm>
-          <a:off x="0" y="0"/>
-          <a:ext cx="0" cy="0"/>
-          <a:chOff x="0" y="0"/>
-          <a:chExt cx="0" cy="0"/>
-        </a:xfrm>
-      </p:grpSpPr>
-      <p:sp>
-        <p:nvSpPr>
-          <p:cNvPr id="2" name="正方形/長方形 1">
-            <a:extLst>
-              <a:ext uri="{FF2B5EF4-FFF2-40B4-BE49-F238E27FC236}">
-                <a16:creationId xmlns:a16="http://schemas.microsoft.com/office/drawing/2014/main" id="{47CC05BB-0392-D84B-A861-05329F5A211C}"/>
-              </a:ext>
-            </a:extLst>
-          </p:cNvPr>
-          <p:cNvSpPr/>
-          <p:nvPr/>
-        </p:nvSpPr>
-        <p:spPr>
-          <a:xfrm>
-            <a:off x="1136576" y="1556792"/>
-            <a:ext cx="504056" cy="504056"/>
-          </a:xfrm>
-          <a:prstGeom prst="rect">
-            <a:avLst/>
-          </a:prstGeom>
-          <a:noFill/>
-          <a:ln>
-            <a:solidFill>
-              <a:schemeClr val="tx1"/>
-            </a:solidFill>
-          </a:ln>
-        </p:spPr>
-        <p:style>
-          <a:lnRef idx="2">
-            <a:schemeClr val="accent1">
-              <a:shade val="50000"/>
-            </a:schemeClr>
-          </a:lnRef>
-          <a:fillRef idx="1">
-            <a:schemeClr val="accent1"/>
-          </a:fillRef>
-          <a:effectRef idx="0">
-            <a:schemeClr val="accent1"/>
-          </a:effectRef>
-          <a:fontRef idx="minor">
-            <a:schemeClr val="lt1"/>
-          </a:fontRef>
-        </p:style>
-        <p:txBody>
-          <a:bodyPr rtlCol="0" anchor="ctr"/>
-          <a:lstStyle/>
-          <a:p>
-            <a:pPr algn="ctr"/>
-            <a:endParaRPr kumimoji="1" lang="ja-JP" altLang="en-US">
-              <a:solidFill>
-                <a:schemeClr val="tx1"/>
-              </a:solidFill>
-            </a:endParaRPr>
-          </a:p>
-        </p:txBody>
-      </p:sp>
-      <p:sp>
-        <p:nvSpPr>
-          <p:cNvPr id="3" name="正方形/長方形 2">
-            <a:extLst>
-              <a:ext uri="{FF2B5EF4-FFF2-40B4-BE49-F238E27FC236}">
-                <a16:creationId xmlns:a16="http://schemas.microsoft.com/office/drawing/2014/main" id="{EB9DE39E-69F7-4F46-B7C3-44B36D9EDE80}"/>
-              </a:ext>
-            </a:extLst>
-          </p:cNvPr>
-          <p:cNvSpPr/>
-          <p:nvPr/>
-        </p:nvSpPr>
-        <p:spPr>
-          <a:xfrm>
-            <a:off x="1640632" y="1556792"/>
-            <a:ext cx="504056" cy="504056"/>
-          </a:xfrm>
-          <a:prstGeom prst="rect">
-            <a:avLst/>
-          </a:prstGeom>
-          <a:noFill/>
-          <a:ln>
-            <a:solidFill>
-              <a:schemeClr val="tx1"/>
-            </a:solidFill>
-          </a:ln>
-        </p:spPr>
-        <p:style>
-          <a:lnRef idx="2">
-            <a:schemeClr val="accent1">
-              <a:shade val="50000"/>
-            </a:schemeClr>
-          </a:lnRef>
-          <a:fillRef idx="1">
-            <a:schemeClr val="accent1"/>
-          </a:fillRef>
-          <a:effectRef idx="0">
-            <a:schemeClr val="accent1"/>
-          </a:effectRef>
-          <a:fontRef idx="minor">
-            <a:schemeClr val="lt1"/>
-          </a:fontRef>
-        </p:style>
-        <p:txBody>
-          <a:bodyPr rtlCol="0" anchor="ctr"/>
-          <a:lstStyle/>
-          <a:p>
-            <a:pPr algn="ctr"/>
-            <a:r>
-              <a:rPr kumimoji="1" lang="en-US" altLang="ja-JP">
-                <a:solidFill>
-                  <a:schemeClr val="tx1"/>
-                </a:solidFill>
-              </a:rPr>
-              <a:t>z</a:t>
-            </a:r>
-            <a:endParaRPr kumimoji="1" lang="ja-JP" altLang="en-US">
-              <a:solidFill>
-                <a:schemeClr val="tx1"/>
-              </a:solidFill>
-            </a:endParaRPr>
-          </a:p>
-        </p:txBody>
-      </p:sp>
-      <p:sp>
-        <p:nvSpPr>
-          <p:cNvPr id="4" name="正方形/長方形 3">
-            <a:extLst>
-              <a:ext uri="{FF2B5EF4-FFF2-40B4-BE49-F238E27FC236}">
-                <a16:creationId xmlns:a16="http://schemas.microsoft.com/office/drawing/2014/main" id="{CEF8B834-2614-4140-BF00-39C4EA7DE4A7}"/>
-              </a:ext>
-            </a:extLst>
-          </p:cNvPr>
-          <p:cNvSpPr/>
-          <p:nvPr/>
-        </p:nvSpPr>
-        <p:spPr>
-          <a:xfrm>
-            <a:off x="2144688" y="1556792"/>
-            <a:ext cx="504056" cy="504056"/>
-          </a:xfrm>
-          <a:prstGeom prst="rect">
-            <a:avLst/>
-          </a:prstGeom>
-          <a:noFill/>
-          <a:ln>
-            <a:solidFill>
-              <a:schemeClr val="tx1"/>
-            </a:solidFill>
-          </a:ln>
-        </p:spPr>
-        <p:style>
-          <a:lnRef idx="2">
-            <a:schemeClr val="accent1">
-              <a:shade val="50000"/>
-            </a:schemeClr>
-          </a:lnRef>
-          <a:fillRef idx="1">
-            <a:schemeClr val="accent1"/>
-          </a:fillRef>
-          <a:effectRef idx="0">
-            <a:schemeClr val="accent1"/>
-          </a:effectRef>
-          <a:fontRef idx="minor">
-            <a:schemeClr val="lt1"/>
-          </a:fontRef>
-        </p:style>
-        <p:txBody>
-          <a:bodyPr rtlCol="0" anchor="ctr"/>
-          <a:lstStyle/>
-          <a:p>
-            <a:pPr algn="ctr"/>
-            <a:r>
-              <a:rPr kumimoji="1" lang="en-US" altLang="ja-JP">
-                <a:solidFill>
-                  <a:schemeClr val="tx1"/>
-                </a:solidFill>
-              </a:rPr>
-              <a:t>y</a:t>
-            </a:r>
-            <a:endParaRPr kumimoji="1" lang="ja-JP" altLang="en-US">
-              <a:solidFill>
-                <a:schemeClr val="tx1"/>
-              </a:solidFill>
-            </a:endParaRPr>
-          </a:p>
-        </p:txBody>
-      </p:sp>
-      <p:sp>
-        <p:nvSpPr>
-          <p:cNvPr id="5" name="正方形/長方形 4">
-            <a:extLst>
-              <a:ext uri="{FF2B5EF4-FFF2-40B4-BE49-F238E27FC236}">
-                <a16:creationId xmlns:a16="http://schemas.microsoft.com/office/drawing/2014/main" id="{A334687B-6C5E-A542-B6B2-47ADE5E92E66}"/>
-              </a:ext>
-            </a:extLst>
-          </p:cNvPr>
-          <p:cNvSpPr/>
-          <p:nvPr/>
-        </p:nvSpPr>
-        <p:spPr>
-          <a:xfrm>
-            <a:off x="2648744" y="1556792"/>
-            <a:ext cx="504056" cy="504056"/>
-          </a:xfrm>
-          <a:prstGeom prst="rect">
-            <a:avLst/>
-          </a:prstGeom>
-          <a:noFill/>
-          <a:ln>
-            <a:solidFill>
-              <a:schemeClr val="tx1"/>
-            </a:solidFill>
-          </a:ln>
-        </p:spPr>
-        <p:style>
-          <a:lnRef idx="2">
-            <a:schemeClr val="accent1">
-              <a:shade val="50000"/>
-            </a:schemeClr>
-          </a:lnRef>
-          <a:fillRef idx="1">
-            <a:schemeClr val="accent1"/>
-          </a:fillRef>
-          <a:effectRef idx="0">
-            <a:schemeClr val="accent1"/>
-          </a:effectRef>
-          <a:fontRef idx="minor">
-            <a:schemeClr val="lt1"/>
-          </a:fontRef>
-        </p:style>
-        <p:txBody>
-          <a:bodyPr rtlCol="0" anchor="ctr"/>
-          <a:lstStyle/>
-          <a:p>
-            <a:pPr algn="ctr"/>
-            <a:r>
-              <a:rPr kumimoji="1" lang="en-US" altLang="ja-JP">
-                <a:solidFill>
-                  <a:schemeClr val="tx1"/>
-                </a:solidFill>
-              </a:rPr>
-              <a:t>x</a:t>
-            </a:r>
-            <a:endParaRPr kumimoji="1" lang="ja-JP" altLang="en-US">
-              <a:solidFill>
-                <a:schemeClr val="tx1"/>
-              </a:solidFill>
-            </a:endParaRPr>
-          </a:p>
-        </p:txBody>
-      </p:sp>
-      <p:sp>
-        <p:nvSpPr>
-          <p:cNvPr id="6" name="正方形/長方形 5">
-            <a:extLst>
-              <a:ext uri="{FF2B5EF4-FFF2-40B4-BE49-F238E27FC236}">
-                <a16:creationId xmlns:a16="http://schemas.microsoft.com/office/drawing/2014/main" id="{5CAAB22D-C4E1-8E43-84A5-27D396984BE8}"/>
-              </a:ext>
-            </a:extLst>
-          </p:cNvPr>
-          <p:cNvSpPr/>
-          <p:nvPr/>
-        </p:nvSpPr>
-        <p:spPr>
-          <a:xfrm>
-            <a:off x="3152800" y="1556792"/>
-            <a:ext cx="504056" cy="504056"/>
-          </a:xfrm>
-          <a:prstGeom prst="rect">
-            <a:avLst/>
-          </a:prstGeom>
-          <a:noFill/>
-          <a:ln>
-            <a:solidFill>
-              <a:schemeClr val="tx1"/>
-            </a:solidFill>
-          </a:ln>
-        </p:spPr>
-        <p:style>
-          <a:lnRef idx="2">
-            <a:schemeClr val="accent1">
-              <a:shade val="50000"/>
-            </a:schemeClr>
-          </a:lnRef>
-          <a:fillRef idx="1">
-            <a:schemeClr val="accent1"/>
-          </a:fillRef>
-          <a:effectRef idx="0">
-            <a:schemeClr val="accent1"/>
-          </a:effectRef>
-          <a:fontRef idx="minor">
-            <a:schemeClr val="lt1"/>
-          </a:fontRef>
-        </p:style>
-        <p:txBody>
-          <a:bodyPr rtlCol="0" anchor="ctr"/>
-          <a:lstStyle/>
-          <a:p>
-            <a:pPr algn="ctr"/>
-            <a:endParaRPr kumimoji="1" lang="ja-JP" altLang="en-US">
-              <a:solidFill>
-                <a:schemeClr val="tx1"/>
-              </a:solidFill>
-            </a:endParaRPr>
-          </a:p>
-        </p:txBody>
-      </p:sp>
-      <p:sp>
-        <p:nvSpPr>
-          <p:cNvPr id="7" name="正方形/長方形 6">
-            <a:extLst>
-              <a:ext uri="{FF2B5EF4-FFF2-40B4-BE49-F238E27FC236}">
-                <a16:creationId xmlns:a16="http://schemas.microsoft.com/office/drawing/2014/main" id="{A00338E8-DDDB-6D46-9F92-CD55199194CE}"/>
-              </a:ext>
-            </a:extLst>
-          </p:cNvPr>
-          <p:cNvSpPr/>
-          <p:nvPr/>
-        </p:nvSpPr>
-        <p:spPr>
-          <a:xfrm>
-            <a:off x="3656856" y="1556792"/>
-            <a:ext cx="504056" cy="504056"/>
-          </a:xfrm>
-          <a:prstGeom prst="rect">
-            <a:avLst/>
-          </a:prstGeom>
-          <a:noFill/>
-          <a:ln>
-            <a:solidFill>
-              <a:schemeClr val="tx1"/>
-            </a:solidFill>
-          </a:ln>
-        </p:spPr>
-        <p:style>
-          <a:lnRef idx="2">
-            <a:schemeClr val="accent1">
-              <a:shade val="50000"/>
-            </a:schemeClr>
-          </a:lnRef>
-          <a:fillRef idx="1">
-            <a:schemeClr val="accent1"/>
-          </a:fillRef>
-          <a:effectRef idx="0">
-            <a:schemeClr val="accent1"/>
-          </a:effectRef>
-          <a:fontRef idx="minor">
-            <a:schemeClr val="lt1"/>
-          </a:fontRef>
-        </p:style>
-        <p:txBody>
-          <a:bodyPr rtlCol="0" anchor="ctr"/>
-          <a:lstStyle/>
-          <a:p>
-            <a:pPr algn="ctr"/>
-            <a:r>
-              <a:rPr kumimoji="1" lang="en-US" altLang="ja-JP">
-                <a:solidFill>
-                  <a:schemeClr val="tx1"/>
-                </a:solidFill>
-              </a:rPr>
-              <a:t>z</a:t>
-            </a:r>
-            <a:endParaRPr kumimoji="1" lang="ja-JP" altLang="en-US">
-              <a:solidFill>
-                <a:schemeClr val="tx1"/>
-              </a:solidFill>
-            </a:endParaRPr>
-          </a:p>
-        </p:txBody>
-      </p:sp>
-      <p:sp>
-        <p:nvSpPr>
-          <p:cNvPr id="8" name="正方形/長方形 7">
-            <a:extLst>
-              <a:ext uri="{FF2B5EF4-FFF2-40B4-BE49-F238E27FC236}">
-                <a16:creationId xmlns:a16="http://schemas.microsoft.com/office/drawing/2014/main" id="{A618CAD4-6122-6647-99D4-4FCD87E8E339}"/>
-              </a:ext>
-            </a:extLst>
-          </p:cNvPr>
-          <p:cNvSpPr/>
-          <p:nvPr/>
-        </p:nvSpPr>
-        <p:spPr>
-          <a:xfrm>
-            <a:off x="4160912" y="1556792"/>
-            <a:ext cx="504056" cy="504056"/>
-          </a:xfrm>
-          <a:prstGeom prst="rect">
-            <a:avLst/>
-          </a:prstGeom>
-          <a:noFill/>
-          <a:ln>
-            <a:solidFill>
-              <a:schemeClr val="tx1"/>
-            </a:solidFill>
-          </a:ln>
-        </p:spPr>
-        <p:style>
-          <a:lnRef idx="2">
-            <a:schemeClr val="accent1">
-              <a:shade val="50000"/>
-            </a:schemeClr>
-          </a:lnRef>
-          <a:fillRef idx="1">
-            <a:schemeClr val="accent1"/>
-          </a:fillRef>
-          <a:effectRef idx="0">
-            <a:schemeClr val="accent1"/>
-          </a:effectRef>
-          <a:fontRef idx="minor">
-            <a:schemeClr val="lt1"/>
-          </a:fontRef>
-        </p:style>
-        <p:txBody>
-          <a:bodyPr rtlCol="0" anchor="ctr"/>
-          <a:lstStyle/>
-          <a:p>
-            <a:pPr algn="ctr"/>
-            <a:r>
-              <a:rPr kumimoji="1" lang="en-US" altLang="ja-JP">
-                <a:solidFill>
-                  <a:schemeClr val="tx1"/>
-                </a:solidFill>
-              </a:rPr>
-              <a:t>y</a:t>
-            </a:r>
-            <a:endParaRPr kumimoji="1" lang="ja-JP" altLang="en-US">
-              <a:solidFill>
-                <a:schemeClr val="tx1"/>
-              </a:solidFill>
-            </a:endParaRPr>
-          </a:p>
-        </p:txBody>
-      </p:sp>
-      <p:sp>
-        <p:nvSpPr>
-          <p:cNvPr id="9" name="正方形/長方形 8">
-            <a:extLst>
-              <a:ext uri="{FF2B5EF4-FFF2-40B4-BE49-F238E27FC236}">
-                <a16:creationId xmlns:a16="http://schemas.microsoft.com/office/drawing/2014/main" id="{2547F031-2BD7-5F4A-BF70-E25AF907D652}"/>
-              </a:ext>
-            </a:extLst>
-          </p:cNvPr>
-          <p:cNvSpPr/>
-          <p:nvPr/>
-        </p:nvSpPr>
-        <p:spPr>
-          <a:xfrm>
-            <a:off x="4664968" y="1556792"/>
-            <a:ext cx="504056" cy="504056"/>
-          </a:xfrm>
-          <a:prstGeom prst="rect">
-            <a:avLst/>
-          </a:prstGeom>
-          <a:noFill/>
-          <a:ln>
-            <a:solidFill>
-              <a:schemeClr val="tx1"/>
-            </a:solidFill>
-          </a:ln>
-        </p:spPr>
-        <p:style>
-          <a:lnRef idx="2">
-            <a:schemeClr val="accent1">
-              <a:shade val="50000"/>
-            </a:schemeClr>
-          </a:lnRef>
-          <a:fillRef idx="1">
-            <a:schemeClr val="accent1"/>
-          </a:fillRef>
-          <a:effectRef idx="0">
-            <a:schemeClr val="accent1"/>
-          </a:effectRef>
-          <a:fontRef idx="minor">
-            <a:schemeClr val="lt1"/>
-          </a:fontRef>
-        </p:style>
-        <p:txBody>
-          <a:bodyPr rtlCol="0" anchor="ctr"/>
-          <a:lstStyle/>
-          <a:p>
-            <a:pPr algn="ctr"/>
-            <a:r>
-              <a:rPr kumimoji="1" lang="en-US" altLang="ja-JP">
-                <a:solidFill>
-                  <a:schemeClr val="tx1"/>
-                </a:solidFill>
-              </a:rPr>
-              <a:t>x</a:t>
-            </a:r>
-            <a:endParaRPr kumimoji="1" lang="ja-JP" altLang="en-US">
-              <a:solidFill>
-                <a:schemeClr val="tx1"/>
-              </a:solidFill>
-            </a:endParaRPr>
-          </a:p>
-        </p:txBody>
-      </p:sp>
-      <p:sp>
-        <p:nvSpPr>
-          <p:cNvPr id="10" name="正方形/長方形 9">
-            <a:extLst>
-              <a:ext uri="{FF2B5EF4-FFF2-40B4-BE49-F238E27FC236}">
-                <a16:creationId xmlns:a16="http://schemas.microsoft.com/office/drawing/2014/main" id="{1CE34BAB-2EFD-4848-85E1-5C1C0F231290}"/>
-              </a:ext>
-            </a:extLst>
-          </p:cNvPr>
-          <p:cNvSpPr/>
-          <p:nvPr/>
-        </p:nvSpPr>
-        <p:spPr>
-          <a:xfrm>
-            <a:off x="5169024" y="1556792"/>
-            <a:ext cx="504056" cy="504056"/>
-          </a:xfrm>
-          <a:prstGeom prst="rect">
-            <a:avLst/>
-          </a:prstGeom>
-          <a:noFill/>
-          <a:ln>
-            <a:solidFill>
-              <a:schemeClr val="tx1"/>
-            </a:solidFill>
-          </a:ln>
-        </p:spPr>
-        <p:style>
-          <a:lnRef idx="2">
-            <a:schemeClr val="accent1">
-              <a:shade val="50000"/>
-            </a:schemeClr>
-          </a:lnRef>
-          <a:fillRef idx="1">
-            <a:schemeClr val="accent1"/>
-          </a:fillRef>
-          <a:effectRef idx="0">
-            <a:schemeClr val="accent1"/>
-          </a:effectRef>
-          <a:fontRef idx="minor">
-            <a:schemeClr val="lt1"/>
-          </a:fontRef>
-        </p:style>
-        <p:txBody>
-          <a:bodyPr rtlCol="0" anchor="ctr"/>
-          <a:lstStyle/>
-          <a:p>
-            <a:pPr algn="ctr"/>
-            <a:endParaRPr kumimoji="1" lang="ja-JP" altLang="en-US">
-              <a:solidFill>
-                <a:schemeClr val="tx1"/>
-              </a:solidFill>
-            </a:endParaRPr>
-          </a:p>
-        </p:txBody>
-      </p:sp>
-      <p:sp>
-        <p:nvSpPr>
-          <p:cNvPr id="11" name="正方形/長方形 10">
-            <a:extLst>
-              <a:ext uri="{FF2B5EF4-FFF2-40B4-BE49-F238E27FC236}">
-                <a16:creationId xmlns:a16="http://schemas.microsoft.com/office/drawing/2014/main" id="{45671A90-4C57-7945-930D-796B82392C6E}"/>
-              </a:ext>
-            </a:extLst>
-          </p:cNvPr>
-          <p:cNvSpPr/>
-          <p:nvPr/>
-        </p:nvSpPr>
-        <p:spPr>
-          <a:xfrm>
-            <a:off x="5673080" y="1556792"/>
-            <a:ext cx="504056" cy="504056"/>
-          </a:xfrm>
-          <a:prstGeom prst="rect">
-            <a:avLst/>
-          </a:prstGeom>
-          <a:noFill/>
-          <a:ln>
-            <a:solidFill>
-              <a:schemeClr val="tx1"/>
-            </a:solidFill>
-          </a:ln>
-        </p:spPr>
-        <p:style>
-          <a:lnRef idx="2">
-            <a:schemeClr val="accent1">
-              <a:shade val="50000"/>
-            </a:schemeClr>
-          </a:lnRef>
-          <a:fillRef idx="1">
-            <a:schemeClr val="accent1"/>
-          </a:fillRef>
-          <a:effectRef idx="0">
-            <a:schemeClr val="accent1"/>
-          </a:effectRef>
-          <a:fontRef idx="minor">
-            <a:schemeClr val="lt1"/>
-          </a:fontRef>
-        </p:style>
-        <p:txBody>
-          <a:bodyPr rtlCol="0" anchor="ctr"/>
-          <a:lstStyle/>
-          <a:p>
-            <a:pPr algn="ctr"/>
-            <a:r>
-              <a:rPr kumimoji="1" lang="en-US" altLang="ja-JP">
-                <a:solidFill>
-                  <a:schemeClr val="tx1"/>
-                </a:solidFill>
-              </a:rPr>
-              <a:t>z</a:t>
-            </a:r>
-            <a:endParaRPr kumimoji="1" lang="ja-JP" altLang="en-US">
-              <a:solidFill>
-                <a:schemeClr val="tx1"/>
-              </a:solidFill>
-            </a:endParaRPr>
-          </a:p>
-        </p:txBody>
-      </p:sp>
-      <p:sp>
-        <p:nvSpPr>
-          <p:cNvPr id="12" name="正方形/長方形 11">
-            <a:extLst>
-              <a:ext uri="{FF2B5EF4-FFF2-40B4-BE49-F238E27FC236}">
-                <a16:creationId xmlns:a16="http://schemas.microsoft.com/office/drawing/2014/main" id="{79B2AB3B-FABC-4C42-AC2D-D2D30F1B45FA}"/>
-              </a:ext>
-            </a:extLst>
-          </p:cNvPr>
-          <p:cNvSpPr/>
-          <p:nvPr/>
-        </p:nvSpPr>
-        <p:spPr>
-          <a:xfrm>
-            <a:off x="6177136" y="1556792"/>
-            <a:ext cx="504056" cy="504056"/>
-          </a:xfrm>
-          <a:prstGeom prst="rect">
-            <a:avLst/>
-          </a:prstGeom>
-          <a:noFill/>
-          <a:ln>
-            <a:solidFill>
-              <a:schemeClr val="tx1"/>
-            </a:solidFill>
-          </a:ln>
-        </p:spPr>
-        <p:style>
-          <a:lnRef idx="2">
-            <a:schemeClr val="accent1">
-              <a:shade val="50000"/>
-            </a:schemeClr>
-          </a:lnRef>
-          <a:fillRef idx="1">
-            <a:schemeClr val="accent1"/>
-          </a:fillRef>
-          <a:effectRef idx="0">
-            <a:schemeClr val="accent1"/>
-          </a:effectRef>
-          <a:fontRef idx="minor">
-            <a:schemeClr val="lt1"/>
-          </a:fontRef>
-        </p:style>
-        <p:txBody>
-          <a:bodyPr rtlCol="0" anchor="ctr"/>
-          <a:lstStyle/>
-          <a:p>
-            <a:pPr algn="ctr"/>
-            <a:r>
-              <a:rPr kumimoji="1" lang="en-US" altLang="ja-JP">
-                <a:solidFill>
-                  <a:schemeClr val="tx1"/>
-                </a:solidFill>
-              </a:rPr>
-              <a:t>y</a:t>
-            </a:r>
-            <a:endParaRPr kumimoji="1" lang="ja-JP" altLang="en-US">
-              <a:solidFill>
-                <a:schemeClr val="tx1"/>
-              </a:solidFill>
-            </a:endParaRPr>
-          </a:p>
-        </p:txBody>
-      </p:sp>
-      <p:sp>
-        <p:nvSpPr>
-          <p:cNvPr id="13" name="正方形/長方形 12">
-            <a:extLst>
-              <a:ext uri="{FF2B5EF4-FFF2-40B4-BE49-F238E27FC236}">
-                <a16:creationId xmlns:a16="http://schemas.microsoft.com/office/drawing/2014/main" id="{896FAB4C-F11E-5244-9018-EC06698F63DC}"/>
-              </a:ext>
-            </a:extLst>
-          </p:cNvPr>
-          <p:cNvSpPr/>
-          <p:nvPr/>
-        </p:nvSpPr>
-        <p:spPr>
-          <a:xfrm>
-            <a:off x="6681192" y="1556792"/>
-            <a:ext cx="504056" cy="504056"/>
-          </a:xfrm>
-          <a:prstGeom prst="rect">
-            <a:avLst/>
-          </a:prstGeom>
-          <a:noFill/>
-          <a:ln>
-            <a:solidFill>
-              <a:schemeClr val="tx1"/>
-            </a:solidFill>
-          </a:ln>
-        </p:spPr>
-        <p:style>
-          <a:lnRef idx="2">
-            <a:schemeClr val="accent1">
-              <a:shade val="50000"/>
-            </a:schemeClr>
-          </a:lnRef>
-          <a:fillRef idx="1">
-            <a:schemeClr val="accent1"/>
-          </a:fillRef>
-          <a:effectRef idx="0">
-            <a:schemeClr val="accent1"/>
-          </a:effectRef>
-          <a:fontRef idx="minor">
-            <a:schemeClr val="lt1"/>
-          </a:fontRef>
-        </p:style>
-        <p:txBody>
-          <a:bodyPr rtlCol="0" anchor="ctr"/>
-          <a:lstStyle/>
-          <a:p>
-            <a:pPr algn="ctr"/>
-            <a:r>
-              <a:rPr kumimoji="1" lang="en-US" altLang="ja-JP">
-                <a:solidFill>
-                  <a:schemeClr val="tx1"/>
-                </a:solidFill>
-              </a:rPr>
-              <a:t>x</a:t>
-            </a:r>
-            <a:endParaRPr kumimoji="1" lang="ja-JP" altLang="en-US">
-              <a:solidFill>
-                <a:schemeClr val="tx1"/>
-              </a:solidFill>
-            </a:endParaRPr>
-          </a:p>
-        </p:txBody>
-      </p:sp>
-      <p:sp>
-        <p:nvSpPr>
-          <p:cNvPr id="14" name="正方形/長方形 13">
-            <a:extLst>
-              <a:ext uri="{FF2B5EF4-FFF2-40B4-BE49-F238E27FC236}">
-                <a16:creationId xmlns:a16="http://schemas.microsoft.com/office/drawing/2014/main" id="{104A163A-DCD6-E142-8030-A559EBD4F460}"/>
-              </a:ext>
-            </a:extLst>
-          </p:cNvPr>
-          <p:cNvSpPr/>
-          <p:nvPr/>
-        </p:nvSpPr>
-        <p:spPr>
-          <a:xfrm>
-            <a:off x="3152800" y="2924944"/>
-            <a:ext cx="504056" cy="504056"/>
-          </a:xfrm>
-          <a:prstGeom prst="rect">
-            <a:avLst/>
-          </a:prstGeom>
-          <a:noFill/>
-          <a:ln>
-            <a:solidFill>
-              <a:schemeClr val="tx1"/>
-            </a:solidFill>
-          </a:ln>
-        </p:spPr>
-        <p:style>
-          <a:lnRef idx="2">
-            <a:schemeClr val="accent1">
-              <a:shade val="50000"/>
-            </a:schemeClr>
-          </a:lnRef>
-          <a:fillRef idx="1">
-            <a:schemeClr val="accent1"/>
-          </a:fillRef>
-          <a:effectRef idx="0">
-            <a:schemeClr val="accent1"/>
-          </a:effectRef>
-          <a:fontRef idx="minor">
-            <a:schemeClr val="lt1"/>
-          </a:fontRef>
-        </p:style>
-        <p:txBody>
-          <a:bodyPr rtlCol="0" anchor="ctr"/>
-          <a:lstStyle/>
-          <a:p>
-            <a:pPr algn="ctr"/>
-            <a:endParaRPr kumimoji="1" lang="ja-JP" altLang="en-US">
-              <a:solidFill>
-                <a:schemeClr val="tx1"/>
-              </a:solidFill>
-            </a:endParaRPr>
-          </a:p>
-        </p:txBody>
-      </p:sp>
-      <p:sp>
-        <p:nvSpPr>
-          <p:cNvPr id="15" name="正方形/長方形 14">
-            <a:extLst>
-              <a:ext uri="{FF2B5EF4-FFF2-40B4-BE49-F238E27FC236}">
-                <a16:creationId xmlns:a16="http://schemas.microsoft.com/office/drawing/2014/main" id="{51197534-5923-4743-A124-E15B05284933}"/>
-              </a:ext>
-            </a:extLst>
-          </p:cNvPr>
-          <p:cNvSpPr/>
-          <p:nvPr/>
-        </p:nvSpPr>
-        <p:spPr>
-          <a:xfrm>
-            <a:off x="3656856" y="2924944"/>
-            <a:ext cx="504056" cy="504056"/>
-          </a:xfrm>
-          <a:prstGeom prst="rect">
-            <a:avLst/>
-          </a:prstGeom>
-          <a:noFill/>
-          <a:ln>
-            <a:solidFill>
-              <a:schemeClr val="tx1"/>
-            </a:solidFill>
-          </a:ln>
-        </p:spPr>
-        <p:style>
-          <a:lnRef idx="2">
-            <a:schemeClr val="accent1">
-              <a:shade val="50000"/>
-            </a:schemeClr>
-          </a:lnRef>
-          <a:fillRef idx="1">
-            <a:schemeClr val="accent1"/>
-          </a:fillRef>
-          <a:effectRef idx="0">
-            <a:schemeClr val="accent1"/>
-          </a:effectRef>
-          <a:fontRef idx="minor">
-            <a:schemeClr val="lt1"/>
-          </a:fontRef>
-        </p:style>
-        <p:txBody>
-          <a:bodyPr rtlCol="0" anchor="ctr"/>
-          <a:lstStyle/>
-          <a:p>
-            <a:pPr algn="ctr"/>
-            <a:r>
-              <a:rPr kumimoji="1" lang="en-US" altLang="ja-JP">
-                <a:solidFill>
-                  <a:schemeClr val="tx1"/>
-                </a:solidFill>
-              </a:rPr>
-              <a:t>z</a:t>
-            </a:r>
-            <a:endParaRPr kumimoji="1" lang="ja-JP" altLang="en-US">
-              <a:solidFill>
-                <a:schemeClr val="tx1"/>
-              </a:solidFill>
-            </a:endParaRPr>
-          </a:p>
-        </p:txBody>
-      </p:sp>
-      <p:sp>
-        <p:nvSpPr>
-          <p:cNvPr id="16" name="正方形/長方形 15">
-            <a:extLst>
-              <a:ext uri="{FF2B5EF4-FFF2-40B4-BE49-F238E27FC236}">
-                <a16:creationId xmlns:a16="http://schemas.microsoft.com/office/drawing/2014/main" id="{E9BEF369-DA9B-CF44-8ED4-FFCD95EE18F6}"/>
-              </a:ext>
-            </a:extLst>
-          </p:cNvPr>
-          <p:cNvSpPr/>
-          <p:nvPr/>
-        </p:nvSpPr>
-        <p:spPr>
-          <a:xfrm>
-            <a:off x="4160912" y="2924944"/>
-            <a:ext cx="504056" cy="504056"/>
-          </a:xfrm>
-          <a:prstGeom prst="rect">
-            <a:avLst/>
-          </a:prstGeom>
-          <a:noFill/>
-          <a:ln>
-            <a:solidFill>
-              <a:schemeClr val="tx1"/>
-            </a:solidFill>
-          </a:ln>
-        </p:spPr>
-        <p:style>
-          <a:lnRef idx="2">
-            <a:schemeClr val="accent1">
-              <a:shade val="50000"/>
-            </a:schemeClr>
-          </a:lnRef>
-          <a:fillRef idx="1">
-            <a:schemeClr val="accent1"/>
-          </a:fillRef>
-          <a:effectRef idx="0">
-            <a:schemeClr val="accent1"/>
-          </a:effectRef>
-          <a:fontRef idx="minor">
-            <a:schemeClr val="lt1"/>
-          </a:fontRef>
-        </p:style>
-        <p:txBody>
-          <a:bodyPr rtlCol="0" anchor="ctr"/>
-          <a:lstStyle/>
-          <a:p>
-            <a:pPr algn="ctr"/>
-            <a:r>
-              <a:rPr kumimoji="1" lang="en-US" altLang="ja-JP">
-                <a:solidFill>
-                  <a:schemeClr val="tx1"/>
-                </a:solidFill>
-              </a:rPr>
-              <a:t>y</a:t>
-            </a:r>
-            <a:endParaRPr kumimoji="1" lang="ja-JP" altLang="en-US">
-              <a:solidFill>
-                <a:schemeClr val="tx1"/>
-              </a:solidFill>
-            </a:endParaRPr>
-          </a:p>
-        </p:txBody>
-      </p:sp>
-      <p:sp>
-        <p:nvSpPr>
-          <p:cNvPr id="17" name="正方形/長方形 16">
-            <a:extLst>
-              <a:ext uri="{FF2B5EF4-FFF2-40B4-BE49-F238E27FC236}">
-                <a16:creationId xmlns:a16="http://schemas.microsoft.com/office/drawing/2014/main" id="{1EAED7F2-5937-5E4A-83ED-7FB12B1A7E1B}"/>
-              </a:ext>
-            </a:extLst>
-          </p:cNvPr>
-          <p:cNvSpPr/>
-          <p:nvPr/>
-        </p:nvSpPr>
-        <p:spPr>
-          <a:xfrm>
-            <a:off x="4664968" y="2924944"/>
-            <a:ext cx="504056" cy="504056"/>
-          </a:xfrm>
-          <a:prstGeom prst="rect">
-            <a:avLst/>
-          </a:prstGeom>
-          <a:noFill/>
-          <a:ln>
-            <a:solidFill>
-              <a:schemeClr val="tx1"/>
-            </a:solidFill>
-          </a:ln>
-        </p:spPr>
-        <p:style>
-          <a:lnRef idx="2">
-            <a:schemeClr val="accent1">
-              <a:shade val="50000"/>
-            </a:schemeClr>
-          </a:lnRef>
-          <a:fillRef idx="1">
-            <a:schemeClr val="accent1"/>
-          </a:fillRef>
-          <a:effectRef idx="0">
-            <a:schemeClr val="accent1"/>
-          </a:effectRef>
-          <a:fontRef idx="minor">
-            <a:schemeClr val="lt1"/>
-          </a:fontRef>
-        </p:style>
-        <p:txBody>
-          <a:bodyPr rtlCol="0" anchor="ctr"/>
-          <a:lstStyle/>
-          <a:p>
-            <a:pPr algn="ctr"/>
-            <a:r>
-              <a:rPr kumimoji="1" lang="en-US" altLang="ja-JP">
-                <a:solidFill>
-                  <a:schemeClr val="tx1"/>
-                </a:solidFill>
-              </a:rPr>
-              <a:t>x</a:t>
-            </a:r>
-            <a:endParaRPr kumimoji="1" lang="ja-JP" altLang="en-US">
-              <a:solidFill>
-                <a:schemeClr val="tx1"/>
-              </a:solidFill>
-            </a:endParaRPr>
-          </a:p>
-        </p:txBody>
-      </p:sp>
-      <p:sp>
-        <p:nvSpPr>
-          <p:cNvPr id="18" name="下矢印 17">
-            <a:extLst>
-              <a:ext uri="{FF2B5EF4-FFF2-40B4-BE49-F238E27FC236}">
-                <a16:creationId xmlns:a16="http://schemas.microsoft.com/office/drawing/2014/main" id="{AA48D07F-D839-CD4B-9258-11D473255823}"/>
-              </a:ext>
-            </a:extLst>
-          </p:cNvPr>
-          <p:cNvSpPr/>
-          <p:nvPr/>
-        </p:nvSpPr>
-        <p:spPr>
-          <a:xfrm>
-            <a:off x="3944888" y="2348880"/>
-            <a:ext cx="432048" cy="360040"/>
-          </a:xfrm>
-          <a:prstGeom prst="downArrow">
-            <a:avLst/>
-          </a:prstGeom>
-          <a:solidFill>
-            <a:srgbClr val="FF0000"/>
-          </a:solidFill>
-          <a:ln>
-            <a:solidFill>
-              <a:schemeClr val="tx1"/>
-            </a:solidFill>
-          </a:ln>
-        </p:spPr>
-        <p:style>
-          <a:lnRef idx="2">
-            <a:schemeClr val="accent1">
-              <a:shade val="50000"/>
-            </a:schemeClr>
-          </a:lnRef>
-          <a:fillRef idx="1">
-            <a:schemeClr val="accent1"/>
-          </a:fillRef>
-          <a:effectRef idx="0">
-            <a:schemeClr val="accent1"/>
-          </a:effectRef>
-          <a:fontRef idx="minor">
-            <a:schemeClr val="lt1"/>
-          </a:fontRef>
-        </p:style>
-        <p:txBody>
-          <a:bodyPr rtlCol="0" anchor="ctr"/>
-          <a:lstStyle/>
-          <a:p>
-            <a:pPr algn="ctr"/>
-            <a:endParaRPr kumimoji="1" lang="ja-JP" altLang="en-US"/>
-          </a:p>
-        </p:txBody>
-      </p:sp>
-      <p:sp>
-        <p:nvSpPr>
-          <p:cNvPr id="19" name="正方形/長方形 18">
-            <a:extLst>
-              <a:ext uri="{FF2B5EF4-FFF2-40B4-BE49-F238E27FC236}">
-                <a16:creationId xmlns:a16="http://schemas.microsoft.com/office/drawing/2014/main" id="{64B6C3A1-1730-3F43-9217-3E09B667FB75}"/>
-              </a:ext>
-            </a:extLst>
-          </p:cNvPr>
-          <p:cNvSpPr/>
-          <p:nvPr/>
-        </p:nvSpPr>
-        <p:spPr>
-          <a:xfrm>
-            <a:off x="4664968" y="2132856"/>
-            <a:ext cx="2114681" cy="646331"/>
-          </a:xfrm>
-          <a:prstGeom prst="rect">
-            <a:avLst/>
-          </a:prstGeom>
-        </p:spPr>
-        <p:txBody>
-          <a:bodyPr wrap="none">
-            <a:spAutoFit/>
-          </a:bodyPr>
-          <a:lstStyle/>
-          <a:p>
-            <a:pPr algn="ctr"/>
-            <a:r>
-              <a:rPr lang="en" altLang="ja-JP">
-                <a:effectLst/>
-                <a:latin typeface="Monaco" pitchFamily="2" charset="0"/>
-              </a:rPr>
-              <a:t>_mm256_load_pd</a:t>
-            </a:r>
-          </a:p>
-          <a:p>
-            <a:pPr algn="ctr"/>
-            <a:r>
-              <a:rPr lang="en" altLang="ja-JP">
-                <a:effectLst/>
-                <a:latin typeface="Monaco" pitchFamily="2" charset="0"/>
-              </a:rPr>
-              <a:t>(vmovapd)</a:t>
-            </a:r>
-          </a:p>
-        </p:txBody>
-      </p:sp>
-      <p:sp>
-        <p:nvSpPr>
-          <p:cNvPr id="20" name="正方形/長方形 19">
-            <a:extLst>
-              <a:ext uri="{FF2B5EF4-FFF2-40B4-BE49-F238E27FC236}">
-                <a16:creationId xmlns:a16="http://schemas.microsoft.com/office/drawing/2014/main" id="{DD3CF0DC-6BDB-BF44-A5C5-F05B1C91A510}"/>
-              </a:ext>
-            </a:extLst>
-          </p:cNvPr>
-          <p:cNvSpPr/>
-          <p:nvPr/>
-        </p:nvSpPr>
-        <p:spPr>
-          <a:xfrm>
-            <a:off x="4448944" y="620688"/>
-            <a:ext cx="1425390" cy="369332"/>
-          </a:xfrm>
-          <a:prstGeom prst="rect">
-            <a:avLst/>
-          </a:prstGeom>
-        </p:spPr>
-        <p:txBody>
-          <a:bodyPr wrap="none">
-            <a:spAutoFit/>
-          </a:bodyPr>
-          <a:lstStyle/>
-          <a:p>
-            <a:r>
-              <a:rPr lang="en" altLang="ja-JP">
-                <a:effectLst/>
-                <a:latin typeface="Monaco" pitchFamily="2" charset="0"/>
-              </a:rPr>
-              <a:t>&amp;(v[i].x)</a:t>
-            </a:r>
-          </a:p>
-        </p:txBody>
-      </p:sp>
-      <p:cxnSp>
-        <p:nvCxnSpPr>
-          <p:cNvPr id="22" name="直線矢印コネクタ 21">
-            <a:extLst>
-              <a:ext uri="{FF2B5EF4-FFF2-40B4-BE49-F238E27FC236}">
-                <a16:creationId xmlns:a16="http://schemas.microsoft.com/office/drawing/2014/main" id="{8D566827-85D3-024D-ADFD-98150F71B4BF}"/>
-              </a:ext>
-            </a:extLst>
-          </p:cNvPr>
-          <p:cNvCxnSpPr>
-            <a:cxnSpLocks/>
-          </p:cNvCxnSpPr>
-          <p:nvPr/>
-        </p:nvCxnSpPr>
-        <p:spPr>
-          <a:xfrm>
-            <a:off x="5169024" y="1052736"/>
-            <a:ext cx="0" cy="504056"/>
-          </a:xfrm>
-          <a:prstGeom prst="straightConnector1">
-            <a:avLst/>
-          </a:prstGeom>
-          <a:ln>
-            <a:solidFill>
-              <a:schemeClr val="tx1"/>
-            </a:solidFill>
-            <a:tailEnd type="triangle"/>
-          </a:ln>
-        </p:spPr>
-        <p:style>
-          <a:lnRef idx="1">
-            <a:schemeClr val="accent1"/>
-          </a:lnRef>
-          <a:fillRef idx="0">
-            <a:schemeClr val="accent1"/>
-          </a:fillRef>
-          <a:effectRef idx="0">
-            <a:schemeClr val="accent1"/>
-          </a:effectRef>
-          <a:fontRef idx="minor">
-            <a:schemeClr val="tx1"/>
-          </a:fontRef>
-        </p:style>
-      </p:cxnSp>
-    </p:spTree>
-    <p:extLst>
-      <p:ext uri="{BB962C8B-B14F-4D97-AF65-F5344CB8AC3E}">
-        <p14:creationId xmlns:p14="http://schemas.microsoft.com/office/powerpoint/2010/main" val="3277191283"/>
-      </p:ext>
-    </p:extLst>
-  </p:cSld>
-  <p:clrMapOvr>
-    <a:masterClrMapping/>
-  </p:clrMapOvr>
-</p:sld>
-</file>
-
 <file path=ppt/slides/slide6.xml><?xml version="1.0" encoding="utf-8"?>
 <p:sld xmlns:a="http://schemas.openxmlformats.org/drawingml/2006/main" xmlns:r="http://schemas.openxmlformats.org/officeDocument/2006/relationships" xmlns:p="http://schemas.openxmlformats.org/presentationml/2006/main">
   <p:cSld>
@@ -10149,6 +10269,9 @@
           </a:bodyPr>
           <a:lstStyle/>
           <a:p>
+            <a:pPr>
+              <a:defRPr/>
+            </a:pPr>
             <a:r>
               <a:rPr lang="en" altLang="ja-JP">
                 <a:effectLst/>
@@ -10158,6 +10281,9 @@
             </a:r>
           </a:p>
           <a:p>
+            <a:pPr>
+              <a:defRPr/>
+            </a:pPr>
             <a:r>
               <a:rPr lang="en" altLang="ja-JP">
                 <a:effectLst/>
@@ -10167,6 +10293,9 @@
             </a:r>
           </a:p>
           <a:p>
+            <a:pPr>
+              <a:defRPr/>
+            </a:pPr>
             <a:r>
               <a:rPr lang="en" altLang="ja-JP">
                 <a:effectLst/>
@@ -10304,7 +10433,9 @@
             <a:bodyPr rtlCol="0" anchor="ctr"/>
             <a:lstStyle/>
             <a:p>
-              <a:pPr algn="ctr"/>
+              <a:pPr algn="ctr">
+                <a:defRPr/>
+              </a:pPr>
               <a:r>
                 <a:rPr kumimoji="1" lang="en-US" altLang="ja-JP">
                   <a:solidFill>
@@ -10370,7 +10501,9 @@
             <a:bodyPr rtlCol="0" anchor="ctr"/>
             <a:lstStyle/>
             <a:p>
-              <a:pPr algn="ctr"/>
+              <a:pPr algn="ctr">
+                <a:defRPr/>
+              </a:pPr>
               <a:r>
                 <a:rPr kumimoji="1" lang="en-US" altLang="ja-JP">
                   <a:solidFill>
@@ -10436,7 +10569,9 @@
             <a:bodyPr rtlCol="0" anchor="ctr"/>
             <a:lstStyle/>
             <a:p>
-              <a:pPr algn="ctr"/>
+              <a:pPr algn="ctr">
+                <a:defRPr/>
+              </a:pPr>
               <a:r>
                 <a:rPr kumimoji="1" lang="en-US" altLang="ja-JP">
                   <a:solidFill>
@@ -10581,7 +10716,9 @@
             <a:bodyPr rtlCol="0" anchor="ctr"/>
             <a:lstStyle/>
             <a:p>
-              <a:pPr algn="ctr"/>
+              <a:pPr algn="ctr">
+                <a:defRPr/>
+              </a:pPr>
               <a:r>
                 <a:rPr lang="en-US" altLang="ja-JP" dirty="0">
                   <a:solidFill>
@@ -10647,7 +10784,9 @@
             <a:bodyPr rtlCol="0" anchor="ctr"/>
             <a:lstStyle/>
             <a:p>
-              <a:pPr algn="ctr"/>
+              <a:pPr algn="ctr">
+                <a:defRPr/>
+              </a:pPr>
               <a:r>
                 <a:rPr kumimoji="1" lang="en-US" altLang="ja-JP" dirty="0">
                   <a:solidFill>
@@ -10713,7 +10852,9 @@
             <a:bodyPr rtlCol="0" anchor="ctr"/>
             <a:lstStyle/>
             <a:p>
-              <a:pPr algn="ctr"/>
+              <a:pPr algn="ctr">
+                <a:defRPr/>
+              </a:pPr>
               <a:r>
                 <a:rPr lang="en-US" altLang="ja-JP" dirty="0">
                   <a:solidFill>
@@ -10858,7 +10999,9 @@
             <a:bodyPr rtlCol="0" anchor="ctr"/>
             <a:lstStyle/>
             <a:p>
-              <a:pPr algn="ctr"/>
+              <a:pPr algn="ctr">
+                <a:defRPr/>
+              </a:pPr>
               <a:r>
                 <a:rPr lang="en-US" altLang="ja-JP">
                   <a:solidFill>
@@ -10924,7 +11067,9 @@
             <a:bodyPr rtlCol="0" anchor="ctr"/>
             <a:lstStyle/>
             <a:p>
-              <a:pPr algn="ctr"/>
+              <a:pPr algn="ctr">
+                <a:defRPr/>
+              </a:pPr>
               <a:r>
                 <a:rPr kumimoji="1" lang="en-US" altLang="ja-JP">
                   <a:solidFill>
@@ -10990,7 +11135,9 @@
             <a:bodyPr rtlCol="0" anchor="ctr"/>
             <a:lstStyle/>
             <a:p>
-              <a:pPr algn="ctr"/>
+              <a:pPr algn="ctr">
+                <a:defRPr/>
+              </a:pPr>
               <a:r>
                 <a:rPr lang="en-US" altLang="ja-JP">
                   <a:solidFill>
@@ -11135,7 +11282,9 @@
             <a:bodyPr rtlCol="0" anchor="ctr"/>
             <a:lstStyle/>
             <a:p>
-              <a:pPr algn="ctr"/>
+              <a:pPr algn="ctr">
+                <a:defRPr/>
+              </a:pPr>
               <a:r>
                 <a:rPr lang="en-US" altLang="ja-JP" dirty="0" smtClean="0">
                   <a:solidFill>
@@ -11201,7 +11350,9 @@
             <a:bodyPr rtlCol="0" anchor="ctr"/>
             <a:lstStyle/>
             <a:p>
-              <a:pPr algn="ctr"/>
+              <a:pPr algn="ctr">
+                <a:defRPr/>
+              </a:pPr>
               <a:r>
                 <a:rPr kumimoji="1" lang="en-US" altLang="ja-JP" dirty="0" smtClean="0">
                   <a:solidFill>
@@ -11267,7 +11418,9 @@
             <a:bodyPr rtlCol="0" anchor="ctr"/>
             <a:lstStyle/>
             <a:p>
-              <a:pPr algn="ctr"/>
+              <a:pPr algn="ctr">
+                <a:defRPr/>
+              </a:pPr>
               <a:r>
                 <a:rPr lang="en-US" altLang="ja-JP" dirty="0" smtClean="0">
                   <a:solidFill>
@@ -11412,7 +11565,9 @@
             <a:bodyPr rtlCol="0" anchor="ctr"/>
             <a:lstStyle/>
             <a:p>
-              <a:pPr algn="ctr"/>
+              <a:pPr algn="ctr">
+                <a:defRPr/>
+              </a:pPr>
               <a:r>
                 <a:rPr lang="en-US" altLang="ja-JP" dirty="0" smtClean="0">
                   <a:solidFill>
@@ -11478,7 +11633,9 @@
             <a:bodyPr rtlCol="0" anchor="ctr"/>
             <a:lstStyle/>
             <a:p>
-              <a:pPr algn="ctr"/>
+              <a:pPr algn="ctr">
+                <a:defRPr/>
+              </a:pPr>
               <a:r>
                 <a:rPr kumimoji="1" lang="en-US" altLang="ja-JP" dirty="0" smtClean="0">
                   <a:solidFill>
@@ -11544,7 +11701,9 @@
             <a:bodyPr rtlCol="0" anchor="ctr"/>
             <a:lstStyle/>
             <a:p>
-              <a:pPr algn="ctr"/>
+              <a:pPr algn="ctr">
+                <a:defRPr/>
+              </a:pPr>
               <a:r>
                 <a:rPr lang="en-US" altLang="ja-JP" dirty="0" smtClean="0">
                   <a:solidFill>
@@ -11585,13 +11744,14 @@
           <a:noFill/>
         </p:spPr>
         <p:txBody>
-          <a:bodyPr wrap="none" rtlCol="0">
-            <a:spAutoFit/>
-          </a:bodyPr>
-          <a:lstStyle/>
-          <a:p>
-            <a:r>
-              <a:rPr kumimoji="1" lang="en-US" altLang="ja-JP" sz="2800"/>
+          <a:bodyPr wrap="square" rtlCol="0"/>
+          <a:lstStyle/>
+          <a:p>
+            <a:pPr>
+              <a:defRPr sz="2600"/>
+            </a:pPr>
+            <a:r>
+              <a:rPr kumimoji="1" lang="en-US" altLang="ja-JP" sz="2600"/>
               <a:t>=</a:t>
             </a:r>
             <a:endParaRPr kumimoji="1" lang="ja-JP" altLang="en-US" sz="2800"/>
@@ -11621,13 +11781,14 @@
           <a:noFill/>
         </p:spPr>
         <p:txBody>
-          <a:bodyPr wrap="square" rtlCol="0">
-            <a:spAutoFit/>
-          </a:bodyPr>
-          <a:lstStyle/>
-          <a:p>
-            <a:r>
-              <a:rPr kumimoji="1" lang="en-US" altLang="ja-JP" sz="2800"/>
+          <a:bodyPr wrap="square" rtlCol="0"/>
+          <a:lstStyle/>
+          <a:p>
+            <a:pPr>
+              <a:defRPr sz="2600"/>
+            </a:pPr>
+            <a:r>
+              <a:rPr kumimoji="1" lang="en-US" altLang="ja-JP" sz="2600"/>
               <a:t>*</a:t>
             </a:r>
             <a:endParaRPr kumimoji="1" lang="ja-JP" altLang="en-US" sz="2800"/>
@@ -11657,13 +11818,14 @@
           <a:noFill/>
         </p:spPr>
         <p:txBody>
-          <a:bodyPr wrap="square" rtlCol="0">
-            <a:spAutoFit/>
-          </a:bodyPr>
-          <a:lstStyle/>
-          <a:p>
-            <a:r>
-              <a:rPr kumimoji="1" lang="en-US" altLang="ja-JP" sz="2800"/>
+          <a:bodyPr wrap="square" rtlCol="0"/>
+          <a:lstStyle/>
+          <a:p>
+            <a:pPr>
+              <a:defRPr sz="2600"/>
+            </a:pPr>
+            <a:r>
+              <a:rPr kumimoji="1" lang="en-US" altLang="ja-JP" sz="2600"/>
               <a:t>*</a:t>
             </a:r>
             <a:endParaRPr kumimoji="1" lang="ja-JP" altLang="en-US" sz="2800"/>
@@ -11693,13 +11855,14 @@
           <a:noFill/>
         </p:spPr>
         <p:txBody>
-          <a:bodyPr wrap="square" rtlCol="0">
-            <a:spAutoFit/>
-          </a:bodyPr>
-          <a:lstStyle/>
-          <a:p>
-            <a:r>
-              <a:rPr kumimoji="1" lang="en-US" altLang="ja-JP" sz="2800"/>
+          <a:bodyPr wrap="square" rtlCol="0"/>
+          <a:lstStyle/>
+          <a:p>
+            <a:pPr>
+              <a:defRPr sz="2600"/>
+            </a:pPr>
+            <a:r>
+              <a:rPr kumimoji="1" lang="en-US" altLang="ja-JP" sz="2600"/>
               <a:t>-</a:t>
             </a:r>
             <a:endParaRPr kumimoji="1" lang="ja-JP" altLang="en-US" sz="2800"/>
@@ -11816,7 +11979,9 @@
           <a:bodyPr rtlCol="0" anchor="ctr"/>
           <a:lstStyle/>
           <a:p>
-            <a:pPr algn="ctr"/>
+            <a:pPr algn="ctr">
+              <a:defRPr/>
+            </a:pPr>
             <a:r>
               <a:rPr lang="en-US" altLang="ja-JP" dirty="0">
                 <a:solidFill>
@@ -11885,7 +12050,9 @@
           <a:bodyPr rtlCol="0" anchor="ctr"/>
           <a:lstStyle/>
           <a:p>
-            <a:pPr algn="ctr"/>
+            <a:pPr algn="ctr">
+              <a:defRPr/>
+            </a:pPr>
             <a:r>
               <a:rPr kumimoji="1" lang="en-US" altLang="ja-JP" dirty="0">
                 <a:solidFill>
@@ -11954,7 +12121,9 @@
           <a:bodyPr rtlCol="0" anchor="ctr"/>
           <a:lstStyle/>
           <a:p>
-            <a:pPr algn="ctr"/>
+            <a:pPr algn="ctr">
+              <a:defRPr/>
+            </a:pPr>
             <a:r>
               <a:rPr lang="en-US" altLang="ja-JP" dirty="0">
                 <a:solidFill>
@@ -12081,7 +12250,9 @@
           <a:bodyPr rtlCol="0" anchor="ctr"/>
           <a:lstStyle/>
           <a:p>
-            <a:pPr algn="ctr"/>
+            <a:pPr algn="ctr">
+              <a:defRPr/>
+            </a:pPr>
             <a:r>
               <a:rPr lang="en-US" altLang="ja-JP" dirty="0">
                 <a:solidFill>
@@ -12150,7 +12321,9 @@
           <a:bodyPr rtlCol="0" anchor="ctr"/>
           <a:lstStyle/>
           <a:p>
-            <a:pPr algn="ctr"/>
+            <a:pPr algn="ctr">
+              <a:defRPr/>
+            </a:pPr>
             <a:r>
               <a:rPr kumimoji="1" lang="en-US" altLang="ja-JP" dirty="0">
                 <a:solidFill>
@@ -12219,7 +12392,9 @@
           <a:bodyPr rtlCol="0" anchor="ctr"/>
           <a:lstStyle/>
           <a:p>
-            <a:pPr algn="ctr"/>
+            <a:pPr algn="ctr">
+              <a:defRPr/>
+            </a:pPr>
             <a:r>
               <a:rPr lang="en-US" altLang="ja-JP" dirty="0">
                 <a:solidFill>
@@ -12263,7 +12438,9 @@
           </a:bodyPr>
           <a:lstStyle/>
           <a:p>
-            <a:pPr algn="ctr"/>
+            <a:pPr algn="ctr">
+              <a:defRPr/>
+            </a:pPr>
             <a:r>
               <a:rPr lang="en" altLang="ja-JP">
                 <a:effectLst/>
@@ -12273,7 +12450,9 @@
             </a:r>
           </a:p>
           <a:p>
-            <a:pPr algn="ctr"/>
+            <a:pPr algn="ctr">
+              <a:defRPr/>
+            </a:pPr>
             <a:r>
               <a:rPr lang="en" altLang="ja-JP">
                 <a:effectLst/>
@@ -12365,6 +12544,9 @@
           </a:bodyPr>
           <a:lstStyle/>
           <a:p>
+            <a:pPr>
+              <a:defRPr/>
+            </a:pPr>
             <a:r>
               <a:rPr lang="en" altLang="ja-JP">
                 <a:effectLst/>
@@ -12402,6 +12584,9 @@
           </a:bodyPr>
           <a:lstStyle/>
           <a:p>
+            <a:pPr>
+              <a:defRPr/>
+            </a:pPr>
             <a:r>
               <a:rPr lang="en" altLang="ja-JP">
                 <a:effectLst/>

--- a/site-assets/sources/day7/fig-ja-en.pptx
+++ b/site-assets/sources/day7/fig-ja-en.pptx
@@ -5,15 +5,15 @@
     <p:sldMasterId id="2147483660" r:id="rId1"/>
   </p:sldMasterIdLst>
   <p:notesMasterIdLst>
-    <p:notesMasterId r:id="rId5"/>
+    <p:notesMasterId r:id="rId8"/>
   </p:notesMasterIdLst>
   <p:sldIdLst>
     <p:sldId id="256" r:id="rId2"/>
-    <p:sldId id="259" r:id="rId10"/>
-    <p:sldId id="257" r:id="rId3"/>
-    <p:sldId id="260" r:id="rId11"/>
-    <p:sldId id="258" r:id="rId4"/>
-    <p:sldId id="261" r:id="rId12"/>
+    <p:sldId id="259" r:id="rId3"/>
+    <p:sldId id="257" r:id="rId4"/>
+    <p:sldId id="260" r:id="rId5"/>
+    <p:sldId id="258" r:id="rId6"/>
+    <p:sldId id="261" r:id="rId7"/>
   </p:sldIdLst>
   <p:sldSz cx="9906000" cy="6858000" type="A4"/>
   <p:notesSz cx="6858000" cy="9144000"/>
@@ -204,7 +204,7 @@
           </a:lstStyle>
           <a:p>
             <a:fld id="{234B1B89-6D29-7849-8E65-921CEBC6CA4C}" type="datetimeFigureOut">
-              <a:t>2020/7/23</a:t>
+              <a:t>2026/8/7</a:t>
             </a:fld>
             <a:endParaRPr kumimoji="1" lang="ja-JP" altLang="en-US"/>
           </a:p>
@@ -3148,8 +3148,8 @@
         </p:nvSpPr>
         <p:spPr>
           <a:xfrm>
-            <a:off x="457200" y="365760"/>
-            <a:ext cx="2339102" cy="461665"/>
+            <a:off x="828040" y="304800"/>
+            <a:ext cx="1676400" cy="461665"/>
           </a:xfrm>
           <a:prstGeom prst="rect">
             <a:avLst/>
@@ -3189,7 +3189,7 @@
         </p:nvSpPr>
         <p:spPr>
           <a:xfrm>
-            <a:off x="111760" y="1056640"/>
+            <a:off x="111760" y="1026160"/>
             <a:ext cx="2852063" cy="338554"/>
           </a:xfrm>
           <a:prstGeom prst="rect">
@@ -3232,7 +3232,7 @@
         </p:nvSpPr>
         <p:spPr>
           <a:xfrm>
-            <a:off x="4361284" y="325120"/>
+            <a:off x="4416465" y="304800"/>
             <a:ext cx="840295" cy="461665"/>
           </a:xfrm>
           <a:prstGeom prst="rect">
@@ -3253,7 +3253,7 @@
               <a:defRPr sz="2250"/>
             </a:pPr>
             <a:r>
-              <a:rPr kumimoji="1" lang="en-US" altLang="ja-JP" sz="2250"/>
+              <a:rPr kumimoji="1" lang="en-US" altLang="ja-JP" sz="2250" dirty="0"/>
               <a:t>VLIW</a:t>
             </a:r>
             <a:endParaRPr kumimoji="1" lang="ja-JP" altLang="en-US" sz="2400"/>
@@ -3274,7 +3274,7 @@
         </p:nvSpPr>
         <p:spPr>
           <a:xfrm>
-            <a:off x="3484880" y="1016000"/>
+            <a:off x="3484880" y="1026160"/>
             <a:ext cx="2646878" cy="338554"/>
           </a:xfrm>
           <a:prstGeom prst="rect">
@@ -3359,7 +3359,7 @@
         </p:nvSpPr>
         <p:spPr>
           <a:xfrm>
-            <a:off x="6797040" y="995680"/>
+            <a:off x="7058650" y="1026160"/>
             <a:ext cx="2646878" cy="338554"/>
           </a:xfrm>
           <a:prstGeom prst="rect">
@@ -3431,7 +3431,7 @@
           </a:fontRef>
         </p:style>
         <p:txBody>
-          <a:bodyPr rtlCol="0" anchor="ctr" wrap="square"/>
+          <a:bodyPr wrap="square" rtlCol="0" anchor="ctr"/>
           <a:lstStyle/>
           <a:p>
             <a:pPr algn="ctr">
@@ -3514,7 +3514,7 @@
           </a:fontRef>
         </p:style>
         <p:txBody>
-          <a:bodyPr rtlCol="0" anchor="ctr" wrap="square"/>
+          <a:bodyPr wrap="square" rtlCol="0" anchor="ctr"/>
           <a:lstStyle/>
           <a:p>
             <a:pPr algn="ctr">
@@ -3577,7 +3577,7 @@
           </a:xfrm>
           <a:prstGeom prst="bentConnector3">
             <a:avLst>
-              <a:gd name="adj1" fmla="val 48889"/>
+              <a:gd name="adj1" fmla="val 50000"/>
             </a:avLst>
           </a:prstGeom>
           <a:ln w="19050">
@@ -3626,7 +3626,7 @@
           </a:xfrm>
           <a:prstGeom prst="bentConnector3">
             <a:avLst>
-              <a:gd name="adj1" fmla="val 48901"/>
+              <a:gd name="adj1" fmla="val 50000"/>
             </a:avLst>
           </a:prstGeom>
           <a:ln w="19050">
@@ -3666,8 +3666,8 @@
         </p:nvSpPr>
         <p:spPr>
           <a:xfrm>
-            <a:off x="487680" y="1981200"/>
-            <a:ext cx="721360" cy="1076959"/>
+            <a:off x="111760" y="1981200"/>
+            <a:ext cx="1097280" cy="1076959"/>
           </a:xfrm>
           <a:prstGeom prst="roundRect">
             <a:avLst/>
@@ -3728,8 +3728,8 @@
         </p:nvSpPr>
         <p:spPr>
           <a:xfrm>
-            <a:off x="741681" y="1665148"/>
-            <a:ext cx="808786" cy="276999"/>
+            <a:off x="744606" y="1669769"/>
+            <a:ext cx="765073" cy="276999"/>
           </a:xfrm>
           <a:prstGeom prst="rect">
             <a:avLst/>
@@ -3749,108 +3749,6 @@
               <a:rPr kumimoji="1" lang="ja-JP" altLang="en-US" sz="1200" dirty="0"/>
               <a:t>Dispatch</a:t>
             </a:r>
-          </a:p>
-        </p:txBody>
-      </p:sp>
-      <p:sp>
-        <p:nvSpPr>
-          <p:cNvPr id="20" name="テキスト ボックス 19">
-            <a:extLst>
-              <a:ext uri="{FF2B5EF4-FFF2-40B4-BE49-F238E27FC236}">
-                <a16:creationId xmlns:a16="http://schemas.microsoft.com/office/drawing/2014/main" id="{4D504E4A-D45E-4346-8869-A6D4580087F3}"/>
-              </a:ext>
-            </a:extLst>
-          </p:cNvPr>
-          <p:cNvSpPr txBox="1"/>
-          <p:nvPr/>
-        </p:nvSpPr>
-        <p:spPr>
-          <a:xfrm>
-            <a:off x="798865" y="5695017"/>
-            <a:ext cx="2159566" cy="523220"/>
-          </a:xfrm>
-          <a:prstGeom prst="rect">
-            <a:avLst/>
-          </a:prstGeom>
-          <a:noFill/>
-        </p:spPr>
-        <p:txBody>
-          <a:bodyPr wrap="square" rtlCol="0"/>
-          <a:lstStyle/>
-          <a:p>
-            <a:pPr>
-              <a:defRPr sz="1000"/>
-            </a:pPr>
-            <a:r>
-              <a:rPr kumimoji="1" lang="ja-JP" altLang="en-US" sz="1000" b="1" dirty="0">
-                <a:solidFill>
-                  <a:srgbClr val="FF0000"/>
-                </a:solidFill>
-              </a:rPr>
-              <a:t>As execution units increase,</a:t>
-            </a:r>
-            <a:endParaRPr kumimoji="1" lang="en-US" altLang="ja-JP" sz="1400" b="1" dirty="0">
-              <a:solidFill>
-                <a:srgbClr val="FF0000"/>
-              </a:solidFill>
-            </a:endParaRPr>
-          </a:p>
-          <a:p>
-            <a:pPr>
-              <a:defRPr sz="1000"/>
-            </a:pPr>
-            <a:r>
-              <a:rPr kumimoji="1" lang="ja-JP" altLang="en-US" sz="1000" b="1" dirty="0">
-                <a:solidFill>
-                  <a:srgbClr val="FF0000"/>
-                </a:solidFill>
-              </a:rPr>
-              <a:t>instruction dispatch becomes the bottleneck</a:t>
-            </a:r>
-            <a:endParaRPr kumimoji="1" lang="en-US" altLang="ja-JP" sz="1400" b="1" dirty="0">
-              <a:solidFill>
-                <a:srgbClr val="FF0000"/>
-              </a:solidFill>
-            </a:endParaRPr>
-          </a:p>
-        </p:txBody>
-      </p:sp>
-      <p:sp>
-        <p:nvSpPr>
-          <p:cNvPr id="21" name="テキスト ボックス 20">
-            <a:extLst>
-              <a:ext uri="{FF2B5EF4-FFF2-40B4-BE49-F238E27FC236}">
-                <a16:creationId xmlns:a16="http://schemas.microsoft.com/office/drawing/2014/main" id="{F57E9AB9-8E76-6A47-AFC5-EFA81D236582}"/>
-              </a:ext>
-            </a:extLst>
-          </p:cNvPr>
-          <p:cNvSpPr txBox="1"/>
-          <p:nvPr/>
-        </p:nvSpPr>
-        <p:spPr>
-          <a:xfrm>
-            <a:off x="770128" y="4821257"/>
-            <a:ext cx="2379177" cy="307777"/>
-          </a:xfrm>
-          <a:prstGeom prst="rect">
-            <a:avLst/>
-          </a:prstGeom>
-          <a:noFill/>
-        </p:spPr>
-        <p:txBody>
-          <a:bodyPr wrap="square" rtlCol="0">
-            <a:normAutofit/>
-          </a:bodyPr>
-          <a:lstStyle/>
-          <a:p>
-            <a:pPr>
-              <a:defRPr/>
-            </a:pPr>
-            <a:r>
-              <a:rPr kumimoji="1" lang="en-US" altLang="ja-JP" sz="1400" dirty="0"/>
-              <a:t>Instruction backward compatibility is preserved</a:t>
-            </a:r>
-            <a:endParaRPr kumimoji="1" lang="en-US" altLang="ja-JP" sz="1400" dirty="0"/>
           </a:p>
         </p:txBody>
       </p:sp>
@@ -3876,7 +3774,7 @@
         </p:blipFill>
         <p:spPr>
           <a:xfrm>
-            <a:off x="3439160" y="4665344"/>
+            <a:off x="3439160" y="4675504"/>
             <a:ext cx="584200" cy="569595"/>
           </a:xfrm>
           <a:prstGeom prst="rect">
@@ -3906,7 +3804,7 @@
         </p:blipFill>
         <p:spPr>
           <a:xfrm>
-            <a:off x="3439160" y="5659119"/>
+            <a:off x="3439160" y="5659627"/>
             <a:ext cx="584200" cy="569595"/>
           </a:xfrm>
           <a:prstGeom prst="rect">
@@ -3929,7 +3827,7 @@
         <p:spPr>
           <a:xfrm>
             <a:off x="5121546" y="1855995"/>
-            <a:ext cx="969374" cy="484687"/>
+            <a:ext cx="1046480" cy="484687"/>
           </a:xfrm>
           <a:prstGeom prst="roundRect">
             <a:avLst/>
@@ -3957,7 +3855,7 @@
           </a:fontRef>
         </p:style>
         <p:txBody>
-          <a:bodyPr rtlCol="0" anchor="ctr" wrap="square"/>
+          <a:bodyPr wrap="square" rtlCol="0" anchor="ctr"/>
           <a:lstStyle/>
           <a:p>
             <a:pPr algn="ctr">
@@ -4012,7 +3910,7 @@
         <p:spPr>
           <a:xfrm>
             <a:off x="5121546" y="2344873"/>
-            <a:ext cx="969374" cy="484687"/>
+            <a:ext cx="1046480" cy="484687"/>
           </a:xfrm>
           <a:prstGeom prst="roundRect">
             <a:avLst/>
@@ -4040,7 +3938,7 @@
           </a:fontRef>
         </p:style>
         <p:txBody>
-          <a:bodyPr rtlCol="0" anchor="ctr" wrap="square"/>
+          <a:bodyPr wrap="square" rtlCol="0" anchor="ctr"/>
           <a:lstStyle/>
           <a:p>
             <a:pPr algn="ctr">
@@ -4094,8 +3992,8 @@
         </p:nvSpPr>
         <p:spPr>
           <a:xfrm>
-            <a:off x="4033520" y="1915160"/>
-            <a:ext cx="533400" cy="457200"/>
+            <a:off x="3718560" y="1915160"/>
+            <a:ext cx="848360" cy="457200"/>
           </a:xfrm>
           <a:prstGeom prst="rect">
             <a:avLst/>
@@ -4125,7 +4023,7 @@
           </a:fontRef>
         </p:style>
         <p:txBody>
-          <a:bodyPr rtlCol="0" anchor="ctr" wrap="square">
+          <a:bodyPr wrap="square" rtlCol="0" anchor="ctr">
             <a:normAutofit/>
           </a:bodyPr>
           <a:lstStyle/>
@@ -4141,11 +4039,6 @@
               </a:rPr>
               <a:t>Instruction A</a:t>
             </a:r>
-            <a:endParaRPr kumimoji="1" lang="ja-JP" altLang="en-US" sz="1000" dirty="0">
-              <a:solidFill>
-                <a:schemeClr val="tx1"/>
-              </a:solidFill>
-            </a:endParaRPr>
           </a:p>
         </p:txBody>
       </p:sp>
@@ -4163,8 +4056,8 @@
         </p:nvSpPr>
         <p:spPr>
           <a:xfrm>
-            <a:off x="4033520" y="2372360"/>
-            <a:ext cx="533400" cy="457200"/>
+            <a:off x="3718560" y="2372360"/>
+            <a:ext cx="848360" cy="457200"/>
           </a:xfrm>
           <a:prstGeom prst="rect">
             <a:avLst/>
@@ -4194,7 +4087,7 @@
           </a:fontRef>
         </p:style>
         <p:txBody>
-          <a:bodyPr rtlCol="0" anchor="ctr" wrap="square">
+          <a:bodyPr wrap="square" rtlCol="0" anchor="ctr">
             <a:normAutofit/>
           </a:bodyPr>
           <a:lstStyle/>
@@ -4210,11 +4103,6 @@
               </a:rPr>
               <a:t>Instruction B</a:t>
             </a:r>
-            <a:endParaRPr kumimoji="1" lang="ja-JP" altLang="en-US" sz="1000" dirty="0">
-              <a:solidFill>
-                <a:schemeClr val="tx1"/>
-              </a:solidFill>
-            </a:endParaRPr>
           </a:p>
         </p:txBody>
       </p:sp>
@@ -4232,8 +4120,8 @@
         </p:nvSpPr>
         <p:spPr>
           <a:xfrm>
-            <a:off x="3952240" y="1757680"/>
-            <a:ext cx="690880" cy="1229360"/>
+            <a:off x="3596640" y="1757680"/>
+            <a:ext cx="1046480" cy="1178559"/>
           </a:xfrm>
           <a:prstGeom prst="roundRect">
             <a:avLst/>
@@ -4268,42 +4156,6 @@
           <a:p>
             <a:pPr algn="ctr"/>
             <a:endParaRPr kumimoji="1" lang="ja-JP" altLang="en-US"/>
-          </a:p>
-        </p:txBody>
-      </p:sp>
-      <p:sp>
-        <p:nvSpPr>
-          <p:cNvPr id="34" name="テキスト ボックス 33">
-            <a:extLst>
-              <a:ext uri="{FF2B5EF4-FFF2-40B4-BE49-F238E27FC236}">
-                <a16:creationId xmlns:a16="http://schemas.microsoft.com/office/drawing/2014/main" id="{2B0B985A-CA7E-EA4B-8FD4-9B450FAB5D2C}"/>
-              </a:ext>
-            </a:extLst>
-          </p:cNvPr>
-          <p:cNvSpPr txBox="1"/>
-          <p:nvPr/>
-        </p:nvSpPr>
-        <p:spPr>
-          <a:xfrm>
-            <a:off x="3688080" y="1452880"/>
-            <a:ext cx="1279517" cy="253916"/>
-          </a:xfrm>
-          <a:prstGeom prst="rect">
-            <a:avLst/>
-          </a:prstGeom>
-          <a:noFill/>
-        </p:spPr>
-        <p:txBody>
-          <a:bodyPr wrap="square" rtlCol="0"/>
-          <a:lstStyle/>
-          <a:p>
-            <a:pPr>
-              <a:defRPr sz="850"/>
-            </a:pPr>
-            <a:r>
-              <a:rPr kumimoji="1" lang="en-US" altLang="ja-JP" sz="850"/>
-              <a:t>One VLIW instruction</a:t>
-            </a:r>
           </a:p>
         </p:txBody>
       </p:sp>
@@ -4396,116 +4248,6 @@
           </a:fontRef>
         </p:style>
       </p:cxnSp>
-      <p:sp>
-        <p:nvSpPr>
-          <p:cNvPr id="39" name="テキスト ボックス 38">
-            <a:extLst>
-              <a:ext uri="{FF2B5EF4-FFF2-40B4-BE49-F238E27FC236}">
-                <a16:creationId xmlns:a16="http://schemas.microsoft.com/office/drawing/2014/main" id="{FB6311DC-D3F4-B748-BA53-4FFE097F7657}"/>
-              </a:ext>
-            </a:extLst>
-          </p:cNvPr>
-          <p:cNvSpPr txBox="1"/>
-          <p:nvPr/>
-        </p:nvSpPr>
-        <p:spPr>
-          <a:xfrm>
-            <a:off x="4033520" y="4754880"/>
-            <a:ext cx="2182008" cy="523220"/>
-          </a:xfrm>
-          <a:prstGeom prst="rect">
-            <a:avLst/>
-          </a:prstGeom>
-          <a:noFill/>
-        </p:spPr>
-        <p:txBody>
-          <a:bodyPr wrap="square" rtlCol="0"/>
-          <a:lstStyle/>
-          <a:p>
-            <a:pPr>
-              <a:defRPr sz="1050"/>
-            </a:pPr>
-            <a:r>
-              <a:rPr lang="ja-JP" altLang="en-US" sz="1050" dirty="0"/>
-              <a:t>No dependency checking needed</a:t>
-            </a:r>
-            <a:endParaRPr lang="en-US" altLang="ja-JP" sz="1400" dirty="0"/>
-          </a:p>
-          <a:p>
-            <a:pPr>
-              <a:defRPr sz="1050"/>
-            </a:pPr>
-            <a:r>
-              <a:rPr lang="ja-JP" altLang="en-US" sz="1050" dirty="0"/>
-              <a:t>-&gt; hardware becomes simpler</a:t>
-            </a:r>
-            <a:endParaRPr lang="en-US" altLang="ja-JP" sz="1400" dirty="0"/>
-          </a:p>
-        </p:txBody>
-      </p:sp>
-      <p:sp>
-        <p:nvSpPr>
-          <p:cNvPr id="40" name="テキスト ボックス 39">
-            <a:extLst>
-              <a:ext uri="{FF2B5EF4-FFF2-40B4-BE49-F238E27FC236}">
-                <a16:creationId xmlns:a16="http://schemas.microsoft.com/office/drawing/2014/main" id="{619B4112-04B8-6A4A-B1FF-8D311471595D}"/>
-              </a:ext>
-            </a:extLst>
-          </p:cNvPr>
-          <p:cNvSpPr txBox="1"/>
-          <p:nvPr/>
-        </p:nvSpPr>
-        <p:spPr>
-          <a:xfrm>
-            <a:off x="3972560" y="5709920"/>
-            <a:ext cx="2877711" cy="523220"/>
-          </a:xfrm>
-          <a:prstGeom prst="rect">
-            <a:avLst/>
-          </a:prstGeom>
-          <a:noFill/>
-        </p:spPr>
-        <p:txBody>
-          <a:bodyPr wrap="square" rtlCol="0"/>
-          <a:lstStyle/>
-          <a:p>
-            <a:pPr>
-              <a:defRPr sz="1250"/>
-            </a:pPr>
-            <a:r>
-              <a:rPr lang="ja-JP" altLang="en-US" sz="1250" b="1" dirty="0">
-                <a:solidFill>
-                  <a:srgbClr val="FF0000"/>
-                </a:solidFill>
-              </a:rPr>
-              <a:t>Requires a godlike smart compiler</a:t>
-            </a:r>
-            <a:endParaRPr lang="en-US" altLang="ja-JP" sz="1400" b="1" dirty="0">
-              <a:solidFill>
-                <a:srgbClr val="FF0000"/>
-              </a:solidFill>
-            </a:endParaRPr>
-          </a:p>
-          <a:p>
-            <a:pPr>
-              <a:defRPr sz="1250"/>
-            </a:pPr>
-            <a:r>
-              <a:rPr lang="ja-JP" altLang="en-US" sz="1250" b="1" dirty="0">
-                <a:solidFill>
-                  <a:srgbClr val="FF0000"/>
-                </a:solidFill>
-              </a:rPr>
-              <a:t>Loses backward compatibility</a:t>
-            </a:r>
-            <a:endParaRPr lang="en-US" altLang="ja-JP" sz="1400" b="1" dirty="0">
-              <a:solidFill>
-                <a:srgbClr val="FF0000"/>
-              </a:solidFill>
-            </a:endParaRPr>
-          </a:p>
-        </p:txBody>
-      </p:sp>
       <p:pic>
         <p:nvPicPr>
           <p:cNvPr id="41" name="図 40">
@@ -4528,7 +4270,7 @@
         </p:blipFill>
         <p:spPr>
           <a:xfrm>
-            <a:off x="228600" y="4685664"/>
+            <a:off x="228600" y="4675504"/>
             <a:ext cx="584200" cy="569595"/>
           </a:xfrm>
           <a:prstGeom prst="rect">
@@ -4558,7 +4300,7 @@
         </p:blipFill>
         <p:spPr>
           <a:xfrm>
-            <a:off x="228600" y="5679439"/>
+            <a:off x="228600" y="5659627"/>
             <a:ext cx="584200" cy="569595"/>
           </a:xfrm>
           <a:prstGeom prst="rect">
@@ -4671,7 +4413,7 @@
         </p:blipFill>
         <p:spPr>
           <a:xfrm>
-            <a:off x="7056120" y="4665344"/>
+            <a:off x="6776551" y="4675504"/>
             <a:ext cx="584200" cy="569595"/>
           </a:xfrm>
           <a:prstGeom prst="rect">
@@ -4701,7 +4443,7 @@
         </p:blipFill>
         <p:spPr>
           <a:xfrm>
-            <a:off x="7056120" y="5628639"/>
+            <a:off x="6776551" y="5659627"/>
             <a:ext cx="584200" cy="569595"/>
           </a:xfrm>
           <a:prstGeom prst="rect">
@@ -4709,98 +4451,6 @@
           </a:prstGeom>
         </p:spPr>
       </p:pic>
-      <p:sp>
-        <p:nvSpPr>
-          <p:cNvPr id="46" name="テキスト ボックス 45">
-            <a:extLst>
-              <a:ext uri="{FF2B5EF4-FFF2-40B4-BE49-F238E27FC236}">
-                <a16:creationId xmlns:a16="http://schemas.microsoft.com/office/drawing/2014/main" id="{3F5420BD-5D08-A84F-9B46-56EA80905771}"/>
-              </a:ext>
-            </a:extLst>
-          </p:cNvPr>
-          <p:cNvSpPr txBox="1"/>
-          <p:nvPr/>
-        </p:nvSpPr>
-        <p:spPr>
-          <a:xfrm>
-            <a:off x="7680960" y="4693920"/>
-            <a:ext cx="1800493" cy="523220"/>
-          </a:xfrm>
-          <a:prstGeom prst="rect">
-            <a:avLst/>
-          </a:prstGeom>
-          <a:noFill/>
-        </p:spPr>
-        <p:txBody>
-          <a:bodyPr wrap="square" rtlCol="0"/>
-          <a:lstStyle/>
-          <a:p>
-            <a:pPr>
-              <a:defRPr sz="1000"/>
-            </a:pPr>
-            <a:r>
-              <a:rPr lang="ja-JP" altLang="en-US" sz="1000" dirty="0"/>
-              <a:t>Hardware is simple</a:t>
-            </a:r>
-            <a:endParaRPr lang="en-US" altLang="ja-JP" sz="1400" dirty="0"/>
-          </a:p>
-          <a:p>
-            <a:pPr>
-              <a:defRPr sz="1000"/>
-            </a:pPr>
-            <a:r>
-              <a:rPr lang="ja-JP" altLang="en-US" sz="1000" dirty="0"/>
-              <a:t>Backward compatibility is preserved</a:t>
-            </a:r>
-            <a:endParaRPr lang="en-US" altLang="ja-JP" sz="1400" dirty="0"/>
-          </a:p>
-        </p:txBody>
-      </p:sp>
-      <p:sp>
-        <p:nvSpPr>
-          <p:cNvPr id="47" name="テキスト ボックス 46">
-            <a:extLst>
-              <a:ext uri="{FF2B5EF4-FFF2-40B4-BE49-F238E27FC236}">
-                <a16:creationId xmlns:a16="http://schemas.microsoft.com/office/drawing/2014/main" id="{FC96BEA1-A0AB-E141-BA29-6C73475B4D56}"/>
-              </a:ext>
-            </a:extLst>
-          </p:cNvPr>
-          <p:cNvSpPr txBox="1"/>
-          <p:nvPr/>
-        </p:nvSpPr>
-        <p:spPr>
-          <a:xfrm>
-            <a:off x="7660640" y="5750560"/>
-            <a:ext cx="1620957" cy="307777"/>
-          </a:xfrm>
-          <a:prstGeom prst="rect">
-            <a:avLst/>
-          </a:prstGeom>
-          <a:noFill/>
-        </p:spPr>
-        <p:txBody>
-          <a:bodyPr wrap="square" rtlCol="0"/>
-          <a:lstStyle/>
-          <a:p>
-            <a:pPr>
-              <a:defRPr sz="1150"/>
-            </a:pPr>
-            <a:r>
-              <a:rPr lang="ja-JP" altLang="en-US" sz="1150" b="1" dirty="0">
-                <a:solidFill>
-                  <a:srgbClr val="FF0000"/>
-                </a:solidFill>
-              </a:rPr>
-              <a:t>Programming is hard</a:t>
-            </a:r>
-            <a:endParaRPr kumimoji="1" lang="ja-JP" altLang="en-US" sz="1400" b="1">
-              <a:solidFill>
-                <a:srgbClr val="FF0000"/>
-              </a:solidFill>
-            </a:endParaRPr>
-          </a:p>
-        </p:txBody>
-      </p:sp>
       <p:sp>
         <p:nvSpPr>
           <p:cNvPr id="48" name="正方形/長方形 47">
@@ -4917,8 +4567,8 @@
         </p:nvSpPr>
         <p:spPr>
           <a:xfrm>
-            <a:off x="1493520" y="1630680"/>
-            <a:ext cx="533400" cy="457200"/>
+            <a:off x="1513849" y="1629228"/>
+            <a:ext cx="849833" cy="256904"/>
           </a:xfrm>
           <a:prstGeom prst="rect">
             <a:avLst/>
@@ -4948,7 +4598,7 @@
           </a:fontRef>
         </p:style>
         <p:txBody>
-          <a:bodyPr rtlCol="0" anchor="ctr" wrap="square">
+          <a:bodyPr wrap="square" rtlCol="0" anchor="ctr">
             <a:normAutofit/>
           </a:bodyPr>
           <a:lstStyle/>
@@ -4964,174 +4614,6 @@
               </a:rPr>
               <a:t>Instruction A</a:t>
             </a:r>
-            <a:endParaRPr kumimoji="1" lang="ja-JP" altLang="en-US" sz="1000" dirty="0">
-              <a:solidFill>
-                <a:schemeClr val="tx1"/>
-              </a:solidFill>
-            </a:endParaRPr>
-          </a:p>
-        </p:txBody>
-      </p:sp>
-      <p:sp>
-        <p:nvSpPr>
-          <p:cNvPr id="53" name="正方形/長方形 52">
-            <a:extLst>
-              <a:ext uri="{FF2B5EF4-FFF2-40B4-BE49-F238E27FC236}">
-                <a16:creationId xmlns:a16="http://schemas.microsoft.com/office/drawing/2014/main" id="{34ECD519-ED67-9C4A-BC76-0C521D1FC110}"/>
-              </a:ext>
-            </a:extLst>
-          </p:cNvPr>
-          <p:cNvSpPr/>
-          <p:nvPr/>
-        </p:nvSpPr>
-        <p:spPr>
-          <a:xfrm>
-            <a:off x="1513840" y="2931160"/>
-            <a:ext cx="533400" cy="457200"/>
-          </a:xfrm>
-          <a:prstGeom prst="rect">
-            <a:avLst/>
-          </a:prstGeom>
-          <a:solidFill>
-            <a:schemeClr val="bg1"/>
-          </a:solidFill>
-          <a:ln>
-            <a:solidFill>
-              <a:schemeClr val="tx1"/>
-            </a:solidFill>
-          </a:ln>
-          <a:effectLst/>
-        </p:spPr>
-        <p:style>
-          <a:lnRef idx="1">
-            <a:schemeClr val="accent1"/>
-          </a:lnRef>
-          <a:fillRef idx="3">
-            <a:schemeClr val="accent1"/>
-          </a:fillRef>
-          <a:effectRef idx="2">
-            <a:schemeClr val="accent1"/>
-          </a:effectRef>
-          <a:fontRef idx="minor">
-            <a:schemeClr val="lt1"/>
-          </a:fontRef>
-        </p:style>
-        <p:txBody>
-          <a:bodyPr rtlCol="0" anchor="ctr" wrap="square">
-            <a:normAutofit/>
-          </a:bodyPr>
-          <a:lstStyle/>
-          <a:p>
-            <a:pPr algn="ctr">
-              <a:defRPr/>
-            </a:pPr>
-            <a:r>
-              <a:rPr kumimoji="1" lang="ja-JP" altLang="en-US" sz="1000" dirty="0">
-                <a:solidFill>
-                  <a:schemeClr val="tx1"/>
-                </a:solidFill>
-              </a:rPr>
-              <a:t>Instruction B</a:t>
-            </a:r>
-            <a:endParaRPr kumimoji="1" lang="ja-JP" altLang="en-US" sz="1000" dirty="0">
-              <a:solidFill>
-                <a:schemeClr val="tx1"/>
-              </a:solidFill>
-            </a:endParaRPr>
-          </a:p>
-        </p:txBody>
-      </p:sp>
-      <p:sp>
-        <p:nvSpPr>
-          <p:cNvPr id="54" name="テキスト ボックス 53">
-            <a:extLst>
-              <a:ext uri="{FF2B5EF4-FFF2-40B4-BE49-F238E27FC236}">
-                <a16:creationId xmlns:a16="http://schemas.microsoft.com/office/drawing/2014/main" id="{1D1DB946-7D3D-0849-AEC2-0094801815E2}"/>
-              </a:ext>
-            </a:extLst>
-          </p:cNvPr>
-          <p:cNvSpPr txBox="1"/>
-          <p:nvPr/>
-        </p:nvSpPr>
-        <p:spPr>
-          <a:xfrm>
-            <a:off x="528320" y="3606800"/>
-            <a:ext cx="2339102" cy="523220"/>
-          </a:xfrm>
-          <a:prstGeom prst="rect">
-            <a:avLst/>
-          </a:prstGeom>
-          <a:noFill/>
-        </p:spPr>
-        <p:txBody>
-          <a:bodyPr wrap="square" rtlCol="0"/>
-          <a:lstStyle/>
-          <a:p>
-            <a:pPr>
-              <a:defRPr sz="1000"/>
-            </a:pPr>
-            <a:r>
-              <a:rPr kumimoji="1" lang="ja-JP" altLang="en-US" sz="1000"/>
-              <a:t>Fetch multiple instructions,</a:t>
-            </a:r>
-            <a:endParaRPr kumimoji="1" lang="en-US" altLang="ja-JP" sz="1400"/>
-          </a:p>
-          <a:p>
-            <a:pPr>
-              <a:defRPr sz="1000"/>
-            </a:pPr>
-            <a:r>
-              <a:rPr kumimoji="1" lang="ja-JP" altLang="en-US" sz="1000"/>
-              <a:t>and the scheduler dispatches them</a:t>
-            </a:r>
-            <a:endParaRPr kumimoji="1" lang="en-US" altLang="ja-JP" sz="1400"/>
-          </a:p>
-        </p:txBody>
-      </p:sp>
-      <p:sp>
-        <p:nvSpPr>
-          <p:cNvPr id="55" name="テキスト ボックス 54">
-            <a:extLst>
-              <a:ext uri="{FF2B5EF4-FFF2-40B4-BE49-F238E27FC236}">
-                <a16:creationId xmlns:a16="http://schemas.microsoft.com/office/drawing/2014/main" id="{AA60636D-7C18-9A41-8E82-5E021712D277}"/>
-              </a:ext>
-            </a:extLst>
-          </p:cNvPr>
-          <p:cNvSpPr txBox="1"/>
-          <p:nvPr/>
-        </p:nvSpPr>
-        <p:spPr>
-          <a:xfrm>
-            <a:off x="3749040" y="3596640"/>
-            <a:ext cx="2518638" cy="523220"/>
-          </a:xfrm>
-          <a:prstGeom prst="rect">
-            <a:avLst/>
-          </a:prstGeom>
-          <a:noFill/>
-        </p:spPr>
-        <p:txBody>
-          <a:bodyPr wrap="square" rtlCol="0"/>
-          <a:lstStyle/>
-          <a:p>
-            <a:pPr>
-              <a:defRPr sz="1000"/>
-            </a:pPr>
-            <a:r>
-              <a:rPr lang="ja-JP" altLang="en-US" sz="1000"/>
-              <a:t>Bundle instructions that can run in parallel</a:t>
-            </a:r>
-            <a:endParaRPr kumimoji="1" lang="en-US" altLang="ja-JP" sz="1400"/>
-          </a:p>
-          <a:p>
-            <a:pPr>
-              <a:defRPr sz="1000"/>
-            </a:pPr>
-            <a:r>
-              <a:rPr lang="ja-JP" altLang="en-US" sz="1000"/>
-              <a:t>into one instruction in advance</a:t>
-            </a:r>
-            <a:endParaRPr kumimoji="1" lang="en-US" altLang="ja-JP" sz="1400"/>
           </a:p>
         </p:txBody>
       </p:sp>
@@ -5195,7 +4677,7 @@
         </p:nvSpPr>
         <p:spPr>
           <a:xfrm>
-            <a:off x="7386320" y="1930400"/>
+            <a:off x="7401272" y="1930400"/>
             <a:ext cx="643125" cy="246221"/>
           </a:xfrm>
           <a:prstGeom prst="rect">
@@ -5234,7 +4716,7 @@
         </p:nvSpPr>
         <p:spPr>
           <a:xfrm>
-            <a:off x="7406640" y="2428240"/>
+            <a:off x="7421592" y="2428240"/>
             <a:ext cx="643125" cy="246221"/>
           </a:xfrm>
           <a:prstGeom prst="rect">
@@ -5327,7 +4809,7 @@
         <p:spPr>
           <a:xfrm>
             <a:off x="7294880" y="1391920"/>
-            <a:ext cx="748923" cy="253916"/>
+            <a:ext cx="1179841" cy="253916"/>
           </a:xfrm>
           <a:prstGeom prst="rect">
             <a:avLst/>
@@ -5344,56 +4826,9 @@
               <a:defRPr/>
             </a:pPr>
             <a:r>
-              <a:rPr kumimoji="1" lang="en-US" altLang="ja-JP" sz="1050"/>
+              <a:rPr kumimoji="1" lang="en-US" altLang="ja-JP" sz="1050" dirty="0"/>
               <a:t>SIMD instruction</a:t>
             </a:r>
-          </a:p>
-        </p:txBody>
-      </p:sp>
-      <p:sp>
-        <p:nvSpPr>
-          <p:cNvPr id="63" name="テキスト ボックス 62">
-            <a:extLst>
-              <a:ext uri="{FF2B5EF4-FFF2-40B4-BE49-F238E27FC236}">
-                <a16:creationId xmlns:a16="http://schemas.microsoft.com/office/drawing/2014/main" id="{F77A8080-ED24-CC4A-A38F-1265BDC2EF78}"/>
-              </a:ext>
-            </a:extLst>
-          </p:cNvPr>
-          <p:cNvSpPr txBox="1"/>
-          <p:nvPr/>
-        </p:nvSpPr>
-        <p:spPr>
-          <a:xfrm>
-            <a:off x="7051040" y="3556000"/>
-            <a:ext cx="2339102" cy="523220"/>
-          </a:xfrm>
-          <a:prstGeom prst="rect">
-            <a:avLst/>
-          </a:prstGeom>
-          <a:noFill/>
-        </p:spPr>
-        <p:txBody>
-          <a:bodyPr wrap="square" rtlCol="0"/>
-          <a:lstStyle/>
-          <a:p>
-            <a:pPr>
-              <a:defRPr sz="1000"/>
-            </a:pPr>
-            <a:r>
-              <a:rPr lang="ja-JP" altLang="en-US" sz="1000"/>
-              <a:t>Apply the same operation to multiple data items</a:t>
-            </a:r>
-            <a:endParaRPr lang="en-US" altLang="ja-JP" sz="1400"/>
-          </a:p>
-          <a:p>
-            <a:pPr>
-              <a:defRPr sz="1000"/>
-            </a:pPr>
-            <a:r>
-              <a:rPr lang="ja-JP" altLang="en-US" sz="1000"/>
-              <a:t>at once</a:t>
-            </a:r>
-            <a:endParaRPr lang="en-US" altLang="ja-JP" sz="1400"/>
           </a:p>
         </p:txBody>
       </p:sp>
@@ -5441,6 +4876,526 @@
           </a:fontRef>
         </p:style>
       </p:cxnSp>
+      <p:sp>
+        <p:nvSpPr>
+          <p:cNvPr id="15" name="テキスト ボックス 14">
+            <a:extLst>
+              <a:ext uri="{FF2B5EF4-FFF2-40B4-BE49-F238E27FC236}">
+                <a16:creationId xmlns:a16="http://schemas.microsoft.com/office/drawing/2014/main" id="{1AA8BBB0-C941-ED61-A659-E8986FF4758F}"/>
+              </a:ext>
+            </a:extLst>
+          </p:cNvPr>
+          <p:cNvSpPr txBox="1"/>
+          <p:nvPr/>
+        </p:nvSpPr>
+        <p:spPr>
+          <a:xfrm>
+            <a:off x="419742" y="3624195"/>
+            <a:ext cx="2617775" cy="523220"/>
+          </a:xfrm>
+          <a:prstGeom prst="rect">
+            <a:avLst/>
+          </a:prstGeom>
+          <a:noFill/>
+        </p:spPr>
+        <p:txBody>
+          <a:bodyPr wrap="square">
+            <a:spAutoFit/>
+          </a:bodyPr>
+          <a:lstStyle/>
+          <a:p>
+            <a:r>
+              <a:rPr lang="ja-JP" altLang="en-US" sz="1400"/>
+              <a:t>Fetch multiple instructions,</a:t>
+            </a:r>
+            <a:r>
+              <a:rPr lang="en-US" altLang="ja-JP" sz="1400" dirty="0"/>
+              <a:t> </a:t>
+            </a:r>
+            <a:r>
+              <a:rPr lang="ja-JP" altLang="en-US" sz="1400"/>
+              <a:t>and the scheduler dispatches them</a:t>
+            </a:r>
+          </a:p>
+        </p:txBody>
+      </p:sp>
+      <p:sp>
+        <p:nvSpPr>
+          <p:cNvPr id="17" name="テキスト ボックス 16">
+            <a:extLst>
+              <a:ext uri="{FF2B5EF4-FFF2-40B4-BE49-F238E27FC236}">
+                <a16:creationId xmlns:a16="http://schemas.microsoft.com/office/drawing/2014/main" id="{ABF686AF-BB8A-A5BB-33F5-C4BF765E7BE0}"/>
+              </a:ext>
+            </a:extLst>
+          </p:cNvPr>
+          <p:cNvSpPr txBox="1"/>
+          <p:nvPr/>
+        </p:nvSpPr>
+        <p:spPr>
+          <a:xfrm>
+            <a:off x="3463366" y="3624195"/>
+            <a:ext cx="3052632" cy="523220"/>
+          </a:xfrm>
+          <a:prstGeom prst="rect">
+            <a:avLst/>
+          </a:prstGeom>
+          <a:noFill/>
+        </p:spPr>
+        <p:txBody>
+          <a:bodyPr wrap="square">
+            <a:spAutoFit/>
+          </a:bodyPr>
+          <a:lstStyle/>
+          <a:p>
+            <a:r>
+              <a:rPr lang="ja-JP" altLang="en-US" sz="1400"/>
+              <a:t>Bundle instructions that can run in parallel</a:t>
+            </a:r>
+            <a:r>
+              <a:rPr lang="en-US" altLang="ja-JP" sz="1400" dirty="0"/>
+              <a:t> </a:t>
+            </a:r>
+            <a:r>
+              <a:rPr lang="ja-JP" altLang="en-US" sz="1400"/>
+              <a:t>into one instruction in advance</a:t>
+            </a:r>
+          </a:p>
+        </p:txBody>
+      </p:sp>
+      <p:sp>
+        <p:nvSpPr>
+          <p:cNvPr id="19" name="テキスト ボックス 18">
+            <a:extLst>
+              <a:ext uri="{FF2B5EF4-FFF2-40B4-BE49-F238E27FC236}">
+                <a16:creationId xmlns:a16="http://schemas.microsoft.com/office/drawing/2014/main" id="{6BF65F41-415C-BE02-5213-35933FCB9FAE}"/>
+              </a:ext>
+            </a:extLst>
+          </p:cNvPr>
+          <p:cNvSpPr txBox="1"/>
+          <p:nvPr/>
+        </p:nvSpPr>
+        <p:spPr>
+          <a:xfrm>
+            <a:off x="6941847" y="3624195"/>
+            <a:ext cx="2398959" cy="523220"/>
+          </a:xfrm>
+          <a:prstGeom prst="rect">
+            <a:avLst/>
+          </a:prstGeom>
+          <a:noFill/>
+        </p:spPr>
+        <p:txBody>
+          <a:bodyPr wrap="square">
+            <a:spAutoFit/>
+          </a:bodyPr>
+          <a:lstStyle/>
+          <a:p>
+            <a:r>
+              <a:rPr lang="ja-JP" altLang="en-US" sz="1400"/>
+              <a:t>Apply the same operation to multiple data items</a:t>
+            </a:r>
+            <a:r>
+              <a:rPr lang="en-US" altLang="ja-JP" sz="1400" dirty="0"/>
+              <a:t> </a:t>
+            </a:r>
+            <a:r>
+              <a:rPr lang="ja-JP" altLang="en-US" sz="1400"/>
+              <a:t>at once</a:t>
+            </a:r>
+          </a:p>
+        </p:txBody>
+      </p:sp>
+      <p:sp>
+        <p:nvSpPr>
+          <p:cNvPr id="23" name="テキスト ボックス 22">
+            <a:extLst>
+              <a:ext uri="{FF2B5EF4-FFF2-40B4-BE49-F238E27FC236}">
+                <a16:creationId xmlns:a16="http://schemas.microsoft.com/office/drawing/2014/main" id="{A8D5DFF3-F686-C7D3-59E1-82C0E1EE4A26}"/>
+              </a:ext>
+            </a:extLst>
+          </p:cNvPr>
+          <p:cNvSpPr txBox="1"/>
+          <p:nvPr/>
+        </p:nvSpPr>
+        <p:spPr>
+          <a:xfrm>
+            <a:off x="770128" y="5713592"/>
+            <a:ext cx="2669032" cy="461665"/>
+          </a:xfrm>
+          <a:prstGeom prst="rect">
+            <a:avLst/>
+          </a:prstGeom>
+          <a:noFill/>
+        </p:spPr>
+        <p:txBody>
+          <a:bodyPr wrap="square">
+            <a:spAutoFit/>
+          </a:bodyPr>
+          <a:lstStyle/>
+          <a:p>
+            <a:r>
+              <a:rPr lang="ja-JP" altLang="en-US" sz="1200" b="1">
+                <a:solidFill>
+                  <a:srgbClr val="FF0000"/>
+                </a:solidFill>
+              </a:rPr>
+              <a:t>As execution units increase,</a:t>
+            </a:r>
+            <a:r>
+              <a:rPr lang="en-US" altLang="ja-JP" sz="1200" b="1" dirty="0">
+                <a:solidFill>
+                  <a:srgbClr val="FF0000"/>
+                </a:solidFill>
+              </a:rPr>
+              <a:t> </a:t>
+            </a:r>
+            <a:r>
+              <a:rPr lang="ja-JP" altLang="en-US" sz="1200" b="1">
+                <a:solidFill>
+                  <a:srgbClr val="FF0000"/>
+                </a:solidFill>
+              </a:rPr>
+              <a:t>instruction dispatch becomes the bottleneck</a:t>
+            </a:r>
+          </a:p>
+        </p:txBody>
+      </p:sp>
+      <p:sp>
+        <p:nvSpPr>
+          <p:cNvPr id="27" name="テキスト ボックス 26">
+            <a:extLst>
+              <a:ext uri="{FF2B5EF4-FFF2-40B4-BE49-F238E27FC236}">
+                <a16:creationId xmlns:a16="http://schemas.microsoft.com/office/drawing/2014/main" id="{853154A2-CF1E-7500-CBA3-279C1A01FE71}"/>
+              </a:ext>
+            </a:extLst>
+          </p:cNvPr>
+          <p:cNvSpPr txBox="1"/>
+          <p:nvPr/>
+        </p:nvSpPr>
+        <p:spPr>
+          <a:xfrm>
+            <a:off x="4091889" y="5713592"/>
+            <a:ext cx="2499360" cy="461665"/>
+          </a:xfrm>
+          <a:prstGeom prst="rect">
+            <a:avLst/>
+          </a:prstGeom>
+          <a:noFill/>
+        </p:spPr>
+        <p:txBody>
+          <a:bodyPr wrap="square">
+            <a:spAutoFit/>
+          </a:bodyPr>
+          <a:lstStyle/>
+          <a:p>
+            <a:r>
+              <a:rPr lang="ja-JP" altLang="en-US" sz="1200" b="1">
+                <a:solidFill>
+                  <a:srgbClr val="FF0000"/>
+                </a:solidFill>
+              </a:rPr>
+              <a:t>Requires a godlike smart compiler</a:t>
+            </a:r>
+            <a:r>
+              <a:rPr lang="en-US" altLang="ja-JP" sz="1200" b="1" dirty="0">
+                <a:solidFill>
+                  <a:srgbClr val="FF0000"/>
+                </a:solidFill>
+              </a:rPr>
+              <a:t> </a:t>
+            </a:r>
+            <a:r>
+              <a:rPr lang="ja-JP" altLang="en-US" sz="1200" b="1">
+                <a:solidFill>
+                  <a:srgbClr val="FF0000"/>
+                </a:solidFill>
+              </a:rPr>
+              <a:t>Loses backward compatibility</a:t>
+            </a:r>
+          </a:p>
+        </p:txBody>
+      </p:sp>
+      <p:sp>
+        <p:nvSpPr>
+          <p:cNvPr id="35" name="テキスト ボックス 34">
+            <a:extLst>
+              <a:ext uri="{FF2B5EF4-FFF2-40B4-BE49-F238E27FC236}">
+                <a16:creationId xmlns:a16="http://schemas.microsoft.com/office/drawing/2014/main" id="{4099B9B1-6B18-E0D7-A275-A3EE4AA1B616}"/>
+              </a:ext>
+            </a:extLst>
+          </p:cNvPr>
+          <p:cNvSpPr txBox="1"/>
+          <p:nvPr/>
+        </p:nvSpPr>
+        <p:spPr>
+          <a:xfrm>
+            <a:off x="7366638" y="5805925"/>
+            <a:ext cx="1682148" cy="276999"/>
+          </a:xfrm>
+          <a:prstGeom prst="rect">
+            <a:avLst/>
+          </a:prstGeom>
+          <a:noFill/>
+        </p:spPr>
+        <p:txBody>
+          <a:bodyPr wrap="square">
+            <a:spAutoFit/>
+          </a:bodyPr>
+          <a:lstStyle/>
+          <a:p>
+            <a:r>
+              <a:rPr lang="ja-JP" altLang="en-US" sz="1200" b="1">
+                <a:solidFill>
+                  <a:srgbClr val="FF0000"/>
+                </a:solidFill>
+              </a:rPr>
+              <a:t>Programming is hard</a:t>
+            </a:r>
+          </a:p>
+        </p:txBody>
+      </p:sp>
+      <p:sp>
+        <p:nvSpPr>
+          <p:cNvPr id="49" name="テキスト ボックス 48">
+            <a:extLst>
+              <a:ext uri="{FF2B5EF4-FFF2-40B4-BE49-F238E27FC236}">
+                <a16:creationId xmlns:a16="http://schemas.microsoft.com/office/drawing/2014/main" id="{3C75CBED-5141-6F23-DF46-C6AED58AFA37}"/>
+              </a:ext>
+            </a:extLst>
+          </p:cNvPr>
+          <p:cNvSpPr txBox="1"/>
+          <p:nvPr/>
+        </p:nvSpPr>
+        <p:spPr>
+          <a:xfrm>
+            <a:off x="770128" y="4729469"/>
+            <a:ext cx="2001521" cy="461665"/>
+          </a:xfrm>
+          <a:prstGeom prst="rect">
+            <a:avLst/>
+          </a:prstGeom>
+          <a:noFill/>
+        </p:spPr>
+        <p:txBody>
+          <a:bodyPr wrap="square">
+            <a:spAutoFit/>
+          </a:bodyPr>
+          <a:lstStyle/>
+          <a:p>
+            <a:r>
+              <a:rPr lang="ja-JP" altLang="en-US" sz="1200"/>
+              <a:t>Instruction backward</a:t>
+            </a:r>
+            <a:r>
+              <a:rPr lang="en-US" altLang="ja-JP" sz="1200" dirty="0"/>
+              <a:t> </a:t>
+            </a:r>
+            <a:r>
+              <a:rPr lang="ja-JP" altLang="en-US" sz="1200"/>
+              <a:t>compatibility is preserved</a:t>
+            </a:r>
+          </a:p>
+        </p:txBody>
+      </p:sp>
+      <p:sp>
+        <p:nvSpPr>
+          <p:cNvPr id="57" name="テキスト ボックス 56">
+            <a:extLst>
+              <a:ext uri="{FF2B5EF4-FFF2-40B4-BE49-F238E27FC236}">
+                <a16:creationId xmlns:a16="http://schemas.microsoft.com/office/drawing/2014/main" id="{62820197-97DF-985E-96D5-5A5F05A63AA7}"/>
+              </a:ext>
+            </a:extLst>
+          </p:cNvPr>
+          <p:cNvSpPr txBox="1"/>
+          <p:nvPr/>
+        </p:nvSpPr>
+        <p:spPr>
+          <a:xfrm>
+            <a:off x="4091889" y="4729469"/>
+            <a:ext cx="2448560" cy="461665"/>
+          </a:xfrm>
+          <a:prstGeom prst="rect">
+            <a:avLst/>
+          </a:prstGeom>
+          <a:noFill/>
+        </p:spPr>
+        <p:txBody>
+          <a:bodyPr wrap="square">
+            <a:spAutoFit/>
+          </a:bodyPr>
+          <a:lstStyle/>
+          <a:p>
+            <a:r>
+              <a:rPr lang="ja-JP" altLang="en-US" sz="1200"/>
+              <a:t>No dependency checking needed</a:t>
+            </a:r>
+          </a:p>
+          <a:p>
+            <a:r>
+              <a:rPr lang="ja-JP" altLang="en-US" sz="1200"/>
+              <a:t>-&gt; hardware becomes simpler</a:t>
+            </a:r>
+          </a:p>
+        </p:txBody>
+      </p:sp>
+      <p:sp>
+        <p:nvSpPr>
+          <p:cNvPr id="65" name="テキスト ボックス 64">
+            <a:extLst>
+              <a:ext uri="{FF2B5EF4-FFF2-40B4-BE49-F238E27FC236}">
+                <a16:creationId xmlns:a16="http://schemas.microsoft.com/office/drawing/2014/main" id="{8BFB0876-3DA3-3DD5-1D7C-7CABB16AAB4E}"/>
+              </a:ext>
+            </a:extLst>
+          </p:cNvPr>
+          <p:cNvSpPr txBox="1"/>
+          <p:nvPr/>
+        </p:nvSpPr>
+        <p:spPr>
+          <a:xfrm>
+            <a:off x="7366638" y="4729469"/>
+            <a:ext cx="2498454" cy="461665"/>
+          </a:xfrm>
+          <a:prstGeom prst="rect">
+            <a:avLst/>
+          </a:prstGeom>
+          <a:noFill/>
+        </p:spPr>
+        <p:txBody>
+          <a:bodyPr wrap="square">
+            <a:spAutoFit/>
+          </a:bodyPr>
+          <a:lstStyle/>
+          <a:p>
+            <a:r>
+              <a:rPr lang="ja-JP" altLang="en-US" sz="1200"/>
+              <a:t>Hardware is simple</a:t>
+            </a:r>
+            <a:r>
+              <a:rPr lang="en-US" altLang="ja-JP" sz="1200" dirty="0"/>
+              <a:t> </a:t>
+            </a:r>
+            <a:endParaRPr lang="ja-JP" altLang="en-US" sz="1200"/>
+          </a:p>
+          <a:p>
+            <a:r>
+              <a:rPr lang="ja-JP" altLang="en-US" sz="1200"/>
+              <a:t>Backward compatibility is preserved</a:t>
+            </a:r>
+          </a:p>
+        </p:txBody>
+      </p:sp>
+      <p:sp>
+        <p:nvSpPr>
+          <p:cNvPr id="66" name="正方形/長方形 65">
+            <a:extLst>
+              <a:ext uri="{FF2B5EF4-FFF2-40B4-BE49-F238E27FC236}">
+                <a16:creationId xmlns:a16="http://schemas.microsoft.com/office/drawing/2014/main" id="{17A227A3-4CCC-63EF-6934-1FADCD049880}"/>
+              </a:ext>
+            </a:extLst>
+          </p:cNvPr>
+          <p:cNvSpPr/>
+          <p:nvPr/>
+        </p:nvSpPr>
+        <p:spPr>
+          <a:xfrm>
+            <a:off x="1513849" y="3126814"/>
+            <a:ext cx="849833" cy="256904"/>
+          </a:xfrm>
+          <a:prstGeom prst="rect">
+            <a:avLst/>
+          </a:prstGeom>
+          <a:solidFill>
+            <a:schemeClr val="bg1"/>
+          </a:solidFill>
+          <a:ln>
+            <a:solidFill>
+              <a:schemeClr val="tx1"/>
+            </a:solidFill>
+          </a:ln>
+          <a:effectLst/>
+        </p:spPr>
+        <p:style>
+          <a:lnRef idx="1">
+            <a:schemeClr val="accent1"/>
+          </a:lnRef>
+          <a:fillRef idx="3">
+            <a:schemeClr val="accent1"/>
+          </a:fillRef>
+          <a:effectRef idx="2">
+            <a:schemeClr val="accent1"/>
+          </a:effectRef>
+          <a:fontRef idx="minor">
+            <a:schemeClr val="lt1"/>
+          </a:fontRef>
+        </p:style>
+        <p:txBody>
+          <a:bodyPr wrap="square" rtlCol="0" anchor="ctr">
+            <a:normAutofit/>
+          </a:bodyPr>
+          <a:lstStyle/>
+          <a:p>
+            <a:pPr algn="ctr">
+              <a:defRPr/>
+            </a:pPr>
+            <a:r>
+              <a:rPr kumimoji="1" lang="ja-JP" altLang="en-US" sz="1000">
+                <a:solidFill>
+                  <a:schemeClr val="tx1"/>
+                </a:solidFill>
+              </a:rPr>
+              <a:t>Instruction </a:t>
+            </a:r>
+            <a:r>
+              <a:rPr kumimoji="1" lang="en-US" altLang="ja-JP" sz="1000" dirty="0">
+                <a:solidFill>
+                  <a:schemeClr val="tx1"/>
+                </a:solidFill>
+              </a:rPr>
+              <a:t>B</a:t>
+            </a:r>
+            <a:endParaRPr kumimoji="1" lang="ja-JP" altLang="en-US" sz="1000" dirty="0">
+              <a:solidFill>
+                <a:schemeClr val="tx1"/>
+              </a:solidFill>
+            </a:endParaRPr>
+          </a:p>
+        </p:txBody>
+      </p:sp>
+      <p:sp>
+        <p:nvSpPr>
+          <p:cNvPr id="70" name="テキスト ボックス 69">
+            <a:extLst>
+              <a:ext uri="{FF2B5EF4-FFF2-40B4-BE49-F238E27FC236}">
+                <a16:creationId xmlns:a16="http://schemas.microsoft.com/office/drawing/2014/main" id="{AD4E9A71-1DD1-F679-2C27-737E60CA2E84}"/>
+              </a:ext>
+            </a:extLst>
+          </p:cNvPr>
+          <p:cNvSpPr txBox="1"/>
+          <p:nvPr/>
+        </p:nvSpPr>
+        <p:spPr>
+          <a:xfrm>
+            <a:off x="3557709" y="1429691"/>
+            <a:ext cx="1395961" cy="253916"/>
+          </a:xfrm>
+          <a:prstGeom prst="rect">
+            <a:avLst/>
+          </a:prstGeom>
+          <a:noFill/>
+        </p:spPr>
+        <p:txBody>
+          <a:bodyPr wrap="square">
+            <a:spAutoFit/>
+          </a:bodyPr>
+          <a:lstStyle/>
+          <a:p>
+            <a:r>
+              <a:rPr lang="ja-JP" altLang="en-US" sz="1050"/>
+              <a:t>One VLIW instruction</a:t>
+            </a:r>
+          </a:p>
+        </p:txBody>
+      </p:sp>
     </p:spTree>
     <p:extLst>
       <p:ext uri="{BB962C8B-B14F-4D97-AF65-F5344CB8AC3E}">
@@ -8932,7 +8887,7 @@
             <a:p>
               <a:pPr algn="ctr"/>
               <a:r>
-                <a:rPr lang="en-US" altLang="ja-JP" dirty="0" smtClean="0">
+                <a:rPr lang="en-US" altLang="ja-JP" dirty="0">
                   <a:solidFill>
                     <a:schemeClr val="tx1"/>
                   </a:solidFill>
@@ -8998,7 +8953,7 @@
             <a:p>
               <a:pPr algn="ctr"/>
               <a:r>
-                <a:rPr kumimoji="1" lang="en-US" altLang="ja-JP" dirty="0" smtClean="0">
+                <a:rPr kumimoji="1" lang="en-US" altLang="ja-JP" dirty="0">
                   <a:solidFill>
                     <a:schemeClr val="tx1"/>
                   </a:solidFill>
@@ -9064,7 +9019,7 @@
             <a:p>
               <a:pPr algn="ctr"/>
               <a:r>
-                <a:rPr lang="en-US" altLang="ja-JP" dirty="0" smtClean="0">
+                <a:rPr lang="en-US" altLang="ja-JP" dirty="0">
                   <a:solidFill>
                     <a:schemeClr val="tx1"/>
                   </a:solidFill>
@@ -9209,7 +9164,7 @@
             <a:p>
               <a:pPr algn="ctr"/>
               <a:r>
-                <a:rPr lang="en-US" altLang="ja-JP" dirty="0" smtClean="0">
+                <a:rPr lang="en-US" altLang="ja-JP" dirty="0">
                   <a:solidFill>
                     <a:schemeClr val="tx1"/>
                   </a:solidFill>
@@ -9275,7 +9230,7 @@
             <a:p>
               <a:pPr algn="ctr"/>
               <a:r>
-                <a:rPr kumimoji="1" lang="en-US" altLang="ja-JP" dirty="0" smtClean="0">
+                <a:rPr kumimoji="1" lang="en-US" altLang="ja-JP" dirty="0">
                   <a:solidFill>
                     <a:schemeClr val="tx1"/>
                   </a:solidFill>
@@ -9341,7 +9296,7 @@
             <a:p>
               <a:pPr algn="ctr"/>
               <a:r>
-                <a:rPr lang="en-US" altLang="ja-JP" dirty="0" smtClean="0">
+                <a:rPr lang="en-US" altLang="ja-JP" dirty="0">
                   <a:solidFill>
                     <a:schemeClr val="tx1"/>
                   </a:solidFill>
@@ -11286,7 +11241,7 @@
                 <a:defRPr/>
               </a:pPr>
               <a:r>
-                <a:rPr lang="en-US" altLang="ja-JP" dirty="0" smtClean="0">
+                <a:rPr lang="en-US" altLang="ja-JP" dirty="0">
                   <a:solidFill>
                     <a:schemeClr val="tx1"/>
                   </a:solidFill>
@@ -11354,7 +11309,7 @@
                 <a:defRPr/>
               </a:pPr>
               <a:r>
-                <a:rPr kumimoji="1" lang="en-US" altLang="ja-JP" dirty="0" smtClean="0">
+                <a:rPr kumimoji="1" lang="en-US" altLang="ja-JP" dirty="0">
                   <a:solidFill>
                     <a:schemeClr val="tx1"/>
                   </a:solidFill>
@@ -11422,7 +11377,7 @@
                 <a:defRPr/>
               </a:pPr>
               <a:r>
-                <a:rPr lang="en-US" altLang="ja-JP" dirty="0" smtClean="0">
+                <a:rPr lang="en-US" altLang="ja-JP" dirty="0">
                   <a:solidFill>
                     <a:schemeClr val="tx1"/>
                   </a:solidFill>
@@ -11569,7 +11524,7 @@
                 <a:defRPr/>
               </a:pPr>
               <a:r>
-                <a:rPr lang="en-US" altLang="ja-JP" dirty="0" smtClean="0">
+                <a:rPr lang="en-US" altLang="ja-JP" dirty="0">
                   <a:solidFill>
                     <a:schemeClr val="tx1"/>
                   </a:solidFill>
@@ -11637,7 +11592,7 @@
                 <a:defRPr/>
               </a:pPr>
               <a:r>
-                <a:rPr kumimoji="1" lang="en-US" altLang="ja-JP" dirty="0" smtClean="0">
+                <a:rPr kumimoji="1" lang="en-US" altLang="ja-JP" dirty="0">
                   <a:solidFill>
                     <a:schemeClr val="tx1"/>
                   </a:solidFill>
@@ -11705,7 +11660,7 @@
                 <a:defRPr/>
               </a:pPr>
               <a:r>
-                <a:rPr lang="en-US" altLang="ja-JP" dirty="0" smtClean="0">
+                <a:rPr lang="en-US" altLang="ja-JP" dirty="0">
                   <a:solidFill>
                     <a:schemeClr val="tx1"/>
                   </a:solidFill>
